--- a/组会方案汇报.pptx
+++ b/组会方案汇报.pptx
@@ -5,19 +5,18 @@
     <p:sldMasterId id="2147483648" r:id="rId1"/>
   </p:sldMasterIdLst>
   <p:notesMasterIdLst>
-    <p:notesMasterId r:id="rId6"/>
+    <p:notesMasterId r:id="rId5"/>
   </p:notesMasterIdLst>
   <p:sldIdLst>
     <p:sldId id="256" r:id="rId3"/>
-    <p:sldId id="257" r:id="rId4"/>
-    <p:sldId id="259" r:id="rId5"/>
-    <p:sldId id="260" r:id="rId7"/>
-    <p:sldId id="261" r:id="rId8"/>
-    <p:sldId id="262" r:id="rId9"/>
-    <p:sldId id="263" r:id="rId10"/>
-    <p:sldId id="264" r:id="rId11"/>
-    <p:sldId id="266" r:id="rId12"/>
-    <p:sldId id="265" r:id="rId13"/>
+    <p:sldId id="259" r:id="rId4"/>
+    <p:sldId id="260" r:id="rId6"/>
+    <p:sldId id="261" r:id="rId7"/>
+    <p:sldId id="262" r:id="rId8"/>
+    <p:sldId id="263" r:id="rId9"/>
+    <p:sldId id="264" r:id="rId10"/>
+    <p:sldId id="266" r:id="rId11"/>
+    <p:sldId id="265" r:id="rId12"/>
   </p:sldIdLst>
   <p:sldSz cx="12192000" cy="6858000"/>
   <p:notesSz cx="6858000" cy="9144000"/>
@@ -3954,7 +3953,7 @@
 </p:sld>
 </file>
 
-<file path=ppt/slides/slide10.xml><?xml version="1.0" encoding="utf-8"?>
+<file path=ppt/slides/slide2.xml><?xml version="1.0" encoding="utf-8"?>
 <p:sld xmlns:a="http://schemas.openxmlformats.org/drawingml/2006/main" xmlns:r="http://schemas.openxmlformats.org/officeDocument/2006/relationships" xmlns:p="http://schemas.openxmlformats.org/presentationml/2006/main">
   <p:cSld>
     <p:spTree>
@@ -3971,1024 +3970,9 @@
           <a:chExt cx="0" cy="0"/>
         </a:xfrm>
       </p:grpSpPr>
-      <p:sp>
-        <p:nvSpPr>
-          <p:cNvPr id="2" name="Text 0"/>
-          <p:cNvSpPr/>
-          <p:nvPr/>
-        </p:nvSpPr>
-        <p:spPr>
-          <a:xfrm>
-            <a:off x="530352" y="384048"/>
-            <a:ext cx="7223760" cy="384048"/>
-          </a:xfrm>
-          <a:prstGeom prst="rect">
-            <a:avLst/>
-          </a:prstGeom>
-          <a:noFill/>
-        </p:spPr>
-        <p:txBody>
-          <a:bodyPr wrap="square" lIns="0" tIns="0" rIns="0" bIns="0" rtlCol="0" anchor="ctr"/>
-          <a:lstStyle/>
-          <a:p>
-            <a:pPr marL="0" indent="0">
-              <a:buNone/>
-            </a:pPr>
-            <a:r>
-              <a:rPr lang="en-US" sz="2300" b="1" dirty="0">
-                <a:solidFill>
-                  <a:srgbClr val="0B1F3A"/>
-                </a:solidFill>
-                <a:latin typeface="微软雅黑" panose="020B0503020204020204" charset="-122"/>
-                <a:ea typeface="微软雅黑" panose="020B0503020204020204" charset="-122"/>
-                <a:cs typeface="微软雅黑" panose="020B0503020204020204" pitchFamily="34" charset="-120"/>
-              </a:rPr>
-              <a:t>06  汇报结论：从展示小车，升级为展示交通系统能力</a:t>
-            </a:r>
-            <a:endParaRPr lang="en-US" sz="2300" dirty="0"/>
-          </a:p>
-        </p:txBody>
-      </p:sp>
-      <p:sp>
-        <p:nvSpPr>
-          <p:cNvPr id="4" name="Shape 2"/>
-          <p:cNvSpPr/>
-          <p:nvPr/>
-        </p:nvSpPr>
-        <p:spPr>
-          <a:xfrm>
-            <a:off x="530352" y="1106424"/>
-            <a:ext cx="10927080" cy="0"/>
-          </a:xfrm>
-          <a:prstGeom prst="line">
-            <a:avLst/>
-          </a:prstGeom>
-          <a:noFill/>
-          <a:ln w="10160">
-            <a:solidFill>
-              <a:srgbClr val="D9E3F0"/>
-            </a:solidFill>
-            <a:prstDash val="solid"/>
-          </a:ln>
-        </p:spPr>
-      </p:sp>
-      <p:sp>
-        <p:nvSpPr>
-          <p:cNvPr id="5" name="Text 3"/>
-          <p:cNvSpPr/>
-          <p:nvPr/>
-        </p:nvSpPr>
-        <p:spPr>
-          <a:xfrm>
-            <a:off x="777240" y="1444752"/>
-            <a:ext cx="1645920" cy="274320"/>
-          </a:xfrm>
-          <a:prstGeom prst="rect">
-            <a:avLst/>
-          </a:prstGeom>
-          <a:noFill/>
-        </p:spPr>
-        <p:txBody>
-          <a:bodyPr wrap="square" lIns="0" tIns="0" rIns="0" bIns="0" rtlCol="0" anchor="ctr"/>
-          <a:lstStyle/>
-          <a:p>
-            <a:pPr marL="0" indent="0">
-              <a:buNone/>
-            </a:pPr>
-            <a:r>
-              <a:rPr lang="en-US" sz="1500" b="1" dirty="0">
-                <a:solidFill>
-                  <a:srgbClr val="0B1F3A"/>
-                </a:solidFill>
-              </a:rPr>
-              <a:t>项目价值</a:t>
-            </a:r>
-            <a:endParaRPr lang="en-US" sz="1500" dirty="0"/>
-          </a:p>
-        </p:txBody>
-      </p:sp>
-      <p:sp>
-        <p:nvSpPr>
-          <p:cNvPr id="8" name="Text 6"/>
-          <p:cNvSpPr/>
-          <p:nvPr/>
-        </p:nvSpPr>
-        <p:spPr>
-          <a:xfrm>
-            <a:off x="868680" y="2624328"/>
-            <a:ext cx="1097280" cy="219456"/>
-          </a:xfrm>
-          <a:prstGeom prst="rect">
-            <a:avLst/>
-          </a:prstGeom>
-          <a:noFill/>
-        </p:spPr>
-        <p:txBody>
-          <a:bodyPr wrap="square" lIns="0" tIns="0" rIns="0" bIns="0" rtlCol="0" anchor="ctr"/>
-          <a:lstStyle/>
-          <a:p>
-            <a:pPr marL="0" indent="0">
-              <a:buNone/>
-            </a:pPr>
-            <a:r>
-              <a:rPr lang="en-US" sz="1140" b="1" dirty="0">
-                <a:solidFill>
-                  <a:srgbClr val="116DFF"/>
-                </a:solidFill>
-              </a:rPr>
-              <a:t>应用价值</a:t>
-            </a:r>
-            <a:endParaRPr lang="en-US" sz="1140" dirty="0"/>
-          </a:p>
-        </p:txBody>
-      </p:sp>
-      <p:sp>
-        <p:nvSpPr>
-          <p:cNvPr id="9" name="Text 7"/>
-          <p:cNvSpPr/>
-          <p:nvPr/>
-        </p:nvSpPr>
-        <p:spPr>
-          <a:xfrm>
-            <a:off x="1965960" y="2624328"/>
-            <a:ext cx="4434840" cy="246888"/>
-          </a:xfrm>
-          <a:prstGeom prst="rect">
-            <a:avLst/>
-          </a:prstGeom>
-          <a:noFill/>
-        </p:spPr>
-        <p:txBody>
-          <a:bodyPr wrap="square" lIns="0" tIns="0" rIns="0" bIns="0" rtlCol="0" anchor="ctr">
-            <a:normAutofit/>
-          </a:bodyPr>
-          <a:lstStyle/>
-          <a:p>
-            <a:pPr marL="0" indent="0">
-              <a:buNone/>
-            </a:pPr>
-            <a:r>
-              <a:rPr lang="en-US" sz="1120" dirty="0">
-                <a:solidFill>
-                  <a:srgbClr val="1E293B"/>
-                </a:solidFill>
-              </a:rPr>
-              <a:t>可延伸到校园、医院、园区、小区出入口和城市复杂路口。</a:t>
-            </a:r>
-            <a:endParaRPr lang="en-US" sz="1120" dirty="0"/>
-          </a:p>
-        </p:txBody>
-      </p:sp>
-      <p:sp>
-        <p:nvSpPr>
-          <p:cNvPr id="10" name="Text 8"/>
-          <p:cNvSpPr/>
-          <p:nvPr/>
-        </p:nvSpPr>
-        <p:spPr>
-          <a:xfrm>
-            <a:off x="868680" y="3374136"/>
-            <a:ext cx="1097280" cy="219456"/>
-          </a:xfrm>
-          <a:prstGeom prst="rect">
-            <a:avLst/>
-          </a:prstGeom>
-          <a:noFill/>
-        </p:spPr>
-        <p:txBody>
-          <a:bodyPr wrap="square" lIns="0" tIns="0" rIns="0" bIns="0" rtlCol="0" anchor="ctr"/>
-          <a:lstStyle/>
-          <a:p>
-            <a:pPr marL="0" indent="0">
-              <a:buNone/>
-            </a:pPr>
-            <a:r>
-              <a:rPr lang="en-US" sz="1140" b="1" dirty="0">
-                <a:solidFill>
-                  <a:srgbClr val="116DFF"/>
-                </a:solidFill>
-              </a:rPr>
-              <a:t>技术价值</a:t>
-            </a:r>
-            <a:endParaRPr lang="en-US" sz="1140" dirty="0"/>
-          </a:p>
-        </p:txBody>
-      </p:sp>
-      <p:sp>
-        <p:nvSpPr>
-          <p:cNvPr id="11" name="Text 9"/>
-          <p:cNvSpPr/>
-          <p:nvPr/>
-        </p:nvSpPr>
-        <p:spPr>
-          <a:xfrm>
-            <a:off x="1965960" y="3374136"/>
-            <a:ext cx="4434840" cy="246888"/>
-          </a:xfrm>
-          <a:prstGeom prst="rect">
-            <a:avLst/>
-          </a:prstGeom>
-          <a:noFill/>
-        </p:spPr>
-        <p:txBody>
-          <a:bodyPr wrap="square" lIns="0" tIns="0" rIns="0" bIns="0" rtlCol="0" anchor="ctr">
-            <a:normAutofit/>
-          </a:bodyPr>
-          <a:lstStyle/>
-          <a:p>
-            <a:pPr marL="0" indent="0">
-              <a:buNone/>
-            </a:pPr>
-            <a:r>
-              <a:rPr lang="en-US" sz="1120" dirty="0">
-                <a:solidFill>
-                  <a:srgbClr val="1E293B"/>
-                </a:solidFill>
-              </a:rPr>
-              <a:t>融合路侧感知、边缘AI、V2X、数字孪生与车辆控制。</a:t>
-            </a:r>
-            <a:endParaRPr lang="en-US" sz="1120" dirty="0"/>
-          </a:p>
-        </p:txBody>
-      </p:sp>
-      <p:sp>
-        <p:nvSpPr>
-          <p:cNvPr id="12" name="Text 10"/>
-          <p:cNvSpPr/>
-          <p:nvPr/>
-        </p:nvSpPr>
-        <p:spPr>
-          <a:xfrm>
-            <a:off x="868680" y="4123944"/>
-            <a:ext cx="1097280" cy="219456"/>
-          </a:xfrm>
-          <a:prstGeom prst="rect">
-            <a:avLst/>
-          </a:prstGeom>
-          <a:noFill/>
-        </p:spPr>
-        <p:txBody>
-          <a:bodyPr wrap="square" lIns="0" tIns="0" rIns="0" bIns="0" rtlCol="0" anchor="ctr"/>
-          <a:lstStyle/>
-          <a:p>
-            <a:pPr marL="0" indent="0">
-              <a:buNone/>
-            </a:pPr>
-            <a:r>
-              <a:rPr lang="en-US" sz="1140" b="1" dirty="0">
-                <a:solidFill>
-                  <a:srgbClr val="116DFF"/>
-                </a:solidFill>
-              </a:rPr>
-              <a:t>落地价值</a:t>
-            </a:r>
-            <a:endParaRPr lang="en-US" sz="1140" dirty="0"/>
-          </a:p>
-        </p:txBody>
-      </p:sp>
-      <p:sp>
-        <p:nvSpPr>
-          <p:cNvPr id="13" name="Text 11"/>
-          <p:cNvSpPr/>
-          <p:nvPr/>
-        </p:nvSpPr>
-        <p:spPr>
-          <a:xfrm>
-            <a:off x="1965960" y="4123944"/>
-            <a:ext cx="4434840" cy="246888"/>
-          </a:xfrm>
-          <a:prstGeom prst="rect">
-            <a:avLst/>
-          </a:prstGeom>
-          <a:noFill/>
-        </p:spPr>
-        <p:txBody>
-          <a:bodyPr wrap="square" lIns="0" tIns="0" rIns="0" bIns="0" rtlCol="0" anchor="ctr">
-            <a:normAutofit/>
-          </a:bodyPr>
-          <a:lstStyle/>
-          <a:p>
-            <a:pPr marL="0" indent="0">
-              <a:buNone/>
-            </a:pPr>
-            <a:r>
-              <a:rPr lang="en-US" sz="1120" dirty="0">
-                <a:solidFill>
-                  <a:srgbClr val="1E293B"/>
-                </a:solidFill>
-              </a:rPr>
-              <a:t>现有沙盘可复用，新增设备成本可控，Demo闭环清晰。</a:t>
-            </a:r>
-            <a:endParaRPr lang="en-US" sz="1120" dirty="0"/>
-          </a:p>
-        </p:txBody>
-      </p:sp>
-      <p:sp>
-        <p:nvSpPr>
-          <p:cNvPr id="14" name="Shape 12"/>
-          <p:cNvSpPr/>
-          <p:nvPr/>
-        </p:nvSpPr>
-        <p:spPr>
-          <a:xfrm>
-            <a:off x="6629400" y="1417320"/>
-            <a:ext cx="0" cy="4114800"/>
-          </a:xfrm>
-          <a:prstGeom prst="line">
-            <a:avLst/>
-          </a:prstGeom>
-          <a:noFill/>
-          <a:ln w="12700">
-            <a:solidFill>
-              <a:srgbClr val="D7E3F4"/>
-            </a:solidFill>
-            <a:prstDash val="solid"/>
-          </a:ln>
-        </p:spPr>
-      </p:sp>
-      <p:sp>
-        <p:nvSpPr>
-          <p:cNvPr id="15" name="Text 13"/>
-          <p:cNvSpPr/>
-          <p:nvPr/>
-        </p:nvSpPr>
-        <p:spPr>
-          <a:xfrm>
-            <a:off x="6995160" y="1444752"/>
-            <a:ext cx="1828800" cy="274320"/>
-          </a:xfrm>
-          <a:prstGeom prst="rect">
-            <a:avLst/>
-          </a:prstGeom>
-          <a:noFill/>
-        </p:spPr>
-        <p:txBody>
-          <a:bodyPr wrap="square" lIns="0" tIns="0" rIns="0" bIns="0" rtlCol="0" anchor="ctr"/>
-          <a:lstStyle/>
-          <a:p>
-            <a:pPr marL="0" indent="0">
-              <a:buNone/>
-            </a:pPr>
-            <a:r>
-              <a:rPr lang="en-US" sz="1500" b="1" dirty="0">
-                <a:solidFill>
-                  <a:srgbClr val="0B1F3A"/>
-                </a:solidFill>
-              </a:rPr>
-              <a:t>三阶段推进</a:t>
-            </a:r>
-            <a:endParaRPr lang="en-US" sz="1500" dirty="0"/>
-          </a:p>
-        </p:txBody>
-      </p:sp>
-      <p:sp>
-        <p:nvSpPr>
-          <p:cNvPr id="16" name="Text 14"/>
-          <p:cNvSpPr/>
-          <p:nvPr/>
-        </p:nvSpPr>
-        <p:spPr>
-          <a:xfrm>
-            <a:off x="7040880" y="1874520"/>
-            <a:ext cx="731520" cy="210312"/>
-          </a:xfrm>
-          <a:prstGeom prst="rect">
-            <a:avLst/>
-          </a:prstGeom>
-          <a:solidFill>
-            <a:srgbClr val="13A86B"/>
-          </a:solidFill>
-        </p:spPr>
-        <p:txBody>
-          <a:bodyPr wrap="square" lIns="254" tIns="254" rIns="254" bIns="254" rtlCol="0" anchor="ctr"/>
-          <a:lstStyle/>
-          <a:p>
-            <a:pPr marL="0" indent="0" algn="ctr">
-              <a:buNone/>
-            </a:pPr>
-            <a:r>
-              <a:rPr lang="en-US" sz="1050" b="1" dirty="0">
-                <a:solidFill>
-                  <a:srgbClr val="FFFFFF"/>
-                </a:solidFill>
-              </a:rPr>
-              <a:t>阶段1</a:t>
-            </a:r>
-            <a:endParaRPr lang="en-US" sz="1050" dirty="0"/>
-          </a:p>
-        </p:txBody>
-      </p:sp>
-      <p:sp>
-        <p:nvSpPr>
-          <p:cNvPr id="17" name="Text 15"/>
-          <p:cNvSpPr/>
-          <p:nvPr/>
-        </p:nvSpPr>
-        <p:spPr>
-          <a:xfrm>
-            <a:off x="7955280" y="1874520"/>
-            <a:ext cx="1828800" cy="201168"/>
-          </a:xfrm>
-          <a:prstGeom prst="rect">
-            <a:avLst/>
-          </a:prstGeom>
-          <a:noFill/>
-        </p:spPr>
-        <p:txBody>
-          <a:bodyPr wrap="square" lIns="0" tIns="0" rIns="0" bIns="0" rtlCol="0" anchor="ctr"/>
-          <a:lstStyle/>
-          <a:p>
-            <a:pPr marL="0" indent="0">
-              <a:buNone/>
-            </a:pPr>
-            <a:r>
-              <a:rPr lang="en-US" sz="1160" b="1" dirty="0">
-                <a:solidFill>
-                  <a:srgbClr val="1E293B"/>
-                </a:solidFill>
-              </a:rPr>
-              <a:t>稳定演示</a:t>
-            </a:r>
-            <a:endParaRPr lang="en-US" sz="1160" dirty="0"/>
-          </a:p>
-        </p:txBody>
-      </p:sp>
-      <p:sp>
-        <p:nvSpPr>
-          <p:cNvPr id="18" name="Text 16"/>
-          <p:cNvSpPr/>
-          <p:nvPr/>
-        </p:nvSpPr>
-        <p:spPr>
-          <a:xfrm>
-            <a:off x="7955280" y="2194560"/>
-            <a:ext cx="2926080" cy="320040"/>
-          </a:xfrm>
-          <a:prstGeom prst="rect">
-            <a:avLst/>
-          </a:prstGeom>
-          <a:noFill/>
-        </p:spPr>
-        <p:txBody>
-          <a:bodyPr wrap="square" lIns="0" tIns="0" rIns="0" bIns="0" rtlCol="0" anchor="ctr">
-            <a:normAutofit/>
-          </a:bodyPr>
-          <a:lstStyle/>
-          <a:p>
-            <a:pPr marL="0" indent="0">
-              <a:buNone/>
-            </a:pPr>
-            <a:r>
-              <a:rPr lang="en-US" sz="910" dirty="0">
-                <a:solidFill>
-                  <a:srgbClr val="67758A"/>
-                </a:solidFill>
-              </a:rPr>
-              <a:t>摄像头识别 + Wi‑Fi/MQTT模拟V2X + 小车减速</a:t>
-            </a:r>
-            <a:endParaRPr lang="en-US" sz="910" dirty="0"/>
-          </a:p>
-        </p:txBody>
-      </p:sp>
-      <p:sp>
-        <p:nvSpPr>
-          <p:cNvPr id="19" name="Text 17"/>
-          <p:cNvSpPr/>
-          <p:nvPr/>
-        </p:nvSpPr>
-        <p:spPr>
-          <a:xfrm>
-            <a:off x="7040880" y="2971800"/>
-            <a:ext cx="731520" cy="210312"/>
-          </a:xfrm>
-          <a:prstGeom prst="rect">
-            <a:avLst/>
-          </a:prstGeom>
-          <a:solidFill>
-            <a:srgbClr val="116DFF"/>
-          </a:solidFill>
-        </p:spPr>
-        <p:txBody>
-          <a:bodyPr wrap="square" lIns="254" tIns="254" rIns="254" bIns="254" rtlCol="0" anchor="ctr"/>
-          <a:lstStyle/>
-          <a:p>
-            <a:pPr marL="0" indent="0" algn="ctr">
-              <a:buNone/>
-            </a:pPr>
-            <a:r>
-              <a:rPr lang="en-US" sz="1050" b="1" dirty="0">
-                <a:solidFill>
-                  <a:srgbClr val="FFFFFF"/>
-                </a:solidFill>
-              </a:rPr>
-              <a:t>阶段2</a:t>
-            </a:r>
-            <a:endParaRPr lang="en-US" sz="1050" dirty="0"/>
-          </a:p>
-        </p:txBody>
-      </p:sp>
-      <p:sp>
-        <p:nvSpPr>
-          <p:cNvPr id="20" name="Text 18"/>
-          <p:cNvSpPr/>
-          <p:nvPr/>
-        </p:nvSpPr>
-        <p:spPr>
-          <a:xfrm>
-            <a:off x="7955280" y="2971800"/>
-            <a:ext cx="1828800" cy="201168"/>
-          </a:xfrm>
-          <a:prstGeom prst="rect">
-            <a:avLst/>
-          </a:prstGeom>
-          <a:noFill/>
-        </p:spPr>
-        <p:txBody>
-          <a:bodyPr wrap="square" lIns="0" tIns="0" rIns="0" bIns="0" rtlCol="0" anchor="ctr"/>
-          <a:lstStyle/>
-          <a:p>
-            <a:pPr marL="0" indent="0">
-              <a:buNone/>
-            </a:pPr>
-            <a:r>
-              <a:rPr lang="en-US" sz="1160" b="1" dirty="0">
-                <a:solidFill>
-                  <a:srgbClr val="1E293B"/>
-                </a:solidFill>
-              </a:rPr>
-              <a:t>真实设备增强</a:t>
-            </a:r>
-            <a:endParaRPr lang="en-US" sz="1160" dirty="0"/>
-          </a:p>
-        </p:txBody>
-      </p:sp>
-      <p:sp>
-        <p:nvSpPr>
-          <p:cNvPr id="21" name="Text 19"/>
-          <p:cNvSpPr/>
-          <p:nvPr/>
-        </p:nvSpPr>
-        <p:spPr>
-          <a:xfrm>
-            <a:off x="7955280" y="3291840"/>
-            <a:ext cx="2926080" cy="320040"/>
-          </a:xfrm>
-          <a:prstGeom prst="rect">
-            <a:avLst/>
-          </a:prstGeom>
-          <a:noFill/>
-        </p:spPr>
-        <p:txBody>
-          <a:bodyPr wrap="square" lIns="0" tIns="0" rIns="0" bIns="0" rtlCol="0" anchor="ctr">
-            <a:normAutofit/>
-          </a:bodyPr>
-          <a:lstStyle/>
-          <a:p>
-            <a:pPr marL="0" indent="0">
-              <a:buNone/>
-            </a:pPr>
-            <a:r>
-              <a:rPr lang="en-US" sz="910" dirty="0">
-                <a:solidFill>
-                  <a:srgbClr val="67758A"/>
-                </a:solidFill>
-              </a:rPr>
-              <a:t>接入RSU/C‑V2X、优化大屏UI、加入多目标跟踪</a:t>
-            </a:r>
-            <a:endParaRPr lang="en-US" sz="910" dirty="0"/>
-          </a:p>
-        </p:txBody>
-      </p:sp>
-      <p:sp>
-        <p:nvSpPr>
-          <p:cNvPr id="22" name="Text 20"/>
-          <p:cNvSpPr/>
-          <p:nvPr/>
-        </p:nvSpPr>
-        <p:spPr>
-          <a:xfrm>
-            <a:off x="7040880" y="4069080"/>
-            <a:ext cx="731520" cy="210312"/>
-          </a:xfrm>
-          <a:prstGeom prst="rect">
-            <a:avLst/>
-          </a:prstGeom>
-          <a:solidFill>
-            <a:srgbClr val="0B1F3A"/>
-          </a:solidFill>
-        </p:spPr>
-        <p:txBody>
-          <a:bodyPr wrap="square" lIns="254" tIns="254" rIns="254" bIns="254" rtlCol="0" anchor="ctr"/>
-          <a:lstStyle/>
-          <a:p>
-            <a:pPr marL="0" indent="0" algn="ctr">
-              <a:buNone/>
-            </a:pPr>
-            <a:r>
-              <a:rPr lang="en-US" sz="1050" b="1" dirty="0">
-                <a:solidFill>
-                  <a:srgbClr val="FFFFFF"/>
-                </a:solidFill>
-              </a:rPr>
-              <a:t>阶段3</a:t>
-            </a:r>
-            <a:endParaRPr lang="en-US" sz="1050" dirty="0"/>
-          </a:p>
-        </p:txBody>
-      </p:sp>
-      <p:sp>
-        <p:nvSpPr>
-          <p:cNvPr id="23" name="Text 21"/>
-          <p:cNvSpPr/>
-          <p:nvPr/>
-        </p:nvSpPr>
-        <p:spPr>
-          <a:xfrm>
-            <a:off x="7955280" y="4069080"/>
-            <a:ext cx="1828800" cy="201168"/>
-          </a:xfrm>
-          <a:prstGeom prst="rect">
-            <a:avLst/>
-          </a:prstGeom>
-          <a:noFill/>
-        </p:spPr>
-        <p:txBody>
-          <a:bodyPr wrap="square" lIns="0" tIns="0" rIns="0" bIns="0" rtlCol="0" anchor="ctr"/>
-          <a:lstStyle/>
-          <a:p>
-            <a:pPr marL="0" indent="0">
-              <a:buNone/>
-            </a:pPr>
-            <a:r>
-              <a:rPr lang="en-US" sz="1160" b="1" dirty="0">
-                <a:solidFill>
-                  <a:srgbClr val="1E293B"/>
-                </a:solidFill>
-              </a:rPr>
-              <a:t>扩展新场景</a:t>
-            </a:r>
-            <a:endParaRPr lang="en-US" sz="1160" dirty="0"/>
-          </a:p>
-        </p:txBody>
-      </p:sp>
-      <p:sp>
-        <p:nvSpPr>
-          <p:cNvPr id="24" name="Text 22"/>
-          <p:cNvSpPr/>
-          <p:nvPr/>
-        </p:nvSpPr>
-        <p:spPr>
-          <a:xfrm>
-            <a:off x="7955280" y="4389120"/>
-            <a:ext cx="2926080" cy="320040"/>
-          </a:xfrm>
-          <a:prstGeom prst="rect">
-            <a:avLst/>
-          </a:prstGeom>
-          <a:noFill/>
-        </p:spPr>
-        <p:txBody>
-          <a:bodyPr wrap="square" lIns="0" tIns="0" rIns="0" bIns="0" rtlCol="0" anchor="ctr">
-            <a:normAutofit/>
-          </a:bodyPr>
-          <a:lstStyle/>
-          <a:p>
-            <a:pPr marL="0" indent="0">
-              <a:buNone/>
-            </a:pPr>
-            <a:r>
-              <a:rPr lang="en-US" sz="910" dirty="0">
-                <a:solidFill>
-                  <a:srgbClr val="67758A"/>
-                </a:solidFill>
-              </a:rPr>
-              <a:t>救护车绿波、学校路口、电动车右转冲突预警</a:t>
-            </a:r>
-            <a:endParaRPr lang="en-US" sz="910" dirty="0"/>
-          </a:p>
-        </p:txBody>
-      </p:sp>
-      <p:sp>
-        <p:nvSpPr>
-          <p:cNvPr id="25" name="Shape 23"/>
-          <p:cNvSpPr/>
-          <p:nvPr/>
-        </p:nvSpPr>
-        <p:spPr>
-          <a:xfrm>
-            <a:off x="777240" y="5806440"/>
-            <a:ext cx="10698480" cy="411480"/>
-          </a:xfrm>
-          <a:prstGeom prst="roundRect">
-            <a:avLst>
-              <a:gd name="adj" fmla="val 17778"/>
-            </a:avLst>
-          </a:prstGeom>
-          <a:solidFill>
-            <a:srgbClr val="0B1F3A"/>
-          </a:solidFill>
-          <a:ln w="12700">
-            <a:solidFill>
-              <a:srgbClr val="0B1F3A"/>
-            </a:solidFill>
-            <a:prstDash val="solid"/>
-          </a:ln>
-        </p:spPr>
-      </p:sp>
-      <p:sp>
-        <p:nvSpPr>
-          <p:cNvPr id="26" name="Text 24"/>
-          <p:cNvSpPr/>
-          <p:nvPr/>
-        </p:nvSpPr>
-        <p:spPr>
-          <a:xfrm>
-            <a:off x="960120" y="5925312"/>
-            <a:ext cx="10332720" cy="164592"/>
-          </a:xfrm>
-          <a:prstGeom prst="rect">
-            <a:avLst/>
-          </a:prstGeom>
-          <a:noFill/>
-        </p:spPr>
-        <p:txBody>
-          <a:bodyPr wrap="square" lIns="0" tIns="0" rIns="0" bIns="0" rtlCol="0" anchor="ctr"/>
-          <a:lstStyle/>
-          <a:p>
-            <a:pPr marL="0" indent="0" algn="ctr">
-              <a:buNone/>
-            </a:pPr>
-            <a:r>
-              <a:rPr lang="en-US" sz="1120" b="1" dirty="0">
-                <a:solidFill>
-                  <a:srgbClr val="FFFFFF"/>
-                </a:solidFill>
-              </a:rPr>
-              <a:t>结论：以“鬼探头”高风险场景为切入点，把现有沙盘升级为车路协同安全预警验证平台。</a:t>
-            </a:r>
-            <a:endParaRPr lang="en-US" sz="1120" dirty="0"/>
-          </a:p>
-        </p:txBody>
-      </p:sp>
-      <p:sp>
-        <p:nvSpPr>
-          <p:cNvPr id="27" name="Text 25"/>
-          <p:cNvSpPr/>
-          <p:nvPr/>
-        </p:nvSpPr>
-        <p:spPr>
-          <a:xfrm>
-            <a:off x="566928" y="6519672"/>
-            <a:ext cx="7132320" cy="164592"/>
-          </a:xfrm>
-          <a:prstGeom prst="rect">
-            <a:avLst/>
-          </a:prstGeom>
-          <a:noFill/>
-        </p:spPr>
-        <p:txBody>
-          <a:bodyPr wrap="square" lIns="0" tIns="0" rIns="0" bIns="0" rtlCol="0" anchor="ctr"/>
-          <a:lstStyle/>
-          <a:p>
-            <a:pPr marL="0" indent="0">
-              <a:buNone/>
-            </a:pPr>
-            <a:r>
-              <a:rPr lang="en-US" sz="650" dirty="0">
-                <a:solidFill>
-                  <a:srgbClr val="8A96A8"/>
-                </a:solidFill>
-              </a:rPr>
-              <a:t>基于车路协同的“鬼探头”协同感知方案</a:t>
-            </a:r>
-            <a:endParaRPr lang="en-US" sz="650" dirty="0"/>
-          </a:p>
-        </p:txBody>
-      </p:sp>
-      <p:sp>
-        <p:nvSpPr>
-          <p:cNvPr id="28" name="Text 26"/>
-          <p:cNvSpPr/>
-          <p:nvPr/>
-        </p:nvSpPr>
-        <p:spPr>
-          <a:xfrm>
-            <a:off x="9784080" y="6519672"/>
-            <a:ext cx="1783080" cy="164592"/>
-          </a:xfrm>
-          <a:prstGeom prst="rect">
-            <a:avLst/>
-          </a:prstGeom>
-          <a:noFill/>
-        </p:spPr>
-        <p:txBody>
-          <a:bodyPr wrap="square" lIns="0" tIns="0" rIns="0" bIns="0" rtlCol="0" anchor="ctr"/>
-          <a:lstStyle/>
-          <a:p>
-            <a:pPr marL="0" indent="0" algn="r">
-              <a:buNone/>
-            </a:pPr>
-            <a:r>
-              <a:rPr lang="en-US" sz="650" dirty="0">
-                <a:solidFill>
-                  <a:srgbClr val="8A96A8"/>
-                </a:solidFill>
-              </a:rPr>
-              <a:t>车辆看不见，路能看见</a:t>
-            </a:r>
-            <a:endParaRPr lang="en-US" sz="650" dirty="0"/>
-          </a:p>
-        </p:txBody>
-      </p:sp>
-    </p:spTree>
-  </p:cSld>
-  <p:clrMapOvr>
-    <a:masterClrMapping/>
-  </p:clrMapOvr>
-</p:sld>
-</file>
-
-<file path=ppt/slides/slide2.xml><?xml version="1.0" encoding="utf-8"?>
-<p:sld xmlns:a="http://schemas.openxmlformats.org/drawingml/2006/main" xmlns:r="http://schemas.openxmlformats.org/officeDocument/2006/relationships" xmlns:p="http://schemas.openxmlformats.org/presentationml/2006/main">
-  <p:cSld>
-    <p:spTree>
-      <p:nvGrpSpPr>
-        <p:cNvPr id="1" name=""/>
-        <p:cNvGrpSpPr/>
-        <p:nvPr/>
-      </p:nvGrpSpPr>
-      <p:grpSpPr/>
-      <p:sp>
-        <p:nvSpPr>
-          <p:cNvPr id="2" name="标题 1"/>
-          <p:cNvSpPr>
-            <a:spLocks noGrp="1"/>
-          </p:cNvSpPr>
-          <p:nvPr>
-            <p:ph type="title"/>
-          </p:nvPr>
-        </p:nvSpPr>
-        <p:spPr/>
-        <p:txBody>
-          <a:bodyPr/>
-          <a:p>
-            <a:r>
-              <a:rPr lang="zh-CN" altLang="en-US"/>
-              <a:t>本周</a:t>
-            </a:r>
-            <a:r>
-              <a:rPr lang="zh-CN" altLang="en-US"/>
-              <a:t>工作</a:t>
-            </a:r>
-            <a:endParaRPr lang="zh-CN" altLang="en-US"/>
-          </a:p>
-        </p:txBody>
-      </p:sp>
-      <p:sp>
-        <p:nvSpPr>
-          <p:cNvPr id="3" name="内容占位符 2"/>
-          <p:cNvSpPr>
-            <a:spLocks noGrp="1"/>
-          </p:cNvSpPr>
-          <p:nvPr>
-            <p:ph idx="1"/>
-          </p:nvPr>
-        </p:nvSpPr>
-        <p:spPr>
-          <a:xfrm>
-            <a:off x="838200" y="1432560"/>
-            <a:ext cx="10515600" cy="4744720"/>
-          </a:xfrm>
-        </p:spPr>
-        <p:txBody>
-          <a:bodyPr>
-            <a:normAutofit lnSpcReduction="20000"/>
-          </a:bodyPr>
-          <a:p>
-            <a:r>
-              <a:rPr lang="zh-CN" altLang="en-US"/>
-              <a:t>一、完成创新联合体申报</a:t>
-            </a:r>
-            <a:r>
-              <a:rPr lang="zh-CN" altLang="en-US"/>
-              <a:t>的初稿撰写（目前剩下参与单位、资金未</a:t>
-            </a:r>
-            <a:r>
-              <a:rPr lang="zh-CN" altLang="en-US"/>
-              <a:t>敲定）</a:t>
-            </a:r>
-            <a:endParaRPr lang="zh-CN" altLang="en-US"/>
-          </a:p>
-          <a:p>
-            <a:r>
-              <a:rPr lang="zh-CN" altLang="en-US"/>
-              <a:t>二、进行论文投稿前的格式与</a:t>
-            </a:r>
-            <a:r>
-              <a:rPr lang="zh-CN" altLang="en-US"/>
-              <a:t>内容修改</a:t>
-            </a:r>
-            <a:endParaRPr lang="zh-CN" altLang="en-US"/>
-          </a:p>
-          <a:p>
-            <a:pPr lvl="1"/>
-            <a:r>
-              <a:rPr lang="en-US" altLang="zh-CN" sz="2400"/>
-              <a:t>1</a:t>
-            </a:r>
-            <a:r>
-              <a:rPr lang="zh-CN" altLang="en-US" sz="2400"/>
-              <a:t>、按照投稿期刊修改</a:t>
-            </a:r>
-            <a:r>
-              <a:rPr lang="zh-CN" altLang="en-US" sz="2400"/>
-              <a:t>论文格式</a:t>
-            </a:r>
-            <a:endParaRPr lang="zh-CN" altLang="en-US" sz="2400"/>
-          </a:p>
-          <a:p>
-            <a:pPr lvl="1"/>
-            <a:r>
-              <a:rPr lang="en-US" altLang="zh-CN" sz="2400"/>
-              <a:t>2</a:t>
-            </a:r>
-            <a:r>
-              <a:rPr lang="zh-CN" altLang="en-US" sz="2400"/>
-              <a:t>、将原本的英文附图翻译成中文附图</a:t>
-            </a:r>
-            <a:endParaRPr lang="zh-CN" altLang="en-US" sz="2400"/>
-          </a:p>
-          <a:p>
-            <a:pPr lvl="1"/>
-            <a:r>
-              <a:rPr lang="en-US" altLang="zh-CN" sz="2400"/>
-              <a:t>3</a:t>
-            </a:r>
-            <a:r>
-              <a:rPr lang="zh-CN" altLang="en-US" sz="2400"/>
-              <a:t>、按照期刊要求修改一些论文</a:t>
-            </a:r>
-            <a:r>
-              <a:rPr lang="zh-CN" altLang="en-US" sz="2400"/>
-              <a:t>内容</a:t>
-            </a:r>
-            <a:endParaRPr lang="zh-CN" altLang="en-US" sz="2400"/>
-          </a:p>
-          <a:p>
-            <a:pPr lvl="1"/>
-            <a:endParaRPr lang="zh-CN" altLang="en-US" sz="2400"/>
-          </a:p>
-          <a:p>
-            <a:pPr lvl="1"/>
-            <a:endParaRPr lang="zh-CN" altLang="en-US" sz="2400"/>
-          </a:p>
-          <a:p>
-            <a:pPr lvl="1"/>
-            <a:endParaRPr lang="en-US" altLang="zh-CN" sz="2400"/>
-          </a:p>
-          <a:p>
-            <a:pPr lvl="1"/>
-            <a:r>
-              <a:rPr lang="en-US" altLang="zh-CN" sz="2400"/>
-              <a:t>4</a:t>
-            </a:r>
-            <a:r>
-              <a:rPr lang="zh-CN" altLang="en-US" sz="2400"/>
-              <a:t>、论文内容的再审查和细微改动</a:t>
-            </a:r>
-            <a:endParaRPr lang="zh-CN" altLang="en-US"/>
-          </a:p>
-          <a:p>
-            <a:r>
-              <a:rPr lang="zh-CN" altLang="en-US"/>
-              <a:t>三、进行国家奖学金的材料提交和</a:t>
-            </a:r>
-            <a:r>
-              <a:rPr lang="en-US" altLang="zh-CN"/>
-              <a:t>ppt</a:t>
-            </a:r>
-            <a:r>
-              <a:rPr lang="zh-CN" altLang="en-US"/>
-              <a:t>制作</a:t>
-            </a:r>
-            <a:endParaRPr lang="zh-CN" altLang="en-US"/>
-          </a:p>
-          <a:p>
-            <a:r>
-              <a:rPr lang="zh-CN" altLang="en-US"/>
-              <a:t>四、思考智慧交通的选题和</a:t>
-            </a:r>
-            <a:r>
-              <a:rPr lang="zh-CN" altLang="en-US"/>
-              <a:t>方案</a:t>
-            </a:r>
-            <a:endParaRPr lang="zh-CN" altLang="en-US"/>
-          </a:p>
-        </p:txBody>
-      </p:sp>
       <p:pic>
         <p:nvPicPr>
-          <p:cNvPr id="4" name="图片 3"/>
+          <p:cNvPr id="2" name="Image 0" descr="/mnt/data/scene_16x9.jpg"/>
           <p:cNvPicPr>
             <a:picLocks noChangeAspect="1"/>
           </p:cNvPicPr>
@@ -5002,14 +3986,257 @@
         </p:blipFill>
         <p:spPr>
           <a:xfrm>
-            <a:off x="1553845" y="3965575"/>
-            <a:ext cx="5715635" cy="551815"/>
+            <a:off x="5559552" y="0"/>
+            <a:ext cx="6629400" cy="6858000"/>
           </a:xfrm>
           <a:prstGeom prst="rect">
             <a:avLst/>
           </a:prstGeom>
         </p:spPr>
       </p:pic>
+      <p:sp>
+        <p:nvSpPr>
+          <p:cNvPr id="3" name="Shape 0"/>
+          <p:cNvSpPr/>
+          <p:nvPr/>
+        </p:nvSpPr>
+        <p:spPr>
+          <a:xfrm>
+            <a:off x="0" y="0"/>
+            <a:ext cx="5532120" cy="6858000"/>
+          </a:xfrm>
+          <a:prstGeom prst="rect">
+            <a:avLst/>
+          </a:prstGeom>
+          <a:solidFill>
+            <a:srgbClr val="FFFFFF"/>
+          </a:solidFill>
+          <a:ln w="12700">
+            <a:solidFill>
+              <a:srgbClr val="FFFFFF">
+                <a:alpha val="0"/>
+              </a:srgbClr>
+            </a:solidFill>
+            <a:prstDash val="solid"/>
+          </a:ln>
+        </p:spPr>
+      </p:sp>
+      <p:sp>
+        <p:nvSpPr>
+          <p:cNvPr id="4" name="Text 1"/>
+          <p:cNvSpPr/>
+          <p:nvPr/>
+        </p:nvSpPr>
+        <p:spPr>
+          <a:xfrm>
+            <a:off x="685800" y="987552"/>
+            <a:ext cx="4297680" cy="347472"/>
+          </a:xfrm>
+          <a:prstGeom prst="rect">
+            <a:avLst/>
+          </a:prstGeom>
+          <a:noFill/>
+        </p:spPr>
+        <p:txBody>
+          <a:bodyPr wrap="square" lIns="0" tIns="0" rIns="0" bIns="0" rtlCol="0" anchor="ctr"/>
+          <a:lstStyle/>
+          <a:p>
+            <a:pPr marL="0" indent="0">
+              <a:buNone/>
+            </a:pPr>
+            <a:r>
+              <a:rPr lang="en-US" sz="1800" b="1" dirty="0">
+                <a:solidFill>
+                  <a:srgbClr val="116DFF"/>
+                </a:solidFill>
+              </a:rPr>
+              <a:t>基于车路协同的</a:t>
+            </a:r>
+            <a:endParaRPr lang="en-US" sz="1800" dirty="0"/>
+          </a:p>
+        </p:txBody>
+      </p:sp>
+      <p:sp>
+        <p:nvSpPr>
+          <p:cNvPr id="5" name="Text 2"/>
+          <p:cNvSpPr/>
+          <p:nvPr/>
+        </p:nvSpPr>
+        <p:spPr>
+          <a:xfrm>
+            <a:off x="685800" y="1417320"/>
+            <a:ext cx="4480560" cy="1234440"/>
+          </a:xfrm>
+          <a:prstGeom prst="rect">
+            <a:avLst/>
+          </a:prstGeom>
+          <a:noFill/>
+        </p:spPr>
+        <p:txBody>
+          <a:bodyPr wrap="square" lIns="0" tIns="0" rIns="0" bIns="0" rtlCol="0" anchor="ctr">
+            <a:normAutofit/>
+          </a:bodyPr>
+          <a:lstStyle/>
+          <a:p>
+            <a:pPr marL="0" indent="0">
+              <a:buNone/>
+            </a:pPr>
+            <a:r>
+              <a:rPr lang="en-US" sz="3400" b="1" dirty="0">
+                <a:solidFill>
+                  <a:srgbClr val="0B1F3A"/>
+                </a:solidFill>
+              </a:rPr>
+              <a:t>“鬼探头”</a:t>
+            </a:r>
+            <a:endParaRPr lang="en-US" sz="3400" dirty="0"/>
+          </a:p>
+          <a:p>
+            <a:pPr marL="0" indent="0">
+              <a:buNone/>
+            </a:pPr>
+            <a:r>
+              <a:rPr lang="en-US" sz="3400" b="1" dirty="0">
+                <a:solidFill>
+                  <a:srgbClr val="0B1F3A"/>
+                </a:solidFill>
+              </a:rPr>
+              <a:t>协同感知方案</a:t>
+            </a:r>
+            <a:endParaRPr lang="en-US" sz="3400" dirty="0"/>
+          </a:p>
+        </p:txBody>
+      </p:sp>
+      <p:sp>
+        <p:nvSpPr>
+          <p:cNvPr id="6" name="Text 3"/>
+          <p:cNvSpPr/>
+          <p:nvPr/>
+        </p:nvSpPr>
+        <p:spPr>
+          <a:xfrm>
+            <a:off x="713232" y="2834640"/>
+            <a:ext cx="4023360" cy="411480"/>
+          </a:xfrm>
+          <a:prstGeom prst="rect">
+            <a:avLst/>
+          </a:prstGeom>
+          <a:noFill/>
+        </p:spPr>
+        <p:txBody>
+          <a:bodyPr wrap="square" lIns="0" tIns="0" rIns="0" bIns="0" rtlCol="0" anchor="ctr"/>
+          <a:lstStyle/>
+          <a:p>
+            <a:pPr marL="0" indent="0">
+              <a:buNone/>
+            </a:pPr>
+            <a:r>
+              <a:rPr lang="en-US" sz="1900" b="1" dirty="0">
+                <a:solidFill>
+                  <a:srgbClr val="1E293B"/>
+                </a:solidFill>
+              </a:rPr>
+              <a:t>车辆看不见，路能看见</a:t>
+            </a:r>
+            <a:endParaRPr lang="en-US" sz="1900" dirty="0"/>
+          </a:p>
+        </p:txBody>
+      </p:sp>
+      <p:sp>
+        <p:nvSpPr>
+          <p:cNvPr id="7" name="Shape 4"/>
+          <p:cNvSpPr/>
+          <p:nvPr/>
+        </p:nvSpPr>
+        <p:spPr>
+          <a:xfrm>
+            <a:off x="713232" y="3401568"/>
+            <a:ext cx="2743200" cy="0"/>
+          </a:xfrm>
+          <a:prstGeom prst="line">
+            <a:avLst/>
+          </a:prstGeom>
+          <a:noFill/>
+          <a:ln w="27940">
+            <a:solidFill>
+              <a:srgbClr val="116DFF"/>
+            </a:solidFill>
+            <a:prstDash val="solid"/>
+          </a:ln>
+        </p:spPr>
+      </p:sp>
+      <p:sp>
+        <p:nvSpPr>
+          <p:cNvPr id="8" name="Text 5"/>
+          <p:cNvSpPr/>
+          <p:nvPr/>
+        </p:nvSpPr>
+        <p:spPr>
+          <a:xfrm>
+            <a:off x="713232" y="3685032"/>
+            <a:ext cx="4315968" cy="502920"/>
+          </a:xfrm>
+          <a:prstGeom prst="rect">
+            <a:avLst/>
+          </a:prstGeom>
+          <a:noFill/>
+        </p:spPr>
+        <p:txBody>
+          <a:bodyPr wrap="square" lIns="0" tIns="0" rIns="0" bIns="0" rtlCol="0" anchor="ctr">
+            <a:normAutofit/>
+          </a:bodyPr>
+          <a:lstStyle/>
+          <a:p>
+            <a:pPr marL="0" indent="0">
+              <a:buNone/>
+            </a:pPr>
+            <a:r>
+              <a:rPr lang="en-US" sz="1400" dirty="0">
+                <a:solidFill>
+                  <a:srgbClr val="67758A"/>
+                </a:solidFill>
+              </a:rPr>
+              <a:t>面向遮挡盲区的路侧感知 · V2X预警 · 沙盘演示方案</a:t>
+            </a:r>
+            <a:endParaRPr lang="en-US" sz="1400" dirty="0"/>
+          </a:p>
+        </p:txBody>
+      </p:sp>
+      <p:sp>
+        <p:nvSpPr>
+          <p:cNvPr id="9" name="Text 6"/>
+          <p:cNvSpPr/>
+          <p:nvPr/>
+        </p:nvSpPr>
+        <p:spPr>
+          <a:xfrm>
+            <a:off x="713232" y="5961888"/>
+            <a:ext cx="2103120" cy="228600"/>
+          </a:xfrm>
+          <a:prstGeom prst="rect">
+            <a:avLst/>
+          </a:prstGeom>
+          <a:noFill/>
+        </p:spPr>
+        <p:txBody>
+          <a:bodyPr wrap="square" lIns="0" tIns="0" rIns="0" bIns="0" rtlCol="0" anchor="ctr"/>
+          <a:lstStyle/>
+          <a:p>
+            <a:pPr marL="0" indent="0">
+              <a:buNone/>
+            </a:pPr>
+            <a:r>
+              <a:rPr lang="en-US" sz="850" dirty="0">
+                <a:solidFill>
+                  <a:srgbClr val="8A96A8"/>
+                </a:solidFill>
+              </a:rPr>
+              <a:t>汇报版 / 5–6页结构</a:t>
+            </a:r>
+            <a:endParaRPr lang="en-US" sz="850" dirty="0"/>
+          </a:p>
+        </p:txBody>
+      </p:sp>
     </p:spTree>
   </p:cSld>
   <p:clrMapOvr>
@@ -5035,9 +4262,70 @@
           <a:chExt cx="0" cy="0"/>
         </a:xfrm>
       </p:grpSpPr>
+      <p:sp>
+        <p:nvSpPr>
+          <p:cNvPr id="2" name="Text 0"/>
+          <p:cNvSpPr/>
+          <p:nvPr/>
+        </p:nvSpPr>
+        <p:spPr>
+          <a:xfrm>
+            <a:off x="530352" y="384048"/>
+            <a:ext cx="7223760" cy="384048"/>
+          </a:xfrm>
+          <a:prstGeom prst="rect">
+            <a:avLst/>
+          </a:prstGeom>
+          <a:noFill/>
+        </p:spPr>
+        <p:txBody>
+          <a:bodyPr wrap="square" lIns="0" tIns="0" rIns="0" bIns="0" rtlCol="0" anchor="ctr"/>
+          <a:lstStyle/>
+          <a:p>
+            <a:pPr marL="0" indent="0">
+              <a:buNone/>
+            </a:pPr>
+            <a:r>
+              <a:rPr lang="en-US" sz="2300" b="1" dirty="0">
+                <a:solidFill>
+                  <a:srgbClr val="0B1F3A"/>
+                </a:solidFill>
+                <a:latin typeface="微软雅黑" panose="020B0503020204020204" charset="-122"/>
+                <a:ea typeface="微软雅黑" panose="020B0503020204020204" charset="-122"/>
+                <a:cs typeface="微软雅黑" panose="020B0503020204020204" pitchFamily="34" charset="-120"/>
+              </a:rPr>
+              <a:t>01  为什么选择“鬼探头”场景？</a:t>
+            </a:r>
+            <a:endParaRPr lang="en-US" sz="2300" dirty="0"/>
+          </a:p>
+        </p:txBody>
+      </p:sp>
+      <p:sp>
+        <p:nvSpPr>
+          <p:cNvPr id="4" name="Shape 2"/>
+          <p:cNvSpPr/>
+          <p:nvPr/>
+        </p:nvSpPr>
+        <p:spPr>
+          <a:xfrm>
+            <a:off x="530352" y="1106424"/>
+            <a:ext cx="10927080" cy="0"/>
+          </a:xfrm>
+          <a:prstGeom prst="line">
+            <a:avLst/>
+          </a:prstGeom>
+          <a:noFill/>
+          <a:ln w="10160">
+            <a:solidFill>
+              <a:srgbClr val="D9E3F0"/>
+            </a:solidFill>
+            <a:prstDash val="solid"/>
+          </a:ln>
+        </p:spPr>
+      </p:sp>
       <p:pic>
         <p:nvPicPr>
-          <p:cNvPr id="2" name="Image 0" descr="/mnt/data/scene_16x9.jpg"/>
+          <p:cNvPr id="5" name="Image 0" descr="/mnt/data/sandtable_problem.jpg"/>
           <p:cNvPicPr>
             <a:picLocks noChangeAspect="1"/>
           </p:cNvPicPr>
@@ -5051,8 +4339,8 @@
         </p:blipFill>
         <p:spPr>
           <a:xfrm>
-            <a:off x="5559552" y="0"/>
-            <a:ext cx="6629400" cy="6858000"/>
+            <a:off x="594360" y="1417320"/>
+            <a:ext cx="4800600" cy="4526280"/>
           </a:xfrm>
           <a:prstGeom prst="rect">
             <a:avLst/>
@@ -5061,26 +4349,231 @@
       </p:pic>
       <p:sp>
         <p:nvSpPr>
-          <p:cNvPr id="3" name="Shape 0"/>
-          <p:cNvSpPr/>
-          <p:nvPr/>
-        </p:nvSpPr>
-        <p:spPr>
-          <a:xfrm>
-            <a:off x="0" y="0"/>
-            <a:ext cx="5532120" cy="6858000"/>
+          <p:cNvPr id="6" name="Text 3"/>
+          <p:cNvSpPr/>
+          <p:nvPr/>
+        </p:nvSpPr>
+        <p:spPr>
+          <a:xfrm>
+            <a:off x="640080" y="6016752"/>
+            <a:ext cx="4617720" cy="292608"/>
+          </a:xfrm>
+          <a:prstGeom prst="rect">
+            <a:avLst/>
+          </a:prstGeom>
+          <a:noFill/>
+        </p:spPr>
+        <p:txBody>
+          <a:bodyPr wrap="square" lIns="0" tIns="0" rIns="0" bIns="0" rtlCol="0" anchor="ctr"/>
+          <a:lstStyle/>
+          <a:p>
+            <a:pPr marL="0" indent="0">
+              <a:buNone/>
+            </a:pPr>
+            <a:r>
+              <a:rPr lang="en-US" sz="950" dirty="0">
+                <a:solidFill>
+                  <a:srgbClr val="67758A"/>
+                </a:solidFill>
+              </a:rPr>
+              <a:t>现有沙盘天然具备遮挡场景：建筑转角、路口、横穿区域、路侧设备位</a:t>
+            </a:r>
+            <a:endParaRPr lang="en-US" sz="950" dirty="0"/>
+          </a:p>
+        </p:txBody>
+      </p:sp>
+      <p:sp>
+        <p:nvSpPr>
+          <p:cNvPr id="7" name="Text 4"/>
+          <p:cNvSpPr/>
+          <p:nvPr/>
+        </p:nvSpPr>
+        <p:spPr>
+          <a:xfrm>
+            <a:off x="5806440" y="1463040"/>
+            <a:ext cx="2011680" cy="274320"/>
+          </a:xfrm>
+          <a:prstGeom prst="rect">
+            <a:avLst/>
+          </a:prstGeom>
+          <a:noFill/>
+        </p:spPr>
+        <p:txBody>
+          <a:bodyPr wrap="square" lIns="0" tIns="0" rIns="0" bIns="0" rtlCol="0" anchor="ctr"/>
+          <a:lstStyle/>
+          <a:p>
+            <a:pPr marL="0" indent="0">
+              <a:buNone/>
+            </a:pPr>
+            <a:r>
+              <a:rPr lang="en-US" sz="1400" b="1" dirty="0">
+                <a:solidFill>
+                  <a:srgbClr val="0B1F3A"/>
+                </a:solidFill>
+              </a:rPr>
+              <a:t>传统演示的局限</a:t>
+            </a:r>
+            <a:endParaRPr lang="en-US" sz="1400" dirty="0"/>
+          </a:p>
+        </p:txBody>
+      </p:sp>
+      <p:sp>
+        <p:nvSpPr>
+          <p:cNvPr id="8" name="Text 5"/>
+          <p:cNvSpPr/>
+          <p:nvPr/>
+        </p:nvSpPr>
+        <p:spPr>
+          <a:xfrm>
+            <a:off x="5806440" y="1856232"/>
+            <a:ext cx="5074920" cy="1097280"/>
+          </a:xfrm>
+          <a:prstGeom prst="rect">
+            <a:avLst/>
+          </a:prstGeom>
+          <a:noFill/>
+        </p:spPr>
+        <p:txBody>
+          <a:bodyPr wrap="square" lIns="635" tIns="635" rIns="635" bIns="635" rtlCol="0" anchor="ctr">
+            <a:normAutofit/>
+          </a:bodyPr>
+          <a:lstStyle/>
+          <a:p>
+            <a:r>
+              <a:rPr lang="en-US" sz="1240" dirty="0">
+                <a:solidFill>
+                  <a:srgbClr val="1E293B"/>
+                </a:solidFill>
+                <a:latin typeface="微软雅黑" panose="020B0503020204020204" charset="-122"/>
+                <a:ea typeface="微软雅黑" panose="020B0503020204020204" charset="-122"/>
+                <a:cs typeface="微软雅黑" panose="020B0503020204020204" pitchFamily="34" charset="-120"/>
+              </a:rPr>
+              <a:t>功能停留在红绿灯、循迹、简单避障</a:t>
+            </a:r>
+            <a:endParaRPr lang="en-US" sz="1240" dirty="0"/>
+          </a:p>
+          <a:p>
+            <a:r>
+              <a:rPr lang="en-US" sz="1240" dirty="0">
+                <a:solidFill>
+                  <a:srgbClr val="1E293B"/>
+                </a:solidFill>
+                <a:latin typeface="微软雅黑" panose="020B0503020204020204" charset="-122"/>
+                <a:ea typeface="微软雅黑" panose="020B0503020204020204" charset="-122"/>
+                <a:cs typeface="微软雅黑" panose="020B0503020204020204" pitchFamily="34" charset="-120"/>
+              </a:rPr>
+              <a:t>车辆只能在“看见目标后”再制动</a:t>
+            </a:r>
+            <a:endParaRPr lang="en-US" sz="1240" dirty="0"/>
+          </a:p>
+          <a:p>
+            <a:r>
+              <a:rPr lang="en-US" sz="1240" dirty="0">
+                <a:solidFill>
+                  <a:srgbClr val="1E293B"/>
+                </a:solidFill>
+                <a:latin typeface="微软雅黑" panose="020B0503020204020204" charset="-122"/>
+                <a:ea typeface="微软雅黑" panose="020B0503020204020204" charset="-122"/>
+                <a:cs typeface="微软雅黑" panose="020B0503020204020204" pitchFamily="34" charset="-120"/>
+              </a:rPr>
+              <a:t>缺少复杂城市道路的真实风险冲突</a:t>
+            </a:r>
+            <a:endParaRPr lang="en-US" sz="1240" dirty="0"/>
+          </a:p>
+        </p:txBody>
+      </p:sp>
+      <p:sp>
+        <p:nvSpPr>
+          <p:cNvPr id="9" name="Text 6"/>
+          <p:cNvSpPr/>
+          <p:nvPr/>
+        </p:nvSpPr>
+        <p:spPr>
+          <a:xfrm>
+            <a:off x="5806440" y="3255264"/>
+            <a:ext cx="2560320" cy="274320"/>
+          </a:xfrm>
+          <a:prstGeom prst="rect">
+            <a:avLst/>
+          </a:prstGeom>
+          <a:noFill/>
+        </p:spPr>
+        <p:txBody>
+          <a:bodyPr wrap="square" lIns="0" tIns="0" rIns="0" bIns="0" rtlCol="0" anchor="ctr"/>
+          <a:lstStyle/>
+          <a:p>
+            <a:pPr marL="0" indent="0">
+              <a:buNone/>
+            </a:pPr>
+            <a:r>
+              <a:rPr lang="en-US" sz="1400" b="1" dirty="0">
+                <a:solidFill>
+                  <a:srgbClr val="0B1F3A"/>
+                </a:solidFill>
+              </a:rPr>
+              <a:t>“鬼探头”的核心痛点</a:t>
+            </a:r>
+            <a:endParaRPr lang="en-US" sz="1400" dirty="0"/>
+          </a:p>
+        </p:txBody>
+      </p:sp>
+      <p:sp>
+        <p:nvSpPr>
+          <p:cNvPr id="10" name="Text 7"/>
+          <p:cNvSpPr/>
+          <p:nvPr/>
+        </p:nvSpPr>
+        <p:spPr>
+          <a:xfrm>
+            <a:off x="5806440" y="3657600"/>
+            <a:ext cx="5120640" cy="694944"/>
+          </a:xfrm>
+          <a:prstGeom prst="rect">
+            <a:avLst/>
+          </a:prstGeom>
+          <a:noFill/>
+        </p:spPr>
+        <p:txBody>
+          <a:bodyPr wrap="square" lIns="508" tIns="508" rIns="508" bIns="508" rtlCol="0" anchor="ctr">
+            <a:normAutofit/>
+          </a:bodyPr>
+          <a:lstStyle/>
+          <a:p>
+            <a:pPr marL="0" indent="0">
+              <a:buNone/>
+            </a:pPr>
+            <a:r>
+              <a:rPr lang="en-US" sz="1330" dirty="0">
+                <a:solidFill>
+                  <a:srgbClr val="1E293B"/>
+                </a:solidFill>
+              </a:rPr>
+              <a:t>建筑/停靠车辆/绿化带形成非视距盲区，行人或非机动车突然进入冲突区域；单车传感器发现太晚，预警窗口不足。</a:t>
+            </a:r>
+            <a:endParaRPr lang="en-US" sz="1330" dirty="0"/>
+          </a:p>
+        </p:txBody>
+      </p:sp>
+      <p:sp>
+        <p:nvSpPr>
+          <p:cNvPr id="11" name="Shape 8"/>
+          <p:cNvSpPr/>
+          <p:nvPr/>
+        </p:nvSpPr>
+        <p:spPr>
+          <a:xfrm>
+            <a:off x="5806440" y="4736592"/>
+            <a:ext cx="5074920" cy="804672"/>
           </a:xfrm>
           <a:prstGeom prst="rect">
             <a:avLst/>
           </a:prstGeom>
           <a:solidFill>
-            <a:srgbClr val="FFFFFF"/>
+            <a:srgbClr val="EEF5FF"/>
           </a:solidFill>
           <a:ln w="12700">
             <a:solidFill>
-              <a:srgbClr val="FFFFFF">
-                <a:alpha val="0"/>
-              </a:srgbClr>
+              <a:srgbClr val="D6E8FF"/>
             </a:solidFill>
             <a:prstDash val="solid"/>
           </a:ln>
@@ -5088,14 +4581,14 @@
       </p:sp>
       <p:sp>
         <p:nvSpPr>
-          <p:cNvPr id="4" name="Text 1"/>
-          <p:cNvSpPr/>
-          <p:nvPr/>
-        </p:nvSpPr>
-        <p:spPr>
-          <a:xfrm>
-            <a:off x="685800" y="987552"/>
-            <a:ext cx="4297680" cy="347472"/>
+          <p:cNvPr id="12" name="Text 9"/>
+          <p:cNvSpPr/>
+          <p:nvPr/>
+        </p:nvSpPr>
+        <p:spPr>
+          <a:xfrm>
+            <a:off x="6016752" y="4882896"/>
+            <a:ext cx="2468880" cy="201168"/>
           </a:xfrm>
           <a:prstGeom prst="rect">
             <a:avLst/>
@@ -5110,78 +4603,132 @@
               <a:buNone/>
             </a:pPr>
             <a:r>
-              <a:rPr lang="en-US" sz="1800" b="1" dirty="0">
+              <a:rPr lang="en-US" sz="1000" b="1" dirty="0">
                 <a:solidFill>
                   <a:srgbClr val="116DFF"/>
                 </a:solidFill>
               </a:rPr>
-              <a:t>基于车路协同的</a:t>
-            </a:r>
-            <a:endParaRPr lang="en-US" sz="1800" dirty="0"/>
-          </a:p>
-        </p:txBody>
-      </p:sp>
-      <p:sp>
-        <p:nvSpPr>
-          <p:cNvPr id="5" name="Text 2"/>
-          <p:cNvSpPr/>
-          <p:nvPr/>
-        </p:nvSpPr>
-        <p:spPr>
-          <a:xfrm>
-            <a:off x="685800" y="1417320"/>
-            <a:ext cx="4480560" cy="1234440"/>
-          </a:xfrm>
-          <a:prstGeom prst="rect">
-            <a:avLst/>
-          </a:prstGeom>
-          <a:noFill/>
-        </p:spPr>
-        <p:txBody>
-          <a:bodyPr wrap="square" lIns="0" tIns="0" rIns="0" bIns="0" rtlCol="0" anchor="ctr">
-            <a:normAutofit/>
-          </a:bodyPr>
+              <a:t>本方案要展示的核心变化</a:t>
+            </a:r>
+            <a:endParaRPr lang="en-US" sz="1000" dirty="0"/>
+          </a:p>
+        </p:txBody>
+      </p:sp>
+      <p:sp>
+        <p:nvSpPr>
+          <p:cNvPr id="13" name="Text 10"/>
+          <p:cNvSpPr/>
+          <p:nvPr/>
+        </p:nvSpPr>
+        <p:spPr>
+          <a:xfrm>
+            <a:off x="6016752" y="5166360"/>
+            <a:ext cx="4526280" cy="256032"/>
+          </a:xfrm>
+          <a:prstGeom prst="rect">
+            <a:avLst/>
+          </a:prstGeom>
+          <a:noFill/>
+        </p:spPr>
+        <p:txBody>
+          <a:bodyPr wrap="square" lIns="0" tIns="0" rIns="0" bIns="0" rtlCol="0" anchor="ctr"/>
           <a:lstStyle/>
           <a:p>
             <a:pPr marL="0" indent="0">
               <a:buNone/>
             </a:pPr>
             <a:r>
-              <a:rPr lang="en-US" sz="3400" b="1" dirty="0">
+              <a:rPr lang="en-US" sz="1300" b="1" dirty="0">
                 <a:solidFill>
                   <a:srgbClr val="0B1F3A"/>
                 </a:solidFill>
               </a:rPr>
-              <a:t>“鬼探头”</a:t>
-            </a:r>
-            <a:endParaRPr lang="en-US" sz="3400" dirty="0"/>
-          </a:p>
+              <a:t>从“单车被动避障” → “路侧主动预警 + 车辆提前处置”</a:t>
+            </a:r>
+            <a:endParaRPr lang="en-US" sz="1300" dirty="0"/>
+          </a:p>
+        </p:txBody>
+      </p:sp>
+      <p:sp>
+        <p:nvSpPr>
+          <p:cNvPr id="14" name="Text 11"/>
+          <p:cNvSpPr/>
+          <p:nvPr/>
+        </p:nvSpPr>
+        <p:spPr>
+          <a:xfrm>
+            <a:off x="5806440" y="6016752"/>
+            <a:ext cx="5120640" cy="219456"/>
+          </a:xfrm>
+          <a:prstGeom prst="rect">
+            <a:avLst/>
+          </a:prstGeom>
+          <a:noFill/>
+        </p:spPr>
+        <p:txBody>
+          <a:bodyPr wrap="square" lIns="0" tIns="0" rIns="0" bIns="0" rtlCol="0" anchor="ctr"/>
+          <a:lstStyle/>
+          <a:p>
+            <a:pPr marL="0" indent="0" algn="l">
+              <a:buNone/>
+            </a:pPr>
+            <a:r>
+              <a:rPr lang="en-US" sz="730" dirty="0">
+                <a:solidFill>
+                  <a:srgbClr val="7B8798"/>
+                </a:solidFill>
+              </a:rPr>
+              <a:t>参考：V2X被用于非视距（NLOS）碰撞风险预警。资料：工研院产业学习网。</a:t>
+            </a:r>
+            <a:endParaRPr lang="en-US" sz="730" dirty="0"/>
+          </a:p>
+        </p:txBody>
+      </p:sp>
+      <p:sp>
+        <p:nvSpPr>
+          <p:cNvPr id="15" name="Text 12"/>
+          <p:cNvSpPr/>
+          <p:nvPr/>
+        </p:nvSpPr>
+        <p:spPr>
+          <a:xfrm>
+            <a:off x="566928" y="6519672"/>
+            <a:ext cx="7132320" cy="164592"/>
+          </a:xfrm>
+          <a:prstGeom prst="rect">
+            <a:avLst/>
+          </a:prstGeom>
+          <a:noFill/>
+        </p:spPr>
+        <p:txBody>
+          <a:bodyPr wrap="square" lIns="0" tIns="0" rIns="0" bIns="0" rtlCol="0" anchor="ctr"/>
+          <a:lstStyle/>
           <a:p>
             <a:pPr marL="0" indent="0">
               <a:buNone/>
             </a:pPr>
             <a:r>
-              <a:rPr lang="en-US" sz="3400" b="1" dirty="0">
-                <a:solidFill>
-                  <a:srgbClr val="0B1F3A"/>
-                </a:solidFill>
-              </a:rPr>
-              <a:t>协同感知方案</a:t>
-            </a:r>
-            <a:endParaRPr lang="en-US" sz="3400" dirty="0"/>
-          </a:p>
-        </p:txBody>
-      </p:sp>
-      <p:sp>
-        <p:nvSpPr>
-          <p:cNvPr id="6" name="Text 3"/>
-          <p:cNvSpPr/>
-          <p:nvPr/>
-        </p:nvSpPr>
-        <p:spPr>
-          <a:xfrm>
-            <a:off x="713232" y="2834640"/>
-            <a:ext cx="4023360" cy="411480"/>
+              <a:rPr lang="en-US" sz="650" dirty="0">
+                <a:solidFill>
+                  <a:srgbClr val="8A96A8"/>
+                </a:solidFill>
+              </a:rPr>
+              <a:t>基于车路协同的“鬼探头”协同感知方案</a:t>
+            </a:r>
+            <a:endParaRPr lang="en-US" sz="650" dirty="0"/>
+          </a:p>
+        </p:txBody>
+      </p:sp>
+      <p:sp>
+        <p:nvSpPr>
+          <p:cNvPr id="16" name="Text 13"/>
+          <p:cNvSpPr/>
+          <p:nvPr/>
+        </p:nvSpPr>
+        <p:spPr>
+          <a:xfrm>
+            <a:off x="9784080" y="6519672"/>
+            <a:ext cx="1783080" cy="164592"/>
           </a:xfrm>
           <a:prstGeom prst="rect">
             <a:avLst/>
@@ -5192,113 +4739,18 @@
           <a:bodyPr wrap="square" lIns="0" tIns="0" rIns="0" bIns="0" rtlCol="0" anchor="ctr"/>
           <a:lstStyle/>
           <a:p>
-            <a:pPr marL="0" indent="0">
-              <a:buNone/>
-            </a:pPr>
-            <a:r>
-              <a:rPr lang="en-US" sz="1900" b="1" dirty="0">
-                <a:solidFill>
-                  <a:srgbClr val="1E293B"/>
+            <a:pPr marL="0" indent="0" algn="r">
+              <a:buNone/>
+            </a:pPr>
+            <a:r>
+              <a:rPr lang="en-US" sz="650" dirty="0">
+                <a:solidFill>
+                  <a:srgbClr val="8A96A8"/>
                 </a:solidFill>
               </a:rPr>
               <a:t>车辆看不见，路能看见</a:t>
             </a:r>
-            <a:endParaRPr lang="en-US" sz="1900" dirty="0"/>
-          </a:p>
-        </p:txBody>
-      </p:sp>
-      <p:sp>
-        <p:nvSpPr>
-          <p:cNvPr id="7" name="Shape 4"/>
-          <p:cNvSpPr/>
-          <p:nvPr/>
-        </p:nvSpPr>
-        <p:spPr>
-          <a:xfrm>
-            <a:off x="713232" y="3401568"/>
-            <a:ext cx="2743200" cy="0"/>
-          </a:xfrm>
-          <a:prstGeom prst="line">
-            <a:avLst/>
-          </a:prstGeom>
-          <a:noFill/>
-          <a:ln w="27940">
-            <a:solidFill>
-              <a:srgbClr val="116DFF"/>
-            </a:solidFill>
-            <a:prstDash val="solid"/>
-          </a:ln>
-        </p:spPr>
-      </p:sp>
-      <p:sp>
-        <p:nvSpPr>
-          <p:cNvPr id="8" name="Text 5"/>
-          <p:cNvSpPr/>
-          <p:nvPr/>
-        </p:nvSpPr>
-        <p:spPr>
-          <a:xfrm>
-            <a:off x="713232" y="3685032"/>
-            <a:ext cx="4315968" cy="502920"/>
-          </a:xfrm>
-          <a:prstGeom prst="rect">
-            <a:avLst/>
-          </a:prstGeom>
-          <a:noFill/>
-        </p:spPr>
-        <p:txBody>
-          <a:bodyPr wrap="square" lIns="0" tIns="0" rIns="0" bIns="0" rtlCol="0" anchor="ctr">
-            <a:normAutofit/>
-          </a:bodyPr>
-          <a:lstStyle/>
-          <a:p>
-            <a:pPr marL="0" indent="0">
-              <a:buNone/>
-            </a:pPr>
-            <a:r>
-              <a:rPr lang="en-US" sz="1400" dirty="0">
-                <a:solidFill>
-                  <a:srgbClr val="67758A"/>
-                </a:solidFill>
-              </a:rPr>
-              <a:t>面向遮挡盲区的路侧感知 · V2X预警 · 沙盘演示方案</a:t>
-            </a:r>
-            <a:endParaRPr lang="en-US" sz="1400" dirty="0"/>
-          </a:p>
-        </p:txBody>
-      </p:sp>
-      <p:sp>
-        <p:nvSpPr>
-          <p:cNvPr id="9" name="Text 6"/>
-          <p:cNvSpPr/>
-          <p:nvPr/>
-        </p:nvSpPr>
-        <p:spPr>
-          <a:xfrm>
-            <a:off x="713232" y="5961888"/>
-            <a:ext cx="2103120" cy="228600"/>
-          </a:xfrm>
-          <a:prstGeom prst="rect">
-            <a:avLst/>
-          </a:prstGeom>
-          <a:noFill/>
-        </p:spPr>
-        <p:txBody>
-          <a:bodyPr wrap="square" lIns="0" tIns="0" rIns="0" bIns="0" rtlCol="0" anchor="ctr"/>
-          <a:lstStyle/>
-          <a:p>
-            <a:pPr marL="0" indent="0">
-              <a:buNone/>
-            </a:pPr>
-            <a:r>
-              <a:rPr lang="en-US" sz="850" dirty="0">
-                <a:solidFill>
-                  <a:srgbClr val="8A96A8"/>
-                </a:solidFill>
-              </a:rPr>
-              <a:t>汇报版 / 5–6页结构</a:t>
-            </a:r>
-            <a:endParaRPr lang="en-US" sz="850" dirty="0"/>
+            <a:endParaRPr lang="en-US" sz="650" dirty="0"/>
           </a:p>
         </p:txBody>
       </p:sp>
@@ -5359,7 +4811,7 @@
                 <a:ea typeface="微软雅黑" panose="020B0503020204020204" charset="-122"/>
                 <a:cs typeface="微软雅黑" panose="020B0503020204020204" pitchFamily="34" charset="-120"/>
               </a:rPr>
-              <a:t>01  为什么选择“鬼探头”场景？</a:t>
+              <a:t>02  总体方案：路侧先感知，车辆早预警</a:t>
             </a:r>
             <a:endParaRPr lang="en-US" sz="2300" dirty="0"/>
           </a:p>
@@ -5388,9 +4840,716 @@
           </a:ln>
         </p:spPr>
       </p:sp>
+      <p:sp>
+        <p:nvSpPr>
+          <p:cNvPr id="5" name="Shape 3"/>
+          <p:cNvSpPr/>
+          <p:nvPr/>
+        </p:nvSpPr>
+        <p:spPr>
+          <a:xfrm>
+            <a:off x="2103120" y="3429000"/>
+            <a:ext cx="530352" cy="0"/>
+          </a:xfrm>
+          <a:prstGeom prst="line">
+            <a:avLst/>
+          </a:prstGeom>
+          <a:noFill/>
+          <a:ln w="19050">
+            <a:solidFill>
+              <a:srgbClr val="116DFF"/>
+            </a:solidFill>
+            <a:prstDash val="solid"/>
+            <a:headEnd type="none"/>
+            <a:tailEnd type="triangle"/>
+          </a:ln>
+        </p:spPr>
+      </p:sp>
+      <p:sp>
+        <p:nvSpPr>
+          <p:cNvPr id="6" name="Shape 4"/>
+          <p:cNvSpPr/>
+          <p:nvPr/>
+        </p:nvSpPr>
+        <p:spPr>
+          <a:xfrm>
+            <a:off x="4050792" y="3429000"/>
+            <a:ext cx="530352" cy="0"/>
+          </a:xfrm>
+          <a:prstGeom prst="line">
+            <a:avLst/>
+          </a:prstGeom>
+          <a:noFill/>
+          <a:ln w="19050">
+            <a:solidFill>
+              <a:srgbClr val="116DFF"/>
+            </a:solidFill>
+            <a:prstDash val="solid"/>
+            <a:headEnd type="none"/>
+            <a:tailEnd type="triangle"/>
+          </a:ln>
+        </p:spPr>
+      </p:sp>
+      <p:sp>
+        <p:nvSpPr>
+          <p:cNvPr id="7" name="Shape 5"/>
+          <p:cNvSpPr/>
+          <p:nvPr/>
+        </p:nvSpPr>
+        <p:spPr>
+          <a:xfrm>
+            <a:off x="5998464" y="3429000"/>
+            <a:ext cx="530352" cy="0"/>
+          </a:xfrm>
+          <a:prstGeom prst="line">
+            <a:avLst/>
+          </a:prstGeom>
+          <a:noFill/>
+          <a:ln w="19050">
+            <a:solidFill>
+              <a:srgbClr val="116DFF"/>
+            </a:solidFill>
+            <a:prstDash val="solid"/>
+            <a:headEnd type="none"/>
+            <a:tailEnd type="triangle"/>
+          </a:ln>
+        </p:spPr>
+      </p:sp>
+      <p:sp>
+        <p:nvSpPr>
+          <p:cNvPr id="8" name="Shape 6"/>
+          <p:cNvSpPr/>
+          <p:nvPr/>
+        </p:nvSpPr>
+        <p:spPr>
+          <a:xfrm>
+            <a:off x="7946136" y="3429000"/>
+            <a:ext cx="530352" cy="0"/>
+          </a:xfrm>
+          <a:prstGeom prst="line">
+            <a:avLst/>
+          </a:prstGeom>
+          <a:noFill/>
+          <a:ln w="19050">
+            <a:solidFill>
+              <a:srgbClr val="116DFF"/>
+            </a:solidFill>
+            <a:prstDash val="solid"/>
+            <a:headEnd type="none"/>
+            <a:tailEnd type="triangle"/>
+          </a:ln>
+        </p:spPr>
+      </p:sp>
+      <p:sp>
+        <p:nvSpPr>
+          <p:cNvPr id="9" name="Shape 7"/>
+          <p:cNvSpPr/>
+          <p:nvPr/>
+        </p:nvSpPr>
+        <p:spPr>
+          <a:xfrm>
+            <a:off x="9893808" y="3429000"/>
+            <a:ext cx="530352" cy="0"/>
+          </a:xfrm>
+          <a:prstGeom prst="line">
+            <a:avLst/>
+          </a:prstGeom>
+          <a:noFill/>
+          <a:ln w="19050">
+            <a:solidFill>
+              <a:srgbClr val="116DFF"/>
+            </a:solidFill>
+            <a:prstDash val="solid"/>
+            <a:headEnd type="none"/>
+            <a:tailEnd type="triangle"/>
+          </a:ln>
+        </p:spPr>
+      </p:sp>
+      <p:sp>
+        <p:nvSpPr>
+          <p:cNvPr id="10" name="Shape 8"/>
+          <p:cNvSpPr/>
+          <p:nvPr/>
+        </p:nvSpPr>
+        <p:spPr>
+          <a:xfrm>
+            <a:off x="685800" y="2971800"/>
+            <a:ext cx="1417320" cy="914400"/>
+          </a:xfrm>
+          <a:prstGeom prst="roundRect">
+            <a:avLst>
+              <a:gd name="adj" fmla="val 7000"/>
+            </a:avLst>
+          </a:prstGeom>
+          <a:solidFill>
+            <a:srgbClr val="FFFFFF"/>
+          </a:solidFill>
+          <a:ln w="15240">
+            <a:solidFill>
+              <a:srgbClr val="116DFF"/>
+            </a:solidFill>
+            <a:prstDash val="solid"/>
+          </a:ln>
+        </p:spPr>
+      </p:sp>
+      <p:sp>
+        <p:nvSpPr>
+          <p:cNvPr id="11" name="Text 9"/>
+          <p:cNvSpPr/>
+          <p:nvPr/>
+        </p:nvSpPr>
+        <p:spPr>
+          <a:xfrm>
+            <a:off x="795528" y="3118104"/>
+            <a:ext cx="1197864" cy="210312"/>
+          </a:xfrm>
+          <a:prstGeom prst="rect">
+            <a:avLst/>
+          </a:prstGeom>
+          <a:noFill/>
+        </p:spPr>
+        <p:txBody>
+          <a:bodyPr wrap="square" lIns="0" tIns="0" rIns="0" bIns="0" rtlCol="0" anchor="ctr"/>
+          <a:lstStyle/>
+          <a:p>
+            <a:pPr marL="0" indent="0" algn="ctr">
+              <a:buNone/>
+            </a:pPr>
+            <a:r>
+              <a:rPr lang="en-US" sz="1100" b="1" dirty="0">
+                <a:solidFill>
+                  <a:srgbClr val="0B1F3A"/>
+                </a:solidFill>
+              </a:rPr>
+              <a:t>路侧摄像头</a:t>
+            </a:r>
+            <a:endParaRPr lang="en-US" sz="1100" dirty="0"/>
+          </a:p>
+        </p:txBody>
+      </p:sp>
+      <p:sp>
+        <p:nvSpPr>
+          <p:cNvPr id="12" name="Text 10"/>
+          <p:cNvSpPr/>
+          <p:nvPr/>
+        </p:nvSpPr>
+        <p:spPr>
+          <a:xfrm>
+            <a:off x="795528" y="3456432"/>
+            <a:ext cx="1197864" cy="219456"/>
+          </a:xfrm>
+          <a:prstGeom prst="rect">
+            <a:avLst/>
+          </a:prstGeom>
+          <a:noFill/>
+        </p:spPr>
+        <p:txBody>
+          <a:bodyPr wrap="square" lIns="0" tIns="0" rIns="0" bIns="0" rtlCol="0" anchor="ctr"/>
+          <a:lstStyle/>
+          <a:p>
+            <a:pPr marL="0" indent="0" algn="ctr">
+              <a:buNone/>
+            </a:pPr>
+            <a:r>
+              <a:rPr lang="en-US" sz="770" dirty="0">
+                <a:solidFill>
+                  <a:srgbClr val="67758A"/>
+                </a:solidFill>
+              </a:rPr>
+              <a:t>盲区目标采集</a:t>
+            </a:r>
+            <a:endParaRPr lang="en-US" sz="770" dirty="0"/>
+          </a:p>
+        </p:txBody>
+      </p:sp>
+      <p:sp>
+        <p:nvSpPr>
+          <p:cNvPr id="13" name="Shape 11"/>
+          <p:cNvSpPr/>
+          <p:nvPr/>
+        </p:nvSpPr>
+        <p:spPr>
+          <a:xfrm>
+            <a:off x="2633472" y="2971800"/>
+            <a:ext cx="1417320" cy="914400"/>
+          </a:xfrm>
+          <a:prstGeom prst="roundRect">
+            <a:avLst>
+              <a:gd name="adj" fmla="val 7000"/>
+            </a:avLst>
+          </a:prstGeom>
+          <a:solidFill>
+            <a:srgbClr val="FFFFFF"/>
+          </a:solidFill>
+          <a:ln w="15240">
+            <a:solidFill>
+              <a:srgbClr val="116DFF"/>
+            </a:solidFill>
+            <a:prstDash val="solid"/>
+          </a:ln>
+        </p:spPr>
+      </p:sp>
+      <p:sp>
+        <p:nvSpPr>
+          <p:cNvPr id="14" name="Text 12"/>
+          <p:cNvSpPr/>
+          <p:nvPr/>
+        </p:nvSpPr>
+        <p:spPr>
+          <a:xfrm>
+            <a:off x="2743200" y="3118104"/>
+            <a:ext cx="1197864" cy="210312"/>
+          </a:xfrm>
+          <a:prstGeom prst="rect">
+            <a:avLst/>
+          </a:prstGeom>
+          <a:noFill/>
+        </p:spPr>
+        <p:txBody>
+          <a:bodyPr wrap="square" lIns="0" tIns="0" rIns="0" bIns="0" rtlCol="0" anchor="ctr"/>
+          <a:lstStyle/>
+          <a:p>
+            <a:pPr marL="0" indent="0" algn="ctr">
+              <a:buNone/>
+            </a:pPr>
+            <a:r>
+              <a:rPr lang="en-US" sz="1100" b="1" dirty="0">
+                <a:solidFill>
+                  <a:srgbClr val="0B1F3A"/>
+                </a:solidFill>
+              </a:rPr>
+              <a:t>边缘AI</a:t>
+            </a:r>
+            <a:endParaRPr lang="en-US" sz="1100" dirty="0"/>
+          </a:p>
+        </p:txBody>
+      </p:sp>
+      <p:sp>
+        <p:nvSpPr>
+          <p:cNvPr id="15" name="Text 13"/>
+          <p:cNvSpPr/>
+          <p:nvPr/>
+        </p:nvSpPr>
+        <p:spPr>
+          <a:xfrm>
+            <a:off x="2743200" y="3456432"/>
+            <a:ext cx="1197864" cy="219456"/>
+          </a:xfrm>
+          <a:prstGeom prst="rect">
+            <a:avLst/>
+          </a:prstGeom>
+          <a:noFill/>
+        </p:spPr>
+        <p:txBody>
+          <a:bodyPr wrap="square" lIns="0" tIns="0" rIns="0" bIns="0" rtlCol="0" anchor="ctr"/>
+          <a:lstStyle/>
+          <a:p>
+            <a:pPr marL="0" indent="0" algn="ctr">
+              <a:buNone/>
+            </a:pPr>
+            <a:r>
+              <a:rPr lang="en-US" sz="770" dirty="0">
+                <a:solidFill>
+                  <a:srgbClr val="67758A"/>
+                </a:solidFill>
+              </a:rPr>
+              <a:t>检测/跟踪/识别</a:t>
+            </a:r>
+            <a:endParaRPr lang="en-US" sz="770" dirty="0"/>
+          </a:p>
+        </p:txBody>
+      </p:sp>
+      <p:sp>
+        <p:nvSpPr>
+          <p:cNvPr id="16" name="Shape 14"/>
+          <p:cNvSpPr/>
+          <p:nvPr/>
+        </p:nvSpPr>
+        <p:spPr>
+          <a:xfrm>
+            <a:off x="4581144" y="2971800"/>
+            <a:ext cx="1417320" cy="914400"/>
+          </a:xfrm>
+          <a:prstGeom prst="roundRect">
+            <a:avLst>
+              <a:gd name="adj" fmla="val 7000"/>
+            </a:avLst>
+          </a:prstGeom>
+          <a:solidFill>
+            <a:srgbClr val="FFFFFF"/>
+          </a:solidFill>
+          <a:ln w="15240">
+            <a:solidFill>
+              <a:srgbClr val="FF4D4F"/>
+            </a:solidFill>
+            <a:prstDash val="solid"/>
+          </a:ln>
+        </p:spPr>
+      </p:sp>
+      <p:sp>
+        <p:nvSpPr>
+          <p:cNvPr id="17" name="Text 15"/>
+          <p:cNvSpPr/>
+          <p:nvPr/>
+        </p:nvSpPr>
+        <p:spPr>
+          <a:xfrm>
+            <a:off x="4690872" y="3118104"/>
+            <a:ext cx="1197864" cy="210312"/>
+          </a:xfrm>
+          <a:prstGeom prst="rect">
+            <a:avLst/>
+          </a:prstGeom>
+          <a:noFill/>
+        </p:spPr>
+        <p:txBody>
+          <a:bodyPr wrap="square" lIns="0" tIns="0" rIns="0" bIns="0" rtlCol="0" anchor="ctr"/>
+          <a:lstStyle/>
+          <a:p>
+            <a:pPr marL="0" indent="0" algn="ctr">
+              <a:buNone/>
+            </a:pPr>
+            <a:r>
+              <a:rPr lang="en-US" sz="1100" b="1" dirty="0">
+                <a:solidFill>
+                  <a:srgbClr val="FF4D4F"/>
+                </a:solidFill>
+              </a:rPr>
+              <a:t>风险判断</a:t>
+            </a:r>
+            <a:endParaRPr lang="en-US" sz="1100" dirty="0"/>
+          </a:p>
+        </p:txBody>
+      </p:sp>
+      <p:sp>
+        <p:nvSpPr>
+          <p:cNvPr id="18" name="Text 16"/>
+          <p:cNvSpPr/>
+          <p:nvPr/>
+        </p:nvSpPr>
+        <p:spPr>
+          <a:xfrm>
+            <a:off x="4690872" y="3456432"/>
+            <a:ext cx="1197864" cy="219456"/>
+          </a:xfrm>
+          <a:prstGeom prst="rect">
+            <a:avLst/>
+          </a:prstGeom>
+          <a:noFill/>
+        </p:spPr>
+        <p:txBody>
+          <a:bodyPr wrap="square" lIns="0" tIns="0" rIns="0" bIns="0" rtlCol="0" anchor="ctr"/>
+          <a:lstStyle/>
+          <a:p>
+            <a:pPr marL="0" indent="0" algn="ctr">
+              <a:buNone/>
+            </a:pPr>
+            <a:r>
+              <a:rPr lang="en-US" sz="770" dirty="0">
+                <a:solidFill>
+                  <a:srgbClr val="67758A"/>
+                </a:solidFill>
+              </a:rPr>
+              <a:t>TTC/冲突区/等级</a:t>
+            </a:r>
+            <a:endParaRPr lang="en-US" sz="770" dirty="0"/>
+          </a:p>
+        </p:txBody>
+      </p:sp>
+      <p:sp>
+        <p:nvSpPr>
+          <p:cNvPr id="19" name="Shape 17"/>
+          <p:cNvSpPr/>
+          <p:nvPr/>
+        </p:nvSpPr>
+        <p:spPr>
+          <a:xfrm>
+            <a:off x="6528816" y="2971800"/>
+            <a:ext cx="1417320" cy="914400"/>
+          </a:xfrm>
+          <a:prstGeom prst="roundRect">
+            <a:avLst>
+              <a:gd name="adj" fmla="val 7000"/>
+            </a:avLst>
+          </a:prstGeom>
+          <a:solidFill>
+            <a:srgbClr val="FFFFFF"/>
+          </a:solidFill>
+          <a:ln w="15240">
+            <a:solidFill>
+              <a:srgbClr val="116DFF"/>
+            </a:solidFill>
+            <a:prstDash val="solid"/>
+          </a:ln>
+        </p:spPr>
+      </p:sp>
+      <p:sp>
+        <p:nvSpPr>
+          <p:cNvPr id="20" name="Text 18"/>
+          <p:cNvSpPr/>
+          <p:nvPr/>
+        </p:nvSpPr>
+        <p:spPr>
+          <a:xfrm>
+            <a:off x="6638544" y="3118104"/>
+            <a:ext cx="1197864" cy="210312"/>
+          </a:xfrm>
+          <a:prstGeom prst="rect">
+            <a:avLst/>
+          </a:prstGeom>
+          <a:noFill/>
+        </p:spPr>
+        <p:txBody>
+          <a:bodyPr wrap="square" lIns="0" tIns="0" rIns="0" bIns="0" rtlCol="0" anchor="ctr"/>
+          <a:lstStyle/>
+          <a:p>
+            <a:pPr marL="0" indent="0" algn="ctr">
+              <a:buNone/>
+            </a:pPr>
+            <a:r>
+              <a:rPr lang="en-US" sz="1100" b="1" dirty="0">
+                <a:solidFill>
+                  <a:srgbClr val="0B1F3A"/>
+                </a:solidFill>
+              </a:rPr>
+              <a:t>RSU / V2X</a:t>
+            </a:r>
+            <a:endParaRPr lang="en-US" sz="1100" dirty="0"/>
+          </a:p>
+        </p:txBody>
+      </p:sp>
+      <p:sp>
+        <p:nvSpPr>
+          <p:cNvPr id="21" name="Text 19"/>
+          <p:cNvSpPr/>
+          <p:nvPr/>
+        </p:nvSpPr>
+        <p:spPr>
+          <a:xfrm>
+            <a:off x="6638544" y="3456432"/>
+            <a:ext cx="1197864" cy="219456"/>
+          </a:xfrm>
+          <a:prstGeom prst="rect">
+            <a:avLst/>
+          </a:prstGeom>
+          <a:noFill/>
+        </p:spPr>
+        <p:txBody>
+          <a:bodyPr wrap="square" lIns="0" tIns="0" rIns="0" bIns="0" rtlCol="0" anchor="ctr"/>
+          <a:lstStyle/>
+          <a:p>
+            <a:pPr marL="0" indent="0" algn="ctr">
+              <a:buNone/>
+            </a:pPr>
+            <a:r>
+              <a:rPr lang="en-US" sz="770" dirty="0">
+                <a:solidFill>
+                  <a:srgbClr val="67758A"/>
+                </a:solidFill>
+              </a:rPr>
+              <a:t>广播风险消息</a:t>
+            </a:r>
+            <a:endParaRPr lang="en-US" sz="770" dirty="0"/>
+          </a:p>
+        </p:txBody>
+      </p:sp>
+      <p:sp>
+        <p:nvSpPr>
+          <p:cNvPr id="22" name="Shape 20"/>
+          <p:cNvSpPr/>
+          <p:nvPr/>
+        </p:nvSpPr>
+        <p:spPr>
+          <a:xfrm>
+            <a:off x="8476488" y="2971800"/>
+            <a:ext cx="1417320" cy="914400"/>
+          </a:xfrm>
+          <a:prstGeom prst="roundRect">
+            <a:avLst>
+              <a:gd name="adj" fmla="val 7000"/>
+            </a:avLst>
+          </a:prstGeom>
+          <a:solidFill>
+            <a:srgbClr val="FFFFFF"/>
+          </a:solidFill>
+          <a:ln w="15240">
+            <a:solidFill>
+              <a:srgbClr val="116DFF"/>
+            </a:solidFill>
+            <a:prstDash val="solid"/>
+          </a:ln>
+        </p:spPr>
+      </p:sp>
+      <p:sp>
+        <p:nvSpPr>
+          <p:cNvPr id="23" name="Text 21"/>
+          <p:cNvSpPr/>
+          <p:nvPr/>
+        </p:nvSpPr>
+        <p:spPr>
+          <a:xfrm>
+            <a:off x="8586216" y="3118104"/>
+            <a:ext cx="1197864" cy="210312"/>
+          </a:xfrm>
+          <a:prstGeom prst="rect">
+            <a:avLst/>
+          </a:prstGeom>
+          <a:noFill/>
+        </p:spPr>
+        <p:txBody>
+          <a:bodyPr wrap="square" lIns="0" tIns="0" rIns="0" bIns="0" rtlCol="0" anchor="ctr"/>
+          <a:lstStyle/>
+          <a:p>
+            <a:pPr marL="0" indent="0" algn="ctr">
+              <a:buNone/>
+            </a:pPr>
+            <a:r>
+              <a:rPr lang="en-US" sz="1100" b="1" dirty="0">
+                <a:solidFill>
+                  <a:srgbClr val="0B1F3A"/>
+                </a:solidFill>
+              </a:rPr>
+              <a:t>小车响应</a:t>
+            </a:r>
+            <a:endParaRPr lang="en-US" sz="1100" dirty="0"/>
+          </a:p>
+        </p:txBody>
+      </p:sp>
+      <p:sp>
+        <p:nvSpPr>
+          <p:cNvPr id="24" name="Text 22"/>
+          <p:cNvSpPr/>
+          <p:nvPr/>
+        </p:nvSpPr>
+        <p:spPr>
+          <a:xfrm>
+            <a:off x="8586216" y="3456432"/>
+            <a:ext cx="1197864" cy="219456"/>
+          </a:xfrm>
+          <a:prstGeom prst="rect">
+            <a:avLst/>
+          </a:prstGeom>
+          <a:noFill/>
+        </p:spPr>
+        <p:txBody>
+          <a:bodyPr wrap="square" lIns="0" tIns="0" rIns="0" bIns="0" rtlCol="0" anchor="ctr"/>
+          <a:lstStyle/>
+          <a:p>
+            <a:pPr marL="0" indent="0" algn="ctr">
+              <a:buNone/>
+            </a:pPr>
+            <a:r>
+              <a:rPr lang="en-US" sz="770" dirty="0">
+                <a:solidFill>
+                  <a:srgbClr val="67758A"/>
+                </a:solidFill>
+              </a:rPr>
+              <a:t>预警/减速/停车</a:t>
+            </a:r>
+            <a:endParaRPr lang="en-US" sz="770" dirty="0"/>
+          </a:p>
+        </p:txBody>
+      </p:sp>
+      <p:sp>
+        <p:nvSpPr>
+          <p:cNvPr id="25" name="Shape 23"/>
+          <p:cNvSpPr/>
+          <p:nvPr/>
+        </p:nvSpPr>
+        <p:spPr>
+          <a:xfrm>
+            <a:off x="10424160" y="2971800"/>
+            <a:ext cx="1417320" cy="914400"/>
+          </a:xfrm>
+          <a:prstGeom prst="roundRect">
+            <a:avLst>
+              <a:gd name="adj" fmla="val 7000"/>
+            </a:avLst>
+          </a:prstGeom>
+          <a:solidFill>
+            <a:srgbClr val="FFFFFF"/>
+          </a:solidFill>
+          <a:ln w="15240">
+            <a:solidFill>
+              <a:srgbClr val="116DFF"/>
+            </a:solidFill>
+            <a:prstDash val="solid"/>
+          </a:ln>
+        </p:spPr>
+      </p:sp>
+      <p:sp>
+        <p:nvSpPr>
+          <p:cNvPr id="26" name="Text 24"/>
+          <p:cNvSpPr/>
+          <p:nvPr/>
+        </p:nvSpPr>
+        <p:spPr>
+          <a:xfrm>
+            <a:off x="10533888" y="3118104"/>
+            <a:ext cx="1197864" cy="210312"/>
+          </a:xfrm>
+          <a:prstGeom prst="rect">
+            <a:avLst/>
+          </a:prstGeom>
+          <a:noFill/>
+        </p:spPr>
+        <p:txBody>
+          <a:bodyPr wrap="square" lIns="0" tIns="0" rIns="0" bIns="0" rtlCol="0" anchor="ctr"/>
+          <a:lstStyle/>
+          <a:p>
+            <a:pPr marL="0" indent="0" algn="ctr">
+              <a:buNone/>
+            </a:pPr>
+            <a:r>
+              <a:rPr lang="en-US" sz="1100" b="1" dirty="0">
+                <a:solidFill>
+                  <a:srgbClr val="0B1F3A"/>
+                </a:solidFill>
+              </a:rPr>
+              <a:t>大屏展示</a:t>
+            </a:r>
+            <a:endParaRPr lang="en-US" sz="1100" dirty="0"/>
+          </a:p>
+        </p:txBody>
+      </p:sp>
+      <p:sp>
+        <p:nvSpPr>
+          <p:cNvPr id="27" name="Text 25"/>
+          <p:cNvSpPr/>
+          <p:nvPr/>
+        </p:nvSpPr>
+        <p:spPr>
+          <a:xfrm>
+            <a:off x="10533888" y="3456432"/>
+            <a:ext cx="1197864" cy="219456"/>
+          </a:xfrm>
+          <a:prstGeom prst="rect">
+            <a:avLst/>
+          </a:prstGeom>
+          <a:noFill/>
+        </p:spPr>
+        <p:txBody>
+          <a:bodyPr wrap="square" lIns="0" tIns="0" rIns="0" bIns="0" rtlCol="0" anchor="ctr"/>
+          <a:lstStyle/>
+          <a:p>
+            <a:pPr marL="0" indent="0" algn="ctr">
+              <a:buNone/>
+            </a:pPr>
+            <a:r>
+              <a:rPr lang="en-US" sz="770" dirty="0">
+                <a:solidFill>
+                  <a:srgbClr val="67758A"/>
+                </a:solidFill>
+              </a:rPr>
+              <a:t>虚拟目标+过程解释</a:t>
+            </a:r>
+            <a:endParaRPr lang="en-US" sz="770" dirty="0"/>
+          </a:p>
+        </p:txBody>
+      </p:sp>
       <p:pic>
         <p:nvPicPr>
-          <p:cNvPr id="5" name="Image 0" descr="/mnt/data/sandtable_problem.jpg"/>
+          <p:cNvPr id="28" name="Image 0" descr="/mnt/data/scene_banner.jpg"/>
           <p:cNvPicPr>
             <a:picLocks noChangeAspect="1"/>
           </p:cNvPicPr>
@@ -5404,8 +5563,8 @@
         </p:blipFill>
         <p:spPr>
           <a:xfrm>
-            <a:off x="594360" y="1417320"/>
-            <a:ext cx="4800600" cy="4526280"/>
+            <a:off x="594360" y="1325880"/>
+            <a:ext cx="4526280" cy="1353312"/>
           </a:xfrm>
           <a:prstGeom prst="rect">
             <a:avLst/>
@@ -5414,14 +5573,14 @@
       </p:pic>
       <p:sp>
         <p:nvSpPr>
-          <p:cNvPr id="6" name="Text 3"/>
-          <p:cNvSpPr/>
-          <p:nvPr/>
-        </p:nvSpPr>
-        <p:spPr>
-          <a:xfrm>
-            <a:off x="640080" y="6016752"/>
-            <a:ext cx="4617720" cy="292608"/>
+          <p:cNvPr id="29" name="Text 26"/>
+          <p:cNvSpPr/>
+          <p:nvPr/>
+        </p:nvSpPr>
+        <p:spPr>
+          <a:xfrm>
+            <a:off x="5532120" y="1353312"/>
+            <a:ext cx="1298448" cy="237744"/>
           </a:xfrm>
           <a:prstGeom prst="rect">
             <a:avLst/>
@@ -5436,209 +5595,72 @@
               <a:buNone/>
             </a:pPr>
             <a:r>
-              <a:rPr lang="en-US" sz="950" dirty="0">
-                <a:solidFill>
-                  <a:srgbClr val="67758A"/>
-                </a:solidFill>
-              </a:rPr>
-              <a:t>现有沙盘天然具备遮挡场景：建筑转角、路口、横穿区域、路侧设备位</a:t>
-            </a:r>
-            <a:endParaRPr lang="en-US" sz="950" dirty="0"/>
-          </a:p>
-        </p:txBody>
-      </p:sp>
-      <p:sp>
-        <p:nvSpPr>
-          <p:cNvPr id="7" name="Text 4"/>
-          <p:cNvSpPr/>
-          <p:nvPr/>
-        </p:nvSpPr>
-        <p:spPr>
-          <a:xfrm>
-            <a:off x="5806440" y="1463040"/>
-            <a:ext cx="2011680" cy="274320"/>
-          </a:xfrm>
-          <a:prstGeom prst="rect">
-            <a:avLst/>
-          </a:prstGeom>
-          <a:noFill/>
-        </p:spPr>
-        <p:txBody>
-          <a:bodyPr wrap="square" lIns="0" tIns="0" rIns="0" bIns="0" rtlCol="0" anchor="ctr"/>
-          <a:lstStyle/>
-          <a:p>
-            <a:pPr marL="0" indent="0">
-              <a:buNone/>
-            </a:pPr>
-            <a:r>
-              <a:rPr lang="en-US" sz="1400" b="1" dirty="0">
-                <a:solidFill>
-                  <a:srgbClr val="0B1F3A"/>
-                </a:solidFill>
-              </a:rPr>
-              <a:t>传统演示的局限</a:t>
-            </a:r>
-            <a:endParaRPr lang="en-US" sz="1400" dirty="0"/>
-          </a:p>
-        </p:txBody>
-      </p:sp>
-      <p:sp>
-        <p:nvSpPr>
-          <p:cNvPr id="8" name="Text 5"/>
-          <p:cNvSpPr/>
-          <p:nvPr/>
-        </p:nvSpPr>
-        <p:spPr>
-          <a:xfrm>
-            <a:off x="5806440" y="1856232"/>
-            <a:ext cx="5074920" cy="1097280"/>
-          </a:xfrm>
-          <a:prstGeom prst="rect">
-            <a:avLst/>
-          </a:prstGeom>
-          <a:noFill/>
-        </p:spPr>
-        <p:txBody>
-          <a:bodyPr wrap="square" lIns="635" tIns="635" rIns="635" bIns="635" rtlCol="0" anchor="ctr">
+              <a:rPr lang="en-US" sz="1150" b="1" dirty="0">
+                <a:solidFill>
+                  <a:srgbClr val="116DFF"/>
+                </a:solidFill>
+              </a:rPr>
+              <a:t>一句话逻辑</a:t>
+            </a:r>
+            <a:endParaRPr lang="en-US" sz="1150" dirty="0"/>
+          </a:p>
+        </p:txBody>
+      </p:sp>
+      <p:sp>
+        <p:nvSpPr>
+          <p:cNvPr id="30" name="Text 27"/>
+          <p:cNvSpPr/>
+          <p:nvPr/>
+        </p:nvSpPr>
+        <p:spPr>
+          <a:xfrm>
+            <a:off x="5532120" y="1700784"/>
+            <a:ext cx="5440680" cy="621792"/>
+          </a:xfrm>
+          <a:prstGeom prst="rect">
+            <a:avLst/>
+          </a:prstGeom>
+          <a:noFill/>
+        </p:spPr>
+        <p:txBody>
+          <a:bodyPr wrap="square" lIns="254" tIns="254" rIns="254" bIns="254" rtlCol="0" anchor="ctr">
             <a:normAutofit/>
           </a:bodyPr>
           <a:lstStyle/>
           <a:p>
-            <a:r>
-              <a:rPr lang="en-US" sz="1240" dirty="0">
-                <a:solidFill>
-                  <a:srgbClr val="1E293B"/>
-                </a:solidFill>
-                <a:latin typeface="微软雅黑" panose="020B0503020204020204" charset="-122"/>
-                <a:ea typeface="微软雅黑" panose="020B0503020204020204" charset="-122"/>
-                <a:cs typeface="微软雅黑" panose="020B0503020204020204" pitchFamily="34" charset="-120"/>
-              </a:rPr>
-              <a:t>功能停留在红绿灯、循迹、简单避障</a:t>
-            </a:r>
-            <a:endParaRPr lang="en-US" sz="1240" dirty="0"/>
-          </a:p>
-          <a:p>
-            <a:r>
-              <a:rPr lang="en-US" sz="1240" dirty="0">
-                <a:solidFill>
-                  <a:srgbClr val="1E293B"/>
-                </a:solidFill>
-                <a:latin typeface="微软雅黑" panose="020B0503020204020204" charset="-122"/>
-                <a:ea typeface="微软雅黑" panose="020B0503020204020204" charset="-122"/>
-                <a:cs typeface="微软雅黑" panose="020B0503020204020204" pitchFamily="34" charset="-120"/>
-              </a:rPr>
-              <a:t>车辆只能在“看见目标后”再制动</a:t>
-            </a:r>
-            <a:endParaRPr lang="en-US" sz="1240" dirty="0"/>
-          </a:p>
-          <a:p>
-            <a:r>
-              <a:rPr lang="en-US" sz="1240" dirty="0">
-                <a:solidFill>
-                  <a:srgbClr val="1E293B"/>
-                </a:solidFill>
-                <a:latin typeface="微软雅黑" panose="020B0503020204020204" charset="-122"/>
-                <a:ea typeface="微软雅黑" panose="020B0503020204020204" charset="-122"/>
-                <a:cs typeface="微软雅黑" panose="020B0503020204020204" pitchFamily="34" charset="-120"/>
-              </a:rPr>
-              <a:t>缺少复杂城市道路的真实风险冲突</a:t>
-            </a:r>
-            <a:endParaRPr lang="en-US" sz="1240" dirty="0"/>
-          </a:p>
-        </p:txBody>
-      </p:sp>
-      <p:sp>
-        <p:nvSpPr>
-          <p:cNvPr id="9" name="Text 6"/>
-          <p:cNvSpPr/>
-          <p:nvPr/>
-        </p:nvSpPr>
-        <p:spPr>
-          <a:xfrm>
-            <a:off x="5806440" y="3255264"/>
-            <a:ext cx="2560320" cy="274320"/>
-          </a:xfrm>
-          <a:prstGeom prst="rect">
-            <a:avLst/>
-          </a:prstGeom>
-          <a:noFill/>
-        </p:spPr>
-        <p:txBody>
-          <a:bodyPr wrap="square" lIns="0" tIns="0" rIns="0" bIns="0" rtlCol="0" anchor="ctr"/>
-          <a:lstStyle/>
-          <a:p>
             <a:pPr marL="0" indent="0">
               <a:buNone/>
             </a:pPr>
             <a:r>
-              <a:rPr lang="en-US" sz="1400" b="1" dirty="0">
+              <a:rPr lang="en-US" sz="1600" b="1" dirty="0">
                 <a:solidFill>
                   <a:srgbClr val="0B1F3A"/>
                 </a:solidFill>
               </a:rPr>
-              <a:t>“鬼探头”的核心痛点</a:t>
-            </a:r>
-            <a:endParaRPr lang="en-US" sz="1400" dirty="0"/>
-          </a:p>
-        </p:txBody>
-      </p:sp>
-      <p:sp>
-        <p:nvSpPr>
-          <p:cNvPr id="10" name="Text 7"/>
-          <p:cNvSpPr/>
-          <p:nvPr/>
-        </p:nvSpPr>
-        <p:spPr>
-          <a:xfrm>
-            <a:off x="5806440" y="3657600"/>
-            <a:ext cx="5120640" cy="694944"/>
-          </a:xfrm>
-          <a:prstGeom prst="rect">
-            <a:avLst/>
-          </a:prstGeom>
-          <a:noFill/>
-        </p:spPr>
-        <p:txBody>
-          <a:bodyPr wrap="square" lIns="508" tIns="508" rIns="508" bIns="508" rtlCol="0" anchor="ctr">
-            <a:normAutofit/>
-          </a:bodyPr>
-          <a:lstStyle/>
-          <a:p>
-            <a:pPr marL="0" indent="0">
-              <a:buNone/>
-            </a:pPr>
-            <a:r>
-              <a:rPr lang="en-US" sz="1330" dirty="0">
-                <a:solidFill>
-                  <a:srgbClr val="1E293B"/>
-                </a:solidFill>
-              </a:rPr>
-              <a:t>建筑/停靠车辆/绿化带形成非视距盲区，行人或非机动车突然进入冲突区域；单车传感器发现太晚，预警窗口不足。</a:t>
-            </a:r>
-            <a:endParaRPr lang="en-US" sz="1330" dirty="0"/>
-          </a:p>
-        </p:txBody>
-      </p:sp>
-      <p:sp>
-        <p:nvSpPr>
-          <p:cNvPr id="11" name="Shape 8"/>
-          <p:cNvSpPr/>
-          <p:nvPr/>
-        </p:nvSpPr>
-        <p:spPr>
-          <a:xfrm>
-            <a:off x="5806440" y="4736592"/>
-            <a:ext cx="5074920" cy="804672"/>
-          </a:xfrm>
-          <a:prstGeom prst="rect">
-            <a:avLst/>
-          </a:prstGeom>
-          <a:solidFill>
-            <a:srgbClr val="EEF5FF"/>
-          </a:solidFill>
+              <a:t>不是让车辆“自己硬看出来”，而是让道路基础设施成为车辆的外部眼睛。</a:t>
+            </a:r>
+            <a:endParaRPr lang="en-US" sz="1600" dirty="0"/>
+          </a:p>
+        </p:txBody>
+      </p:sp>
+      <p:sp>
+        <p:nvSpPr>
+          <p:cNvPr id="31" name="Shape 28"/>
+          <p:cNvSpPr/>
+          <p:nvPr/>
+        </p:nvSpPr>
+        <p:spPr>
+          <a:xfrm>
+            <a:off x="5532120" y="2587752"/>
+            <a:ext cx="5349240" cy="0"/>
+          </a:xfrm>
+          <a:prstGeom prst="line">
+            <a:avLst/>
+          </a:prstGeom>
+          <a:noFill/>
           <a:ln w="12700">
             <a:solidFill>
-              <a:srgbClr val="D6E8FF"/>
+              <a:srgbClr val="D7E3F4"/>
             </a:solidFill>
             <a:prstDash val="solid"/>
           </a:ln>
@@ -5646,14 +5668,14 @@
       </p:sp>
       <p:sp>
         <p:nvSpPr>
-          <p:cNvPr id="12" name="Text 9"/>
-          <p:cNvSpPr/>
-          <p:nvPr/>
-        </p:nvSpPr>
-        <p:spPr>
-          <a:xfrm>
-            <a:off x="6016752" y="4882896"/>
-            <a:ext cx="2468880" cy="201168"/>
+          <p:cNvPr id="32" name="Text 29"/>
+          <p:cNvSpPr/>
+          <p:nvPr/>
+        </p:nvSpPr>
+        <p:spPr>
+          <a:xfrm>
+            <a:off x="685800" y="4617720"/>
+            <a:ext cx="1097280" cy="219456"/>
           </a:xfrm>
           <a:prstGeom prst="rect">
             <a:avLst/>
@@ -5668,27 +5690,50 @@
               <a:buNone/>
             </a:pPr>
             <a:r>
-              <a:rPr lang="en-US" sz="1000" b="1" dirty="0">
-                <a:solidFill>
-                  <a:srgbClr val="116DFF"/>
-                </a:solidFill>
-              </a:rPr>
-              <a:t>本方案要展示的核心变化</a:t>
-            </a:r>
-            <a:endParaRPr lang="en-US" sz="1000" dirty="0"/>
-          </a:p>
-        </p:txBody>
-      </p:sp>
-      <p:sp>
-        <p:nvSpPr>
-          <p:cNvPr id="13" name="Text 10"/>
-          <p:cNvSpPr/>
-          <p:nvPr/>
-        </p:nvSpPr>
-        <p:spPr>
-          <a:xfrm>
-            <a:off x="6016752" y="5166360"/>
-            <a:ext cx="4526280" cy="256032"/>
+              <a:rPr lang="en-US" sz="1050" b="1" dirty="0">
+                <a:solidFill>
+                  <a:srgbClr val="0B1F3A"/>
+                </a:solidFill>
+              </a:rPr>
+              <a:t>关键能力</a:t>
+            </a:r>
+            <a:endParaRPr lang="en-US" sz="1050" dirty="0"/>
+          </a:p>
+        </p:txBody>
+      </p:sp>
+      <p:sp>
+        <p:nvSpPr>
+          <p:cNvPr id="33" name="Shape 30"/>
+          <p:cNvSpPr/>
+          <p:nvPr/>
+        </p:nvSpPr>
+        <p:spPr>
+          <a:xfrm>
+            <a:off x="777240" y="5102352"/>
+            <a:ext cx="256032" cy="256032"/>
+          </a:xfrm>
+          <a:prstGeom prst="arc">
+            <a:avLst/>
+          </a:prstGeom>
+          <a:noFill/>
+          <a:ln w="25400">
+            <a:solidFill>
+              <a:srgbClr val="116DFF"/>
+            </a:solidFill>
+            <a:prstDash val="solid"/>
+          </a:ln>
+        </p:spPr>
+      </p:sp>
+      <p:sp>
+        <p:nvSpPr>
+          <p:cNvPr id="34" name="Text 31"/>
+          <p:cNvSpPr/>
+          <p:nvPr/>
+        </p:nvSpPr>
+        <p:spPr>
+          <a:xfrm>
+            <a:off x="1143000" y="5010912"/>
+            <a:ext cx="1417320" cy="201168"/>
           </a:xfrm>
           <a:prstGeom prst="rect">
             <a:avLst/>
@@ -5703,27 +5748,27 @@
               <a:buNone/>
             </a:pPr>
             <a:r>
-              <a:rPr lang="en-US" sz="1300" b="1" dirty="0">
+              <a:rPr lang="en-US" sz="1100" b="1" dirty="0">
                 <a:solidFill>
                   <a:srgbClr val="0B1F3A"/>
                 </a:solidFill>
               </a:rPr>
-              <a:t>从“单车被动避障” → “路侧主动预警 + 车辆提前处置”</a:t>
-            </a:r>
-            <a:endParaRPr lang="en-US" sz="1300" dirty="0"/>
-          </a:p>
-        </p:txBody>
-      </p:sp>
-      <p:sp>
-        <p:nvSpPr>
-          <p:cNvPr id="14" name="Text 11"/>
-          <p:cNvSpPr/>
-          <p:nvPr/>
-        </p:nvSpPr>
-        <p:spPr>
-          <a:xfrm>
-            <a:off x="5806440" y="6016752"/>
-            <a:ext cx="5120640" cy="219456"/>
+              <a:t>看得见盲区</a:t>
+            </a:r>
+            <a:endParaRPr lang="en-US" sz="1100" dirty="0"/>
+          </a:p>
+        </p:txBody>
+      </p:sp>
+      <p:sp>
+        <p:nvSpPr>
+          <p:cNvPr id="35" name="Text 32"/>
+          <p:cNvSpPr/>
+          <p:nvPr/>
+        </p:nvSpPr>
+        <p:spPr>
+          <a:xfrm>
+            <a:off x="1143000" y="5321808"/>
+            <a:ext cx="1874520" cy="320040"/>
           </a:xfrm>
           <a:prstGeom prst="rect">
             <a:avLst/>
@@ -5734,6 +5779,320 @@
           <a:bodyPr wrap="square" lIns="0" tIns="0" rIns="0" bIns="0" rtlCol="0" anchor="ctr"/>
           <a:lstStyle/>
           <a:p>
+            <a:pPr marL="0" indent="0">
+              <a:buNone/>
+            </a:pPr>
+            <a:r>
+              <a:rPr lang="en-US" sz="840" dirty="0">
+                <a:solidFill>
+                  <a:srgbClr val="67758A"/>
+                </a:solidFill>
+              </a:rPr>
+              <a:t>路侧摄像头覆盖转角和横穿区</a:t>
+            </a:r>
+            <a:endParaRPr lang="en-US" sz="840" dirty="0"/>
+          </a:p>
+        </p:txBody>
+      </p:sp>
+      <p:sp>
+        <p:nvSpPr>
+          <p:cNvPr id="36" name="Shape 33"/>
+          <p:cNvSpPr/>
+          <p:nvPr/>
+        </p:nvSpPr>
+        <p:spPr>
+          <a:xfrm>
+            <a:off x="3566160" y="5102352"/>
+            <a:ext cx="256032" cy="256032"/>
+          </a:xfrm>
+          <a:prstGeom prst="arc">
+            <a:avLst/>
+          </a:prstGeom>
+          <a:noFill/>
+          <a:ln w="25400">
+            <a:solidFill>
+              <a:srgbClr val="116DFF"/>
+            </a:solidFill>
+            <a:prstDash val="solid"/>
+          </a:ln>
+        </p:spPr>
+      </p:sp>
+      <p:sp>
+        <p:nvSpPr>
+          <p:cNvPr id="37" name="Text 34"/>
+          <p:cNvSpPr/>
+          <p:nvPr/>
+        </p:nvSpPr>
+        <p:spPr>
+          <a:xfrm>
+            <a:off x="3931920" y="5010912"/>
+            <a:ext cx="1417320" cy="201168"/>
+          </a:xfrm>
+          <a:prstGeom prst="rect">
+            <a:avLst/>
+          </a:prstGeom>
+          <a:noFill/>
+        </p:spPr>
+        <p:txBody>
+          <a:bodyPr wrap="square" lIns="0" tIns="0" rIns="0" bIns="0" rtlCol="0" anchor="ctr"/>
+          <a:lstStyle/>
+          <a:p>
+            <a:pPr marL="0" indent="0">
+              <a:buNone/>
+            </a:pPr>
+            <a:r>
+              <a:rPr lang="en-US" sz="1100" b="1" dirty="0">
+                <a:solidFill>
+                  <a:srgbClr val="0B1F3A"/>
+                </a:solidFill>
+              </a:rPr>
+              <a:t>算得出风险</a:t>
+            </a:r>
+            <a:endParaRPr lang="en-US" sz="1100" dirty="0"/>
+          </a:p>
+        </p:txBody>
+      </p:sp>
+      <p:sp>
+        <p:nvSpPr>
+          <p:cNvPr id="38" name="Text 35"/>
+          <p:cNvSpPr/>
+          <p:nvPr/>
+        </p:nvSpPr>
+        <p:spPr>
+          <a:xfrm>
+            <a:off x="3931920" y="5321808"/>
+            <a:ext cx="1874520" cy="320040"/>
+          </a:xfrm>
+          <a:prstGeom prst="rect">
+            <a:avLst/>
+          </a:prstGeom>
+          <a:noFill/>
+        </p:spPr>
+        <p:txBody>
+          <a:bodyPr wrap="square" lIns="0" tIns="0" rIns="0" bIns="0" rtlCol="0" anchor="ctr"/>
+          <a:lstStyle/>
+          <a:p>
+            <a:pPr marL="0" indent="0">
+              <a:buNone/>
+            </a:pPr>
+            <a:r>
+              <a:rPr lang="en-US" sz="840" dirty="0">
+                <a:solidFill>
+                  <a:srgbClr val="67758A"/>
+                </a:solidFill>
+              </a:rPr>
+              <a:t>TTC、速度、距离、冲突区域</a:t>
+            </a:r>
+            <a:endParaRPr lang="en-US" sz="840" dirty="0"/>
+          </a:p>
+        </p:txBody>
+      </p:sp>
+      <p:sp>
+        <p:nvSpPr>
+          <p:cNvPr id="39" name="Shape 36"/>
+          <p:cNvSpPr/>
+          <p:nvPr/>
+        </p:nvSpPr>
+        <p:spPr>
+          <a:xfrm>
+            <a:off x="6355080" y="5102352"/>
+            <a:ext cx="256032" cy="256032"/>
+          </a:xfrm>
+          <a:prstGeom prst="arc">
+            <a:avLst/>
+          </a:prstGeom>
+          <a:noFill/>
+          <a:ln w="25400">
+            <a:solidFill>
+              <a:srgbClr val="116DFF"/>
+            </a:solidFill>
+            <a:prstDash val="solid"/>
+          </a:ln>
+        </p:spPr>
+      </p:sp>
+      <p:sp>
+        <p:nvSpPr>
+          <p:cNvPr id="40" name="Text 37"/>
+          <p:cNvSpPr/>
+          <p:nvPr/>
+        </p:nvSpPr>
+        <p:spPr>
+          <a:xfrm>
+            <a:off x="6720840" y="5010912"/>
+            <a:ext cx="1417320" cy="201168"/>
+          </a:xfrm>
+          <a:prstGeom prst="rect">
+            <a:avLst/>
+          </a:prstGeom>
+          <a:noFill/>
+        </p:spPr>
+        <p:txBody>
+          <a:bodyPr wrap="square" lIns="0" tIns="0" rIns="0" bIns="0" rtlCol="0" anchor="ctr"/>
+          <a:lstStyle/>
+          <a:p>
+            <a:pPr marL="0" indent="0">
+              <a:buNone/>
+            </a:pPr>
+            <a:r>
+              <a:rPr lang="en-US" sz="1100" b="1" dirty="0">
+                <a:solidFill>
+                  <a:srgbClr val="0B1F3A"/>
+                </a:solidFill>
+              </a:rPr>
+              <a:t>发得到车辆</a:t>
+            </a:r>
+            <a:endParaRPr lang="en-US" sz="1100" dirty="0"/>
+          </a:p>
+        </p:txBody>
+      </p:sp>
+      <p:sp>
+        <p:nvSpPr>
+          <p:cNvPr id="41" name="Text 38"/>
+          <p:cNvSpPr/>
+          <p:nvPr/>
+        </p:nvSpPr>
+        <p:spPr>
+          <a:xfrm>
+            <a:off x="6720840" y="5321808"/>
+            <a:ext cx="1874520" cy="320040"/>
+          </a:xfrm>
+          <a:prstGeom prst="rect">
+            <a:avLst/>
+          </a:prstGeom>
+          <a:noFill/>
+        </p:spPr>
+        <p:txBody>
+          <a:bodyPr wrap="square" lIns="0" tIns="0" rIns="0" bIns="0" rtlCol="0" anchor="ctr"/>
+          <a:lstStyle/>
+          <a:p>
+            <a:pPr marL="0" indent="0">
+              <a:buNone/>
+            </a:pPr>
+            <a:r>
+              <a:rPr lang="en-US" sz="840" dirty="0">
+                <a:solidFill>
+                  <a:srgbClr val="67758A"/>
+                </a:solidFill>
+              </a:rPr>
+              <a:t>RSU/V2X下发风险消息</a:t>
+            </a:r>
+            <a:endParaRPr lang="en-US" sz="840" dirty="0"/>
+          </a:p>
+        </p:txBody>
+      </p:sp>
+      <p:sp>
+        <p:nvSpPr>
+          <p:cNvPr id="42" name="Shape 39"/>
+          <p:cNvSpPr/>
+          <p:nvPr/>
+        </p:nvSpPr>
+        <p:spPr>
+          <a:xfrm>
+            <a:off x="9144000" y="5102352"/>
+            <a:ext cx="256032" cy="256032"/>
+          </a:xfrm>
+          <a:prstGeom prst="arc">
+            <a:avLst/>
+          </a:prstGeom>
+          <a:noFill/>
+          <a:ln w="25400">
+            <a:solidFill>
+              <a:srgbClr val="116DFF"/>
+            </a:solidFill>
+            <a:prstDash val="solid"/>
+          </a:ln>
+        </p:spPr>
+      </p:sp>
+      <p:sp>
+        <p:nvSpPr>
+          <p:cNvPr id="43" name="Text 40"/>
+          <p:cNvSpPr/>
+          <p:nvPr/>
+        </p:nvSpPr>
+        <p:spPr>
+          <a:xfrm>
+            <a:off x="9509760" y="5010912"/>
+            <a:ext cx="1417320" cy="201168"/>
+          </a:xfrm>
+          <a:prstGeom prst="rect">
+            <a:avLst/>
+          </a:prstGeom>
+          <a:noFill/>
+        </p:spPr>
+        <p:txBody>
+          <a:bodyPr wrap="square" lIns="0" tIns="0" rIns="0" bIns="0" rtlCol="0" anchor="ctr"/>
+          <a:lstStyle/>
+          <a:p>
+            <a:pPr marL="0" indent="0">
+              <a:buNone/>
+            </a:pPr>
+            <a:r>
+              <a:rPr lang="en-US" sz="1100" b="1" dirty="0">
+                <a:solidFill>
+                  <a:srgbClr val="0B1F3A"/>
+                </a:solidFill>
+              </a:rPr>
+              <a:t>解释得清楚</a:t>
+            </a:r>
+            <a:endParaRPr lang="en-US" sz="1100" dirty="0"/>
+          </a:p>
+        </p:txBody>
+      </p:sp>
+      <p:sp>
+        <p:nvSpPr>
+          <p:cNvPr id="44" name="Text 41"/>
+          <p:cNvSpPr/>
+          <p:nvPr/>
+        </p:nvSpPr>
+        <p:spPr>
+          <a:xfrm>
+            <a:off x="9509760" y="5321808"/>
+            <a:ext cx="1874520" cy="320040"/>
+          </a:xfrm>
+          <a:prstGeom prst="rect">
+            <a:avLst/>
+          </a:prstGeom>
+          <a:noFill/>
+        </p:spPr>
+        <p:txBody>
+          <a:bodyPr wrap="square" lIns="0" tIns="0" rIns="0" bIns="0" rtlCol="0" anchor="ctr"/>
+          <a:lstStyle/>
+          <a:p>
+            <a:pPr marL="0" indent="0">
+              <a:buNone/>
+            </a:pPr>
+            <a:r>
+              <a:rPr lang="en-US" sz="840" dirty="0">
+                <a:solidFill>
+                  <a:srgbClr val="67758A"/>
+                </a:solidFill>
+              </a:rPr>
+              <a:t>大屏同步展示识别与响应链路</a:t>
+            </a:r>
+            <a:endParaRPr lang="en-US" sz="840" dirty="0"/>
+          </a:p>
+        </p:txBody>
+      </p:sp>
+      <p:sp>
+        <p:nvSpPr>
+          <p:cNvPr id="45" name="Text 42"/>
+          <p:cNvSpPr/>
+          <p:nvPr/>
+        </p:nvSpPr>
+        <p:spPr>
+          <a:xfrm>
+            <a:off x="685800" y="6126480"/>
+            <a:ext cx="7498080" cy="219456"/>
+          </a:xfrm>
+          <a:prstGeom prst="rect">
+            <a:avLst/>
+          </a:prstGeom>
+          <a:noFill/>
+        </p:spPr>
+        <p:txBody>
+          <a:bodyPr wrap="square" lIns="0" tIns="0" rIns="0" bIns="0" rtlCol="0" anchor="ctr"/>
+          <a:lstStyle/>
+          <a:p>
             <a:pPr marL="0" indent="0" algn="l">
               <a:buNone/>
             </a:pPr>
@@ -5743,7 +6102,7 @@
                   <a:srgbClr val="7B8798"/>
                 </a:solidFill>
               </a:rPr>
-              <a:t>参考：V2X被用于非视距（NLOS）碰撞风险预警。资料：工研院产业学习网。</a:t>
+              <a:t>参考：V2I让车辆与道路设施交换信号灯、路况、障碍物等信息。资料：USI Global。</a:t>
             </a:r>
             <a:endParaRPr lang="en-US" sz="730" dirty="0"/>
           </a:p>
@@ -5751,7 +6110,7 @@
       </p:sp>
       <p:sp>
         <p:nvSpPr>
-          <p:cNvPr id="15" name="Text 12"/>
+          <p:cNvPr id="46" name="Text 43"/>
           <p:cNvSpPr/>
           <p:nvPr/>
         </p:nvSpPr>
@@ -5786,7 +6145,7 @@
       </p:sp>
       <p:sp>
         <p:nvSpPr>
-          <p:cNvPr id="16" name="Text 13"/>
+          <p:cNvPr id="47" name="Text 44"/>
           <p:cNvSpPr/>
           <p:nvPr/>
         </p:nvSpPr>
@@ -5876,7 +6235,7 @@
                 <a:ea typeface="微软雅黑" panose="020B0503020204020204" charset="-122"/>
                 <a:cs typeface="微软雅黑" panose="020B0503020204020204" pitchFamily="34" charset="-120"/>
               </a:rPr>
-              <a:t>02  总体方案：路侧先感知，车辆早预警</a:t>
+              <a:t>03  现场演示脚本：6步让领导看懂</a:t>
             </a:r>
             <a:endParaRPr lang="en-US" sz="2300" dirty="0"/>
           </a:p>
@@ -5905,716 +6264,9 @@
           </a:ln>
         </p:spPr>
       </p:sp>
-      <p:sp>
-        <p:nvSpPr>
-          <p:cNvPr id="5" name="Shape 3"/>
-          <p:cNvSpPr/>
-          <p:nvPr/>
-        </p:nvSpPr>
-        <p:spPr>
-          <a:xfrm>
-            <a:off x="2103120" y="3429000"/>
-            <a:ext cx="530352" cy="0"/>
-          </a:xfrm>
-          <a:prstGeom prst="line">
-            <a:avLst/>
-          </a:prstGeom>
-          <a:noFill/>
-          <a:ln w="19050">
-            <a:solidFill>
-              <a:srgbClr val="116DFF"/>
-            </a:solidFill>
-            <a:prstDash val="solid"/>
-            <a:headEnd type="none"/>
-            <a:tailEnd type="triangle"/>
-          </a:ln>
-        </p:spPr>
-      </p:sp>
-      <p:sp>
-        <p:nvSpPr>
-          <p:cNvPr id="6" name="Shape 4"/>
-          <p:cNvSpPr/>
-          <p:nvPr/>
-        </p:nvSpPr>
-        <p:spPr>
-          <a:xfrm>
-            <a:off x="4050792" y="3429000"/>
-            <a:ext cx="530352" cy="0"/>
-          </a:xfrm>
-          <a:prstGeom prst="line">
-            <a:avLst/>
-          </a:prstGeom>
-          <a:noFill/>
-          <a:ln w="19050">
-            <a:solidFill>
-              <a:srgbClr val="116DFF"/>
-            </a:solidFill>
-            <a:prstDash val="solid"/>
-            <a:headEnd type="none"/>
-            <a:tailEnd type="triangle"/>
-          </a:ln>
-        </p:spPr>
-      </p:sp>
-      <p:sp>
-        <p:nvSpPr>
-          <p:cNvPr id="7" name="Shape 5"/>
-          <p:cNvSpPr/>
-          <p:nvPr/>
-        </p:nvSpPr>
-        <p:spPr>
-          <a:xfrm>
-            <a:off x="5998464" y="3429000"/>
-            <a:ext cx="530352" cy="0"/>
-          </a:xfrm>
-          <a:prstGeom prst="line">
-            <a:avLst/>
-          </a:prstGeom>
-          <a:noFill/>
-          <a:ln w="19050">
-            <a:solidFill>
-              <a:srgbClr val="116DFF"/>
-            </a:solidFill>
-            <a:prstDash val="solid"/>
-            <a:headEnd type="none"/>
-            <a:tailEnd type="triangle"/>
-          </a:ln>
-        </p:spPr>
-      </p:sp>
-      <p:sp>
-        <p:nvSpPr>
-          <p:cNvPr id="8" name="Shape 6"/>
-          <p:cNvSpPr/>
-          <p:nvPr/>
-        </p:nvSpPr>
-        <p:spPr>
-          <a:xfrm>
-            <a:off x="7946136" y="3429000"/>
-            <a:ext cx="530352" cy="0"/>
-          </a:xfrm>
-          <a:prstGeom prst="line">
-            <a:avLst/>
-          </a:prstGeom>
-          <a:noFill/>
-          <a:ln w="19050">
-            <a:solidFill>
-              <a:srgbClr val="116DFF"/>
-            </a:solidFill>
-            <a:prstDash val="solid"/>
-            <a:headEnd type="none"/>
-            <a:tailEnd type="triangle"/>
-          </a:ln>
-        </p:spPr>
-      </p:sp>
-      <p:sp>
-        <p:nvSpPr>
-          <p:cNvPr id="9" name="Shape 7"/>
-          <p:cNvSpPr/>
-          <p:nvPr/>
-        </p:nvSpPr>
-        <p:spPr>
-          <a:xfrm>
-            <a:off x="9893808" y="3429000"/>
-            <a:ext cx="530352" cy="0"/>
-          </a:xfrm>
-          <a:prstGeom prst="line">
-            <a:avLst/>
-          </a:prstGeom>
-          <a:noFill/>
-          <a:ln w="19050">
-            <a:solidFill>
-              <a:srgbClr val="116DFF"/>
-            </a:solidFill>
-            <a:prstDash val="solid"/>
-            <a:headEnd type="none"/>
-            <a:tailEnd type="triangle"/>
-          </a:ln>
-        </p:spPr>
-      </p:sp>
-      <p:sp>
-        <p:nvSpPr>
-          <p:cNvPr id="10" name="Shape 8"/>
-          <p:cNvSpPr/>
-          <p:nvPr/>
-        </p:nvSpPr>
-        <p:spPr>
-          <a:xfrm>
-            <a:off x="685800" y="2971800"/>
-            <a:ext cx="1417320" cy="914400"/>
-          </a:xfrm>
-          <a:prstGeom prst="roundRect">
-            <a:avLst>
-              <a:gd name="adj" fmla="val 7000"/>
-            </a:avLst>
-          </a:prstGeom>
-          <a:solidFill>
-            <a:srgbClr val="FFFFFF"/>
-          </a:solidFill>
-          <a:ln w="15240">
-            <a:solidFill>
-              <a:srgbClr val="116DFF"/>
-            </a:solidFill>
-            <a:prstDash val="solid"/>
-          </a:ln>
-        </p:spPr>
-      </p:sp>
-      <p:sp>
-        <p:nvSpPr>
-          <p:cNvPr id="11" name="Text 9"/>
-          <p:cNvSpPr/>
-          <p:nvPr/>
-        </p:nvSpPr>
-        <p:spPr>
-          <a:xfrm>
-            <a:off x="795528" y="3118104"/>
-            <a:ext cx="1197864" cy="210312"/>
-          </a:xfrm>
-          <a:prstGeom prst="rect">
-            <a:avLst/>
-          </a:prstGeom>
-          <a:noFill/>
-        </p:spPr>
-        <p:txBody>
-          <a:bodyPr wrap="square" lIns="0" tIns="0" rIns="0" bIns="0" rtlCol="0" anchor="ctr"/>
-          <a:lstStyle/>
-          <a:p>
-            <a:pPr marL="0" indent="0" algn="ctr">
-              <a:buNone/>
-            </a:pPr>
-            <a:r>
-              <a:rPr lang="en-US" sz="1100" b="1" dirty="0">
-                <a:solidFill>
-                  <a:srgbClr val="0B1F3A"/>
-                </a:solidFill>
-              </a:rPr>
-              <a:t>路侧摄像头</a:t>
-            </a:r>
-            <a:endParaRPr lang="en-US" sz="1100" dirty="0"/>
-          </a:p>
-        </p:txBody>
-      </p:sp>
-      <p:sp>
-        <p:nvSpPr>
-          <p:cNvPr id="12" name="Text 10"/>
-          <p:cNvSpPr/>
-          <p:nvPr/>
-        </p:nvSpPr>
-        <p:spPr>
-          <a:xfrm>
-            <a:off x="795528" y="3456432"/>
-            <a:ext cx="1197864" cy="219456"/>
-          </a:xfrm>
-          <a:prstGeom prst="rect">
-            <a:avLst/>
-          </a:prstGeom>
-          <a:noFill/>
-        </p:spPr>
-        <p:txBody>
-          <a:bodyPr wrap="square" lIns="0" tIns="0" rIns="0" bIns="0" rtlCol="0" anchor="ctr"/>
-          <a:lstStyle/>
-          <a:p>
-            <a:pPr marL="0" indent="0" algn="ctr">
-              <a:buNone/>
-            </a:pPr>
-            <a:r>
-              <a:rPr lang="en-US" sz="770" dirty="0">
-                <a:solidFill>
-                  <a:srgbClr val="67758A"/>
-                </a:solidFill>
-              </a:rPr>
-              <a:t>盲区目标采集</a:t>
-            </a:r>
-            <a:endParaRPr lang="en-US" sz="770" dirty="0"/>
-          </a:p>
-        </p:txBody>
-      </p:sp>
-      <p:sp>
-        <p:nvSpPr>
-          <p:cNvPr id="13" name="Shape 11"/>
-          <p:cNvSpPr/>
-          <p:nvPr/>
-        </p:nvSpPr>
-        <p:spPr>
-          <a:xfrm>
-            <a:off x="2633472" y="2971800"/>
-            <a:ext cx="1417320" cy="914400"/>
-          </a:xfrm>
-          <a:prstGeom prst="roundRect">
-            <a:avLst>
-              <a:gd name="adj" fmla="val 7000"/>
-            </a:avLst>
-          </a:prstGeom>
-          <a:solidFill>
-            <a:srgbClr val="FFFFFF"/>
-          </a:solidFill>
-          <a:ln w="15240">
-            <a:solidFill>
-              <a:srgbClr val="116DFF"/>
-            </a:solidFill>
-            <a:prstDash val="solid"/>
-          </a:ln>
-        </p:spPr>
-      </p:sp>
-      <p:sp>
-        <p:nvSpPr>
-          <p:cNvPr id="14" name="Text 12"/>
-          <p:cNvSpPr/>
-          <p:nvPr/>
-        </p:nvSpPr>
-        <p:spPr>
-          <a:xfrm>
-            <a:off x="2743200" y="3118104"/>
-            <a:ext cx="1197864" cy="210312"/>
-          </a:xfrm>
-          <a:prstGeom prst="rect">
-            <a:avLst/>
-          </a:prstGeom>
-          <a:noFill/>
-        </p:spPr>
-        <p:txBody>
-          <a:bodyPr wrap="square" lIns="0" tIns="0" rIns="0" bIns="0" rtlCol="0" anchor="ctr"/>
-          <a:lstStyle/>
-          <a:p>
-            <a:pPr marL="0" indent="0" algn="ctr">
-              <a:buNone/>
-            </a:pPr>
-            <a:r>
-              <a:rPr lang="en-US" sz="1100" b="1" dirty="0">
-                <a:solidFill>
-                  <a:srgbClr val="0B1F3A"/>
-                </a:solidFill>
-              </a:rPr>
-              <a:t>边缘AI</a:t>
-            </a:r>
-            <a:endParaRPr lang="en-US" sz="1100" dirty="0"/>
-          </a:p>
-        </p:txBody>
-      </p:sp>
-      <p:sp>
-        <p:nvSpPr>
-          <p:cNvPr id="15" name="Text 13"/>
-          <p:cNvSpPr/>
-          <p:nvPr/>
-        </p:nvSpPr>
-        <p:spPr>
-          <a:xfrm>
-            <a:off x="2743200" y="3456432"/>
-            <a:ext cx="1197864" cy="219456"/>
-          </a:xfrm>
-          <a:prstGeom prst="rect">
-            <a:avLst/>
-          </a:prstGeom>
-          <a:noFill/>
-        </p:spPr>
-        <p:txBody>
-          <a:bodyPr wrap="square" lIns="0" tIns="0" rIns="0" bIns="0" rtlCol="0" anchor="ctr"/>
-          <a:lstStyle/>
-          <a:p>
-            <a:pPr marL="0" indent="0" algn="ctr">
-              <a:buNone/>
-            </a:pPr>
-            <a:r>
-              <a:rPr lang="en-US" sz="770" dirty="0">
-                <a:solidFill>
-                  <a:srgbClr val="67758A"/>
-                </a:solidFill>
-              </a:rPr>
-              <a:t>检测/跟踪/识别</a:t>
-            </a:r>
-            <a:endParaRPr lang="en-US" sz="770" dirty="0"/>
-          </a:p>
-        </p:txBody>
-      </p:sp>
-      <p:sp>
-        <p:nvSpPr>
-          <p:cNvPr id="16" name="Shape 14"/>
-          <p:cNvSpPr/>
-          <p:nvPr/>
-        </p:nvSpPr>
-        <p:spPr>
-          <a:xfrm>
-            <a:off x="4581144" y="2971800"/>
-            <a:ext cx="1417320" cy="914400"/>
-          </a:xfrm>
-          <a:prstGeom prst="roundRect">
-            <a:avLst>
-              <a:gd name="adj" fmla="val 7000"/>
-            </a:avLst>
-          </a:prstGeom>
-          <a:solidFill>
-            <a:srgbClr val="FFFFFF"/>
-          </a:solidFill>
-          <a:ln w="15240">
-            <a:solidFill>
-              <a:srgbClr val="FF4D4F"/>
-            </a:solidFill>
-            <a:prstDash val="solid"/>
-          </a:ln>
-        </p:spPr>
-      </p:sp>
-      <p:sp>
-        <p:nvSpPr>
-          <p:cNvPr id="17" name="Text 15"/>
-          <p:cNvSpPr/>
-          <p:nvPr/>
-        </p:nvSpPr>
-        <p:spPr>
-          <a:xfrm>
-            <a:off x="4690872" y="3118104"/>
-            <a:ext cx="1197864" cy="210312"/>
-          </a:xfrm>
-          <a:prstGeom prst="rect">
-            <a:avLst/>
-          </a:prstGeom>
-          <a:noFill/>
-        </p:spPr>
-        <p:txBody>
-          <a:bodyPr wrap="square" lIns="0" tIns="0" rIns="0" bIns="0" rtlCol="0" anchor="ctr"/>
-          <a:lstStyle/>
-          <a:p>
-            <a:pPr marL="0" indent="0" algn="ctr">
-              <a:buNone/>
-            </a:pPr>
-            <a:r>
-              <a:rPr lang="en-US" sz="1100" b="1" dirty="0">
-                <a:solidFill>
-                  <a:srgbClr val="FF4D4F"/>
-                </a:solidFill>
-              </a:rPr>
-              <a:t>风险判断</a:t>
-            </a:r>
-            <a:endParaRPr lang="en-US" sz="1100" dirty="0"/>
-          </a:p>
-        </p:txBody>
-      </p:sp>
-      <p:sp>
-        <p:nvSpPr>
-          <p:cNvPr id="18" name="Text 16"/>
-          <p:cNvSpPr/>
-          <p:nvPr/>
-        </p:nvSpPr>
-        <p:spPr>
-          <a:xfrm>
-            <a:off x="4690872" y="3456432"/>
-            <a:ext cx="1197864" cy="219456"/>
-          </a:xfrm>
-          <a:prstGeom prst="rect">
-            <a:avLst/>
-          </a:prstGeom>
-          <a:noFill/>
-        </p:spPr>
-        <p:txBody>
-          <a:bodyPr wrap="square" lIns="0" tIns="0" rIns="0" bIns="0" rtlCol="0" anchor="ctr"/>
-          <a:lstStyle/>
-          <a:p>
-            <a:pPr marL="0" indent="0" algn="ctr">
-              <a:buNone/>
-            </a:pPr>
-            <a:r>
-              <a:rPr lang="en-US" sz="770" dirty="0">
-                <a:solidFill>
-                  <a:srgbClr val="67758A"/>
-                </a:solidFill>
-              </a:rPr>
-              <a:t>TTC/冲突区/等级</a:t>
-            </a:r>
-            <a:endParaRPr lang="en-US" sz="770" dirty="0"/>
-          </a:p>
-        </p:txBody>
-      </p:sp>
-      <p:sp>
-        <p:nvSpPr>
-          <p:cNvPr id="19" name="Shape 17"/>
-          <p:cNvSpPr/>
-          <p:nvPr/>
-        </p:nvSpPr>
-        <p:spPr>
-          <a:xfrm>
-            <a:off x="6528816" y="2971800"/>
-            <a:ext cx="1417320" cy="914400"/>
-          </a:xfrm>
-          <a:prstGeom prst="roundRect">
-            <a:avLst>
-              <a:gd name="adj" fmla="val 7000"/>
-            </a:avLst>
-          </a:prstGeom>
-          <a:solidFill>
-            <a:srgbClr val="FFFFFF"/>
-          </a:solidFill>
-          <a:ln w="15240">
-            <a:solidFill>
-              <a:srgbClr val="116DFF"/>
-            </a:solidFill>
-            <a:prstDash val="solid"/>
-          </a:ln>
-        </p:spPr>
-      </p:sp>
-      <p:sp>
-        <p:nvSpPr>
-          <p:cNvPr id="20" name="Text 18"/>
-          <p:cNvSpPr/>
-          <p:nvPr/>
-        </p:nvSpPr>
-        <p:spPr>
-          <a:xfrm>
-            <a:off x="6638544" y="3118104"/>
-            <a:ext cx="1197864" cy="210312"/>
-          </a:xfrm>
-          <a:prstGeom prst="rect">
-            <a:avLst/>
-          </a:prstGeom>
-          <a:noFill/>
-        </p:spPr>
-        <p:txBody>
-          <a:bodyPr wrap="square" lIns="0" tIns="0" rIns="0" bIns="0" rtlCol="0" anchor="ctr"/>
-          <a:lstStyle/>
-          <a:p>
-            <a:pPr marL="0" indent="0" algn="ctr">
-              <a:buNone/>
-            </a:pPr>
-            <a:r>
-              <a:rPr lang="en-US" sz="1100" b="1" dirty="0">
-                <a:solidFill>
-                  <a:srgbClr val="0B1F3A"/>
-                </a:solidFill>
-              </a:rPr>
-              <a:t>RSU / V2X</a:t>
-            </a:r>
-            <a:endParaRPr lang="en-US" sz="1100" dirty="0"/>
-          </a:p>
-        </p:txBody>
-      </p:sp>
-      <p:sp>
-        <p:nvSpPr>
-          <p:cNvPr id="21" name="Text 19"/>
-          <p:cNvSpPr/>
-          <p:nvPr/>
-        </p:nvSpPr>
-        <p:spPr>
-          <a:xfrm>
-            <a:off x="6638544" y="3456432"/>
-            <a:ext cx="1197864" cy="219456"/>
-          </a:xfrm>
-          <a:prstGeom prst="rect">
-            <a:avLst/>
-          </a:prstGeom>
-          <a:noFill/>
-        </p:spPr>
-        <p:txBody>
-          <a:bodyPr wrap="square" lIns="0" tIns="0" rIns="0" bIns="0" rtlCol="0" anchor="ctr"/>
-          <a:lstStyle/>
-          <a:p>
-            <a:pPr marL="0" indent="0" algn="ctr">
-              <a:buNone/>
-            </a:pPr>
-            <a:r>
-              <a:rPr lang="en-US" sz="770" dirty="0">
-                <a:solidFill>
-                  <a:srgbClr val="67758A"/>
-                </a:solidFill>
-              </a:rPr>
-              <a:t>广播风险消息</a:t>
-            </a:r>
-            <a:endParaRPr lang="en-US" sz="770" dirty="0"/>
-          </a:p>
-        </p:txBody>
-      </p:sp>
-      <p:sp>
-        <p:nvSpPr>
-          <p:cNvPr id="22" name="Shape 20"/>
-          <p:cNvSpPr/>
-          <p:nvPr/>
-        </p:nvSpPr>
-        <p:spPr>
-          <a:xfrm>
-            <a:off x="8476488" y="2971800"/>
-            <a:ext cx="1417320" cy="914400"/>
-          </a:xfrm>
-          <a:prstGeom prst="roundRect">
-            <a:avLst>
-              <a:gd name="adj" fmla="val 7000"/>
-            </a:avLst>
-          </a:prstGeom>
-          <a:solidFill>
-            <a:srgbClr val="FFFFFF"/>
-          </a:solidFill>
-          <a:ln w="15240">
-            <a:solidFill>
-              <a:srgbClr val="116DFF"/>
-            </a:solidFill>
-            <a:prstDash val="solid"/>
-          </a:ln>
-        </p:spPr>
-      </p:sp>
-      <p:sp>
-        <p:nvSpPr>
-          <p:cNvPr id="23" name="Text 21"/>
-          <p:cNvSpPr/>
-          <p:nvPr/>
-        </p:nvSpPr>
-        <p:spPr>
-          <a:xfrm>
-            <a:off x="8586216" y="3118104"/>
-            <a:ext cx="1197864" cy="210312"/>
-          </a:xfrm>
-          <a:prstGeom prst="rect">
-            <a:avLst/>
-          </a:prstGeom>
-          <a:noFill/>
-        </p:spPr>
-        <p:txBody>
-          <a:bodyPr wrap="square" lIns="0" tIns="0" rIns="0" bIns="0" rtlCol="0" anchor="ctr"/>
-          <a:lstStyle/>
-          <a:p>
-            <a:pPr marL="0" indent="0" algn="ctr">
-              <a:buNone/>
-            </a:pPr>
-            <a:r>
-              <a:rPr lang="en-US" sz="1100" b="1" dirty="0">
-                <a:solidFill>
-                  <a:srgbClr val="0B1F3A"/>
-                </a:solidFill>
-              </a:rPr>
-              <a:t>小车响应</a:t>
-            </a:r>
-            <a:endParaRPr lang="en-US" sz="1100" dirty="0"/>
-          </a:p>
-        </p:txBody>
-      </p:sp>
-      <p:sp>
-        <p:nvSpPr>
-          <p:cNvPr id="24" name="Text 22"/>
-          <p:cNvSpPr/>
-          <p:nvPr/>
-        </p:nvSpPr>
-        <p:spPr>
-          <a:xfrm>
-            <a:off x="8586216" y="3456432"/>
-            <a:ext cx="1197864" cy="219456"/>
-          </a:xfrm>
-          <a:prstGeom prst="rect">
-            <a:avLst/>
-          </a:prstGeom>
-          <a:noFill/>
-        </p:spPr>
-        <p:txBody>
-          <a:bodyPr wrap="square" lIns="0" tIns="0" rIns="0" bIns="0" rtlCol="0" anchor="ctr"/>
-          <a:lstStyle/>
-          <a:p>
-            <a:pPr marL="0" indent="0" algn="ctr">
-              <a:buNone/>
-            </a:pPr>
-            <a:r>
-              <a:rPr lang="en-US" sz="770" dirty="0">
-                <a:solidFill>
-                  <a:srgbClr val="67758A"/>
-                </a:solidFill>
-              </a:rPr>
-              <a:t>预警/减速/停车</a:t>
-            </a:r>
-            <a:endParaRPr lang="en-US" sz="770" dirty="0"/>
-          </a:p>
-        </p:txBody>
-      </p:sp>
-      <p:sp>
-        <p:nvSpPr>
-          <p:cNvPr id="25" name="Shape 23"/>
-          <p:cNvSpPr/>
-          <p:nvPr/>
-        </p:nvSpPr>
-        <p:spPr>
-          <a:xfrm>
-            <a:off x="10424160" y="2971800"/>
-            <a:ext cx="1417320" cy="914400"/>
-          </a:xfrm>
-          <a:prstGeom prst="roundRect">
-            <a:avLst>
-              <a:gd name="adj" fmla="val 7000"/>
-            </a:avLst>
-          </a:prstGeom>
-          <a:solidFill>
-            <a:srgbClr val="FFFFFF"/>
-          </a:solidFill>
-          <a:ln w="15240">
-            <a:solidFill>
-              <a:srgbClr val="116DFF"/>
-            </a:solidFill>
-            <a:prstDash val="solid"/>
-          </a:ln>
-        </p:spPr>
-      </p:sp>
-      <p:sp>
-        <p:nvSpPr>
-          <p:cNvPr id="26" name="Text 24"/>
-          <p:cNvSpPr/>
-          <p:nvPr/>
-        </p:nvSpPr>
-        <p:spPr>
-          <a:xfrm>
-            <a:off x="10533888" y="3118104"/>
-            <a:ext cx="1197864" cy="210312"/>
-          </a:xfrm>
-          <a:prstGeom prst="rect">
-            <a:avLst/>
-          </a:prstGeom>
-          <a:noFill/>
-        </p:spPr>
-        <p:txBody>
-          <a:bodyPr wrap="square" lIns="0" tIns="0" rIns="0" bIns="0" rtlCol="0" anchor="ctr"/>
-          <a:lstStyle/>
-          <a:p>
-            <a:pPr marL="0" indent="0" algn="ctr">
-              <a:buNone/>
-            </a:pPr>
-            <a:r>
-              <a:rPr lang="en-US" sz="1100" b="1" dirty="0">
-                <a:solidFill>
-                  <a:srgbClr val="0B1F3A"/>
-                </a:solidFill>
-              </a:rPr>
-              <a:t>大屏展示</a:t>
-            </a:r>
-            <a:endParaRPr lang="en-US" sz="1100" dirty="0"/>
-          </a:p>
-        </p:txBody>
-      </p:sp>
-      <p:sp>
-        <p:nvSpPr>
-          <p:cNvPr id="27" name="Text 25"/>
-          <p:cNvSpPr/>
-          <p:nvPr/>
-        </p:nvSpPr>
-        <p:spPr>
-          <a:xfrm>
-            <a:off x="10533888" y="3456432"/>
-            <a:ext cx="1197864" cy="219456"/>
-          </a:xfrm>
-          <a:prstGeom prst="rect">
-            <a:avLst/>
-          </a:prstGeom>
-          <a:noFill/>
-        </p:spPr>
-        <p:txBody>
-          <a:bodyPr wrap="square" lIns="0" tIns="0" rIns="0" bIns="0" rtlCol="0" anchor="ctr"/>
-          <a:lstStyle/>
-          <a:p>
-            <a:pPr marL="0" indent="0" algn="ctr">
-              <a:buNone/>
-            </a:pPr>
-            <a:r>
-              <a:rPr lang="en-US" sz="770" dirty="0">
-                <a:solidFill>
-                  <a:srgbClr val="67758A"/>
-                </a:solidFill>
-              </a:rPr>
-              <a:t>虚拟目标+过程解释</a:t>
-            </a:r>
-            <a:endParaRPr lang="en-US" sz="770" dirty="0"/>
-          </a:p>
-        </p:txBody>
-      </p:sp>
       <p:pic>
         <p:nvPicPr>
-          <p:cNvPr id="28" name="Image 0" descr="/mnt/data/scene_banner.jpg"/>
+          <p:cNvPr id="5" name="Image 0" descr="/mnt/data/scene_wide_crop.jpg"/>
           <p:cNvPicPr>
             <a:picLocks noChangeAspect="1"/>
           </p:cNvPicPr>
@@ -6628,8 +6280,8 @@
         </p:blipFill>
         <p:spPr>
           <a:xfrm>
-            <a:off x="594360" y="1325880"/>
-            <a:ext cx="4526280" cy="1353312"/>
+            <a:off x="594360" y="1298448"/>
+            <a:ext cx="4800600" cy="4114800"/>
           </a:xfrm>
           <a:prstGeom prst="rect">
             <a:avLst/>
@@ -6638,14 +6290,14 @@
       </p:pic>
       <p:sp>
         <p:nvSpPr>
-          <p:cNvPr id="29" name="Text 26"/>
-          <p:cNvSpPr/>
-          <p:nvPr/>
-        </p:nvSpPr>
-        <p:spPr>
-          <a:xfrm>
-            <a:off x="5532120" y="1353312"/>
-            <a:ext cx="1298448" cy="237744"/>
+          <p:cNvPr id="6" name="Text 3"/>
+          <p:cNvSpPr/>
+          <p:nvPr/>
+        </p:nvSpPr>
+        <p:spPr>
+          <a:xfrm>
+            <a:off x="713232" y="5577840"/>
+            <a:ext cx="4572000" cy="256032"/>
           </a:xfrm>
           <a:prstGeom prst="rect">
             <a:avLst/>
@@ -6660,72 +6312,39 @@
               <a:buNone/>
             </a:pPr>
             <a:r>
-              <a:rPr lang="en-US" sz="1150" b="1" dirty="0">
-                <a:solidFill>
-                  <a:srgbClr val="116DFF"/>
-                </a:solidFill>
-              </a:rPr>
-              <a:t>一句话逻辑</a:t>
-            </a:r>
-            <a:endParaRPr lang="en-US" sz="1150" dirty="0"/>
-          </a:p>
-        </p:txBody>
-      </p:sp>
-      <p:sp>
-        <p:nvSpPr>
-          <p:cNvPr id="30" name="Text 27"/>
-          <p:cNvSpPr/>
-          <p:nvPr/>
-        </p:nvSpPr>
-        <p:spPr>
-          <a:xfrm>
-            <a:off x="5532120" y="1700784"/>
-            <a:ext cx="5440680" cy="621792"/>
-          </a:xfrm>
-          <a:prstGeom prst="rect">
-            <a:avLst/>
-          </a:prstGeom>
-          <a:noFill/>
-        </p:spPr>
-        <p:txBody>
-          <a:bodyPr wrap="square" lIns="254" tIns="254" rIns="254" bIns="254" rtlCol="0" anchor="ctr">
-            <a:normAutofit/>
-          </a:bodyPr>
-          <a:lstStyle/>
-          <a:p>
-            <a:pPr marL="0" indent="0">
-              <a:buNone/>
-            </a:pPr>
-            <a:r>
-              <a:rPr lang="en-US" sz="1600" b="1" dirty="0">
-                <a:solidFill>
-                  <a:srgbClr val="0B1F3A"/>
-                </a:solidFill>
-              </a:rPr>
-              <a:t>不是让车辆“自己硬看出来”，而是让道路基础设施成为车辆的外部眼睛。</a:t>
-            </a:r>
-            <a:endParaRPr lang="en-US" sz="1600" dirty="0"/>
-          </a:p>
-        </p:txBody>
-      </p:sp>
-      <p:sp>
-        <p:nvSpPr>
-          <p:cNvPr id="31" name="Shape 28"/>
-          <p:cNvSpPr/>
-          <p:nvPr/>
-        </p:nvSpPr>
-        <p:spPr>
-          <a:xfrm>
-            <a:off x="5532120" y="2587752"/>
-            <a:ext cx="5349240" cy="0"/>
-          </a:xfrm>
-          <a:prstGeom prst="line">
-            <a:avLst/>
-          </a:prstGeom>
-          <a:noFill/>
+              <a:rPr lang="en-US" sz="940" dirty="0">
+                <a:solidFill>
+                  <a:srgbClr val="67758A"/>
+                </a:solidFill>
+              </a:rPr>
+              <a:t>建议在沙盘中选择建筑转角或学校/医院门口作为冲突区域</a:t>
+            </a:r>
+            <a:endParaRPr lang="en-US" sz="940" dirty="0"/>
+          </a:p>
+        </p:txBody>
+      </p:sp>
+      <p:sp>
+        <p:nvSpPr>
+          <p:cNvPr id="7" name="Shape 4"/>
+          <p:cNvSpPr/>
+          <p:nvPr/>
+        </p:nvSpPr>
+        <p:spPr>
+          <a:xfrm>
+            <a:off x="5715000" y="1426464"/>
+            <a:ext cx="347472" cy="347472"/>
+          </a:xfrm>
+          <a:prstGeom prst="ellipse">
+            <a:avLst/>
+          </a:prstGeom>
+          <a:solidFill>
+            <a:srgbClr val="116DFF"/>
+          </a:solidFill>
           <a:ln w="12700">
             <a:solidFill>
-              <a:srgbClr val="D7E3F4"/>
+              <a:srgbClr val="FFFFFF">
+                <a:alpha val="0"/>
+              </a:srgbClr>
             </a:solidFill>
             <a:prstDash val="solid"/>
           </a:ln>
@@ -6733,14 +6352,14 @@
       </p:sp>
       <p:sp>
         <p:nvSpPr>
-          <p:cNvPr id="32" name="Text 29"/>
-          <p:cNvSpPr/>
-          <p:nvPr/>
-        </p:nvSpPr>
-        <p:spPr>
-          <a:xfrm>
-            <a:off x="685800" y="4617720"/>
-            <a:ext cx="1097280" cy="219456"/>
+          <p:cNvPr id="8" name="Text 5"/>
+          <p:cNvSpPr/>
+          <p:nvPr/>
+        </p:nvSpPr>
+        <p:spPr>
+          <a:xfrm>
+            <a:off x="5715000" y="1495044"/>
+            <a:ext cx="347472" cy="146304"/>
           </a:xfrm>
           <a:prstGeom prst="rect">
             <a:avLst/>
@@ -6751,39 +6370,115 @@
           <a:bodyPr wrap="square" lIns="0" tIns="0" rIns="0" bIns="0" rtlCol="0" anchor="ctr"/>
           <a:lstStyle/>
           <a:p>
+            <a:pPr marL="0" indent="0" algn="ctr">
+              <a:buNone/>
+            </a:pPr>
+            <a:r>
+              <a:rPr lang="en-US" sz="920" b="1" dirty="0">
+                <a:solidFill>
+                  <a:srgbClr val="FFFFFF"/>
+                </a:solidFill>
+              </a:rPr>
+              <a:t>1</a:t>
+            </a:r>
+            <a:endParaRPr lang="en-US" sz="920" dirty="0"/>
+          </a:p>
+        </p:txBody>
+      </p:sp>
+      <p:sp>
+        <p:nvSpPr>
+          <p:cNvPr id="9" name="Text 6"/>
+          <p:cNvSpPr/>
+          <p:nvPr/>
+        </p:nvSpPr>
+        <p:spPr>
+          <a:xfrm>
+            <a:off x="6217920" y="1399032"/>
+            <a:ext cx="2057400" cy="219456"/>
+          </a:xfrm>
+          <a:prstGeom prst="rect">
+            <a:avLst/>
+          </a:prstGeom>
+          <a:noFill/>
+        </p:spPr>
+        <p:txBody>
+          <a:bodyPr wrap="square" lIns="0" tIns="0" rIns="0" bIns="0" rtlCol="0" anchor="ctr"/>
+          <a:lstStyle/>
+          <a:p>
             <a:pPr marL="0" indent="0">
               <a:buNone/>
             </a:pPr>
             <a:r>
-              <a:rPr lang="en-US" sz="1050" b="1" dirty="0">
+              <a:rPr lang="en-US" sz="1200" b="1" dirty="0">
                 <a:solidFill>
                   <a:srgbClr val="0B1F3A"/>
                 </a:solidFill>
               </a:rPr>
-              <a:t>关键能力</a:t>
-            </a:r>
-            <a:endParaRPr lang="en-US" sz="1050" dirty="0"/>
-          </a:p>
-        </p:txBody>
-      </p:sp>
-      <p:sp>
-        <p:nvSpPr>
-          <p:cNvPr id="33" name="Shape 30"/>
-          <p:cNvSpPr/>
-          <p:nvPr/>
-        </p:nvSpPr>
-        <p:spPr>
-          <a:xfrm>
-            <a:off x="777240" y="5102352"/>
-            <a:ext cx="256032" cy="256032"/>
-          </a:xfrm>
-          <a:prstGeom prst="arc">
-            <a:avLst/>
-          </a:prstGeom>
-          <a:noFill/>
-          <a:ln w="25400">
+              <a:t>小车正常行驶</a:t>
+            </a:r>
+            <a:endParaRPr lang="en-US" sz="1200" dirty="0"/>
+          </a:p>
+        </p:txBody>
+      </p:sp>
+      <p:sp>
+        <p:nvSpPr>
+          <p:cNvPr id="10" name="Text 7"/>
+          <p:cNvSpPr/>
+          <p:nvPr/>
+        </p:nvSpPr>
+        <p:spPr>
+          <a:xfrm>
+            <a:off x="6217920" y="1728216"/>
+            <a:ext cx="2148840" cy="347472"/>
+          </a:xfrm>
+          <a:prstGeom prst="rect">
+            <a:avLst/>
+          </a:prstGeom>
+          <a:noFill/>
+        </p:spPr>
+        <p:txBody>
+          <a:bodyPr wrap="square" lIns="0" tIns="0" rIns="0" bIns="0" rtlCol="0" anchor="ctr">
+            <a:normAutofit/>
+          </a:bodyPr>
+          <a:lstStyle/>
+          <a:p>
+            <a:pPr marL="0" indent="0">
+              <a:buNone/>
+            </a:pPr>
+            <a:r>
+              <a:rPr lang="en-US" sz="890" dirty="0">
+                <a:solidFill>
+                  <a:srgbClr val="67758A"/>
+                </a:solidFill>
+              </a:rPr>
+              <a:t>沿既定路线接近建筑转角</a:t>
+            </a:r>
+            <a:endParaRPr lang="en-US" sz="890" dirty="0"/>
+          </a:p>
+        </p:txBody>
+      </p:sp>
+      <p:sp>
+        <p:nvSpPr>
+          <p:cNvPr id="11" name="Shape 8"/>
+          <p:cNvSpPr/>
+          <p:nvPr/>
+        </p:nvSpPr>
+        <p:spPr>
+          <a:xfrm>
+            <a:off x="8549640" y="1426464"/>
+            <a:ext cx="347472" cy="347472"/>
+          </a:xfrm>
+          <a:prstGeom prst="ellipse">
+            <a:avLst/>
+          </a:prstGeom>
+          <a:solidFill>
+            <a:srgbClr val="116DFF"/>
+          </a:solidFill>
+          <a:ln w="12700">
             <a:solidFill>
-              <a:srgbClr val="116DFF"/>
+              <a:srgbClr val="FFFFFF">
+                <a:alpha val="0"/>
+              </a:srgbClr>
             </a:solidFill>
             <a:prstDash val="solid"/>
           </a:ln>
@@ -6791,14 +6486,14 @@
       </p:sp>
       <p:sp>
         <p:nvSpPr>
-          <p:cNvPr id="34" name="Text 31"/>
-          <p:cNvSpPr/>
-          <p:nvPr/>
-        </p:nvSpPr>
-        <p:spPr>
-          <a:xfrm>
-            <a:off x="1143000" y="5010912"/>
-            <a:ext cx="1417320" cy="201168"/>
+          <p:cNvPr id="12" name="Text 9"/>
+          <p:cNvSpPr/>
+          <p:nvPr/>
+        </p:nvSpPr>
+        <p:spPr>
+          <a:xfrm>
+            <a:off x="8549640" y="1495044"/>
+            <a:ext cx="347472" cy="146304"/>
           </a:xfrm>
           <a:prstGeom prst="rect">
             <a:avLst/>
@@ -6809,74 +6504,115 @@
           <a:bodyPr wrap="square" lIns="0" tIns="0" rIns="0" bIns="0" rtlCol="0" anchor="ctr"/>
           <a:lstStyle/>
           <a:p>
+            <a:pPr marL="0" indent="0" algn="ctr">
+              <a:buNone/>
+            </a:pPr>
+            <a:r>
+              <a:rPr lang="en-US" sz="920" b="1" dirty="0">
+                <a:solidFill>
+                  <a:srgbClr val="FFFFFF"/>
+                </a:solidFill>
+              </a:rPr>
+              <a:t>2</a:t>
+            </a:r>
+            <a:endParaRPr lang="en-US" sz="920" dirty="0"/>
+          </a:p>
+        </p:txBody>
+      </p:sp>
+      <p:sp>
+        <p:nvSpPr>
+          <p:cNvPr id="13" name="Text 10"/>
+          <p:cNvSpPr/>
+          <p:nvPr/>
+        </p:nvSpPr>
+        <p:spPr>
+          <a:xfrm>
+            <a:off x="9052560" y="1399032"/>
+            <a:ext cx="2057400" cy="219456"/>
+          </a:xfrm>
+          <a:prstGeom prst="rect">
+            <a:avLst/>
+          </a:prstGeom>
+          <a:noFill/>
+        </p:spPr>
+        <p:txBody>
+          <a:bodyPr wrap="square" lIns="0" tIns="0" rIns="0" bIns="0" rtlCol="0" anchor="ctr"/>
+          <a:lstStyle/>
+          <a:p>
             <a:pPr marL="0" indent="0">
               <a:buNone/>
             </a:pPr>
             <a:r>
-              <a:rPr lang="en-US" sz="1100" b="1" dirty="0">
+              <a:rPr lang="en-US" sz="1200" b="1" dirty="0">
                 <a:solidFill>
                   <a:srgbClr val="0B1F3A"/>
                 </a:solidFill>
               </a:rPr>
-              <a:t>看得见盲区</a:t>
-            </a:r>
-            <a:endParaRPr lang="en-US" sz="1100" dirty="0"/>
-          </a:p>
-        </p:txBody>
-      </p:sp>
-      <p:sp>
-        <p:nvSpPr>
-          <p:cNvPr id="35" name="Text 32"/>
-          <p:cNvSpPr/>
-          <p:nvPr/>
-        </p:nvSpPr>
-        <p:spPr>
-          <a:xfrm>
-            <a:off x="1143000" y="5321808"/>
-            <a:ext cx="1874520" cy="320040"/>
-          </a:xfrm>
-          <a:prstGeom prst="rect">
-            <a:avLst/>
-          </a:prstGeom>
-          <a:noFill/>
-        </p:spPr>
-        <p:txBody>
-          <a:bodyPr wrap="square" lIns="0" tIns="0" rIns="0" bIns="0" rtlCol="0" anchor="ctr"/>
+              <a:t>行人从盲区出现</a:t>
+            </a:r>
+            <a:endParaRPr lang="en-US" sz="1200" dirty="0"/>
+          </a:p>
+        </p:txBody>
+      </p:sp>
+      <p:sp>
+        <p:nvSpPr>
+          <p:cNvPr id="14" name="Text 11"/>
+          <p:cNvSpPr/>
+          <p:nvPr/>
+        </p:nvSpPr>
+        <p:spPr>
+          <a:xfrm>
+            <a:off x="9052560" y="1728216"/>
+            <a:ext cx="2148840" cy="347472"/>
+          </a:xfrm>
+          <a:prstGeom prst="rect">
+            <a:avLst/>
+          </a:prstGeom>
+          <a:noFill/>
+        </p:spPr>
+        <p:txBody>
+          <a:bodyPr wrap="square" lIns="0" tIns="0" rIns="0" bIns="0" rtlCol="0" anchor="ctr">
+            <a:normAutofit/>
+          </a:bodyPr>
           <a:lstStyle/>
           <a:p>
             <a:pPr marL="0" indent="0">
               <a:buNone/>
             </a:pPr>
             <a:r>
-              <a:rPr lang="en-US" sz="840" dirty="0">
+              <a:rPr lang="en-US" sz="890" dirty="0">
                 <a:solidFill>
                   <a:srgbClr val="67758A"/>
                 </a:solidFill>
               </a:rPr>
-              <a:t>路侧摄像头覆盖转角和横穿区</a:t>
-            </a:r>
-            <a:endParaRPr lang="en-US" sz="840" dirty="0"/>
-          </a:p>
-        </p:txBody>
-      </p:sp>
-      <p:sp>
-        <p:nvSpPr>
-          <p:cNvPr id="36" name="Shape 33"/>
-          <p:cNvSpPr/>
-          <p:nvPr/>
-        </p:nvSpPr>
-        <p:spPr>
-          <a:xfrm>
-            <a:off x="3566160" y="5102352"/>
-            <a:ext cx="256032" cy="256032"/>
-          </a:xfrm>
-          <a:prstGeom prst="arc">
-            <a:avLst/>
-          </a:prstGeom>
-          <a:noFill/>
-          <a:ln w="25400">
+              <a:t>小车本车视角暂时不可见</a:t>
+            </a:r>
+            <a:endParaRPr lang="en-US" sz="890" dirty="0"/>
+          </a:p>
+        </p:txBody>
+      </p:sp>
+      <p:sp>
+        <p:nvSpPr>
+          <p:cNvPr id="15" name="Shape 12"/>
+          <p:cNvSpPr/>
+          <p:nvPr/>
+        </p:nvSpPr>
+        <p:spPr>
+          <a:xfrm>
+            <a:off x="5715000" y="2779776"/>
+            <a:ext cx="347472" cy="347472"/>
+          </a:xfrm>
+          <a:prstGeom prst="ellipse">
+            <a:avLst/>
+          </a:prstGeom>
+          <a:solidFill>
+            <a:srgbClr val="116DFF"/>
+          </a:solidFill>
+          <a:ln w="12700">
             <a:solidFill>
-              <a:srgbClr val="116DFF"/>
+              <a:srgbClr val="FFFFFF">
+                <a:alpha val="0"/>
+              </a:srgbClr>
             </a:solidFill>
             <a:prstDash val="solid"/>
           </a:ln>
@@ -6884,14 +6620,14 @@
       </p:sp>
       <p:sp>
         <p:nvSpPr>
-          <p:cNvPr id="37" name="Text 34"/>
-          <p:cNvSpPr/>
-          <p:nvPr/>
-        </p:nvSpPr>
-        <p:spPr>
-          <a:xfrm>
-            <a:off x="3931920" y="5010912"/>
-            <a:ext cx="1417320" cy="201168"/>
+          <p:cNvPr id="16" name="Text 13"/>
+          <p:cNvSpPr/>
+          <p:nvPr/>
+        </p:nvSpPr>
+        <p:spPr>
+          <a:xfrm>
+            <a:off x="5715000" y="2848356"/>
+            <a:ext cx="347472" cy="146304"/>
           </a:xfrm>
           <a:prstGeom prst="rect">
             <a:avLst/>
@@ -6902,74 +6638,115 @@
           <a:bodyPr wrap="square" lIns="0" tIns="0" rIns="0" bIns="0" rtlCol="0" anchor="ctr"/>
           <a:lstStyle/>
           <a:p>
+            <a:pPr marL="0" indent="0" algn="ctr">
+              <a:buNone/>
+            </a:pPr>
+            <a:r>
+              <a:rPr lang="en-US" sz="920" b="1" dirty="0">
+                <a:solidFill>
+                  <a:srgbClr val="FFFFFF"/>
+                </a:solidFill>
+              </a:rPr>
+              <a:t>3</a:t>
+            </a:r>
+            <a:endParaRPr lang="en-US" sz="920" dirty="0"/>
+          </a:p>
+        </p:txBody>
+      </p:sp>
+      <p:sp>
+        <p:nvSpPr>
+          <p:cNvPr id="17" name="Text 14"/>
+          <p:cNvSpPr/>
+          <p:nvPr/>
+        </p:nvSpPr>
+        <p:spPr>
+          <a:xfrm>
+            <a:off x="6217920" y="2752344"/>
+            <a:ext cx="2057400" cy="219456"/>
+          </a:xfrm>
+          <a:prstGeom prst="rect">
+            <a:avLst/>
+          </a:prstGeom>
+          <a:noFill/>
+        </p:spPr>
+        <p:txBody>
+          <a:bodyPr wrap="square" lIns="0" tIns="0" rIns="0" bIns="0" rtlCol="0" anchor="ctr"/>
+          <a:lstStyle/>
+          <a:p>
             <a:pPr marL="0" indent="0">
               <a:buNone/>
             </a:pPr>
             <a:r>
-              <a:rPr lang="en-US" sz="1100" b="1" dirty="0">
+              <a:rPr lang="en-US" sz="1200" b="1" dirty="0">
                 <a:solidFill>
                   <a:srgbClr val="0B1F3A"/>
                 </a:solidFill>
               </a:rPr>
-              <a:t>算得出风险</a:t>
-            </a:r>
-            <a:endParaRPr lang="en-US" sz="1100" dirty="0"/>
-          </a:p>
-        </p:txBody>
-      </p:sp>
-      <p:sp>
-        <p:nvSpPr>
-          <p:cNvPr id="38" name="Text 35"/>
-          <p:cNvSpPr/>
-          <p:nvPr/>
-        </p:nvSpPr>
-        <p:spPr>
-          <a:xfrm>
-            <a:off x="3931920" y="5321808"/>
-            <a:ext cx="1874520" cy="320040"/>
-          </a:xfrm>
-          <a:prstGeom prst="rect">
-            <a:avLst/>
-          </a:prstGeom>
-          <a:noFill/>
-        </p:spPr>
-        <p:txBody>
-          <a:bodyPr wrap="square" lIns="0" tIns="0" rIns="0" bIns="0" rtlCol="0" anchor="ctr"/>
+              <a:t>路侧摄像头先发现</a:t>
+            </a:r>
+            <a:endParaRPr lang="en-US" sz="1200" dirty="0"/>
+          </a:p>
+        </p:txBody>
+      </p:sp>
+      <p:sp>
+        <p:nvSpPr>
+          <p:cNvPr id="18" name="Text 15"/>
+          <p:cNvSpPr/>
+          <p:nvPr/>
+        </p:nvSpPr>
+        <p:spPr>
+          <a:xfrm>
+            <a:off x="6217920" y="3081528"/>
+            <a:ext cx="2148840" cy="347472"/>
+          </a:xfrm>
+          <a:prstGeom prst="rect">
+            <a:avLst/>
+          </a:prstGeom>
+          <a:noFill/>
+        </p:spPr>
+        <p:txBody>
+          <a:bodyPr wrap="square" lIns="0" tIns="0" rIns="0" bIns="0" rtlCol="0" anchor="ctr">
+            <a:normAutofit/>
+          </a:bodyPr>
           <a:lstStyle/>
           <a:p>
             <a:pPr marL="0" indent="0">
               <a:buNone/>
             </a:pPr>
             <a:r>
-              <a:rPr lang="en-US" sz="840" dirty="0">
+              <a:rPr lang="en-US" sz="890" dirty="0">
                 <a:solidFill>
                   <a:srgbClr val="67758A"/>
                 </a:solidFill>
               </a:rPr>
-              <a:t>TTC、速度、距离、冲突区域</a:t>
-            </a:r>
-            <a:endParaRPr lang="en-US" sz="840" dirty="0"/>
-          </a:p>
-        </p:txBody>
-      </p:sp>
-      <p:sp>
-        <p:nvSpPr>
-          <p:cNvPr id="39" name="Shape 36"/>
-          <p:cNvSpPr/>
-          <p:nvPr/>
-        </p:nvSpPr>
-        <p:spPr>
-          <a:xfrm>
-            <a:off x="6355080" y="5102352"/>
-            <a:ext cx="256032" cy="256032"/>
-          </a:xfrm>
-          <a:prstGeom prst="arc">
-            <a:avLst/>
-          </a:prstGeom>
-          <a:noFill/>
-          <a:ln w="25400">
+              <a:t>边缘AI识别目标类型与轨迹</a:t>
+            </a:r>
+            <a:endParaRPr lang="en-US" sz="890" dirty="0"/>
+          </a:p>
+        </p:txBody>
+      </p:sp>
+      <p:sp>
+        <p:nvSpPr>
+          <p:cNvPr id="19" name="Shape 16"/>
+          <p:cNvSpPr/>
+          <p:nvPr/>
+        </p:nvSpPr>
+        <p:spPr>
+          <a:xfrm>
+            <a:off x="8549640" y="2779776"/>
+            <a:ext cx="347472" cy="347472"/>
+          </a:xfrm>
+          <a:prstGeom prst="ellipse">
+            <a:avLst/>
+          </a:prstGeom>
+          <a:solidFill>
+            <a:srgbClr val="FF4D4F"/>
+          </a:solidFill>
+          <a:ln w="12700">
             <a:solidFill>
-              <a:srgbClr val="116DFF"/>
+              <a:srgbClr val="FFFFFF">
+                <a:alpha val="0"/>
+              </a:srgbClr>
             </a:solidFill>
             <a:prstDash val="solid"/>
           </a:ln>
@@ -6977,14 +6754,14 @@
       </p:sp>
       <p:sp>
         <p:nvSpPr>
-          <p:cNvPr id="40" name="Text 37"/>
-          <p:cNvSpPr/>
-          <p:nvPr/>
-        </p:nvSpPr>
-        <p:spPr>
-          <a:xfrm>
-            <a:off x="6720840" y="5010912"/>
-            <a:ext cx="1417320" cy="201168"/>
+          <p:cNvPr id="20" name="Text 17"/>
+          <p:cNvSpPr/>
+          <p:nvPr/>
+        </p:nvSpPr>
+        <p:spPr>
+          <a:xfrm>
+            <a:off x="8549640" y="2848356"/>
+            <a:ext cx="347472" cy="146304"/>
           </a:xfrm>
           <a:prstGeom prst="rect">
             <a:avLst/>
@@ -6995,74 +6772,115 @@
           <a:bodyPr wrap="square" lIns="0" tIns="0" rIns="0" bIns="0" rtlCol="0" anchor="ctr"/>
           <a:lstStyle/>
           <a:p>
+            <a:pPr marL="0" indent="0" algn="ctr">
+              <a:buNone/>
+            </a:pPr>
+            <a:r>
+              <a:rPr lang="en-US" sz="920" b="1" dirty="0">
+                <a:solidFill>
+                  <a:srgbClr val="FFFFFF"/>
+                </a:solidFill>
+              </a:rPr>
+              <a:t>4</a:t>
+            </a:r>
+            <a:endParaRPr lang="en-US" sz="920" dirty="0"/>
+          </a:p>
+        </p:txBody>
+      </p:sp>
+      <p:sp>
+        <p:nvSpPr>
+          <p:cNvPr id="21" name="Text 18"/>
+          <p:cNvSpPr/>
+          <p:nvPr/>
+        </p:nvSpPr>
+        <p:spPr>
+          <a:xfrm>
+            <a:off x="9052560" y="2752344"/>
+            <a:ext cx="2057400" cy="219456"/>
+          </a:xfrm>
+          <a:prstGeom prst="rect">
+            <a:avLst/>
+          </a:prstGeom>
+          <a:noFill/>
+        </p:spPr>
+        <p:txBody>
+          <a:bodyPr wrap="square" lIns="0" tIns="0" rIns="0" bIns="0" rtlCol="0" anchor="ctr"/>
+          <a:lstStyle/>
+          <a:p>
             <a:pPr marL="0" indent="0">
               <a:buNone/>
             </a:pPr>
             <a:r>
-              <a:rPr lang="en-US" sz="1100" b="1" dirty="0">
+              <a:rPr lang="en-US" sz="1200" b="1" dirty="0">
                 <a:solidFill>
                   <a:srgbClr val="0B1F3A"/>
                 </a:solidFill>
               </a:rPr>
-              <a:t>发得到车辆</a:t>
-            </a:r>
-            <a:endParaRPr lang="en-US" sz="1100" dirty="0"/>
-          </a:p>
-        </p:txBody>
-      </p:sp>
-      <p:sp>
-        <p:nvSpPr>
-          <p:cNvPr id="41" name="Text 38"/>
-          <p:cNvSpPr/>
-          <p:nvPr/>
-        </p:nvSpPr>
-        <p:spPr>
-          <a:xfrm>
-            <a:off x="6720840" y="5321808"/>
-            <a:ext cx="1874520" cy="320040"/>
-          </a:xfrm>
-          <a:prstGeom prst="rect">
-            <a:avLst/>
-          </a:prstGeom>
-          <a:noFill/>
-        </p:spPr>
-        <p:txBody>
-          <a:bodyPr wrap="square" lIns="0" tIns="0" rIns="0" bIns="0" rtlCol="0" anchor="ctr"/>
+              <a:t>计算风险等级</a:t>
+            </a:r>
+            <a:endParaRPr lang="en-US" sz="1200" dirty="0"/>
+          </a:p>
+        </p:txBody>
+      </p:sp>
+      <p:sp>
+        <p:nvSpPr>
+          <p:cNvPr id="22" name="Text 19"/>
+          <p:cNvSpPr/>
+          <p:nvPr/>
+        </p:nvSpPr>
+        <p:spPr>
+          <a:xfrm>
+            <a:off x="9052560" y="3081528"/>
+            <a:ext cx="2148840" cy="347472"/>
+          </a:xfrm>
+          <a:prstGeom prst="rect">
+            <a:avLst/>
+          </a:prstGeom>
+          <a:noFill/>
+        </p:spPr>
+        <p:txBody>
+          <a:bodyPr wrap="square" lIns="0" tIns="0" rIns="0" bIns="0" rtlCol="0" anchor="ctr">
+            <a:normAutofit/>
+          </a:bodyPr>
           <a:lstStyle/>
           <a:p>
             <a:pPr marL="0" indent="0">
               <a:buNone/>
             </a:pPr>
             <a:r>
-              <a:rPr lang="en-US" sz="840" dirty="0">
+              <a:rPr lang="en-US" sz="890" dirty="0">
                 <a:solidFill>
                   <a:srgbClr val="67758A"/>
                 </a:solidFill>
               </a:rPr>
-              <a:t>RSU/V2X下发风险消息</a:t>
-            </a:r>
-            <a:endParaRPr lang="en-US" sz="840" dirty="0"/>
-          </a:p>
-        </p:txBody>
-      </p:sp>
-      <p:sp>
-        <p:nvSpPr>
-          <p:cNvPr id="42" name="Shape 39"/>
-          <p:cNvSpPr/>
-          <p:nvPr/>
-        </p:nvSpPr>
-        <p:spPr>
-          <a:xfrm>
-            <a:off x="9144000" y="5102352"/>
-            <a:ext cx="256032" cy="256032"/>
-          </a:xfrm>
-          <a:prstGeom prst="arc">
-            <a:avLst/>
-          </a:prstGeom>
-          <a:noFill/>
-          <a:ln w="25400">
+              <a:t>TTC=2.3s，风险等级：高</a:t>
+            </a:r>
+            <a:endParaRPr lang="en-US" sz="890" dirty="0"/>
+          </a:p>
+        </p:txBody>
+      </p:sp>
+      <p:sp>
+        <p:nvSpPr>
+          <p:cNvPr id="23" name="Shape 20"/>
+          <p:cNvSpPr/>
+          <p:nvPr/>
+        </p:nvSpPr>
+        <p:spPr>
+          <a:xfrm>
+            <a:off x="5715000" y="4133088"/>
+            <a:ext cx="347472" cy="347472"/>
+          </a:xfrm>
+          <a:prstGeom prst="ellipse">
+            <a:avLst/>
+          </a:prstGeom>
+          <a:solidFill>
+            <a:srgbClr val="116DFF"/>
+          </a:solidFill>
+          <a:ln w="12700">
             <a:solidFill>
-              <a:srgbClr val="116DFF"/>
+              <a:srgbClr val="FFFFFF">
+                <a:alpha val="0"/>
+              </a:srgbClr>
             </a:solidFill>
             <a:prstDash val="solid"/>
           </a:ln>
@@ -7070,14 +6888,14 @@
       </p:sp>
       <p:sp>
         <p:nvSpPr>
-          <p:cNvPr id="43" name="Text 40"/>
-          <p:cNvSpPr/>
-          <p:nvPr/>
-        </p:nvSpPr>
-        <p:spPr>
-          <a:xfrm>
-            <a:off x="9509760" y="5010912"/>
-            <a:ext cx="1417320" cy="201168"/>
+          <p:cNvPr id="24" name="Text 21"/>
+          <p:cNvSpPr/>
+          <p:nvPr/>
+        </p:nvSpPr>
+        <p:spPr>
+          <a:xfrm>
+            <a:off x="5715000" y="4201668"/>
+            <a:ext cx="347472" cy="146304"/>
           </a:xfrm>
           <a:prstGeom prst="rect">
             <a:avLst/>
@@ -7088,31 +6906,130 @@
           <a:bodyPr wrap="square" lIns="0" tIns="0" rIns="0" bIns="0" rtlCol="0" anchor="ctr"/>
           <a:lstStyle/>
           <a:p>
+            <a:pPr marL="0" indent="0" algn="ctr">
+              <a:buNone/>
+            </a:pPr>
+            <a:r>
+              <a:rPr lang="en-US" sz="920" b="1" dirty="0">
+                <a:solidFill>
+                  <a:srgbClr val="FFFFFF"/>
+                </a:solidFill>
+              </a:rPr>
+              <a:t>5</a:t>
+            </a:r>
+            <a:endParaRPr lang="en-US" sz="920" dirty="0"/>
+          </a:p>
+        </p:txBody>
+      </p:sp>
+      <p:sp>
+        <p:nvSpPr>
+          <p:cNvPr id="25" name="Text 22"/>
+          <p:cNvSpPr/>
+          <p:nvPr/>
+        </p:nvSpPr>
+        <p:spPr>
+          <a:xfrm>
+            <a:off x="6217920" y="4105656"/>
+            <a:ext cx="2057400" cy="219456"/>
+          </a:xfrm>
+          <a:prstGeom prst="rect">
+            <a:avLst/>
+          </a:prstGeom>
+          <a:noFill/>
+        </p:spPr>
+        <p:txBody>
+          <a:bodyPr wrap="square" lIns="0" tIns="0" rIns="0" bIns="0" rtlCol="0" anchor="ctr"/>
+          <a:lstStyle/>
+          <a:p>
             <a:pPr marL="0" indent="0">
               <a:buNone/>
             </a:pPr>
             <a:r>
-              <a:rPr lang="en-US" sz="1100" b="1" dirty="0">
+              <a:rPr lang="en-US" sz="1200" b="1" dirty="0">
                 <a:solidFill>
                   <a:srgbClr val="0B1F3A"/>
                 </a:solidFill>
               </a:rPr>
-              <a:t>解释得清楚</a:t>
-            </a:r>
-            <a:endParaRPr lang="en-US" sz="1100" dirty="0"/>
-          </a:p>
-        </p:txBody>
-      </p:sp>
-      <p:sp>
-        <p:nvSpPr>
-          <p:cNvPr id="44" name="Text 41"/>
-          <p:cNvSpPr/>
-          <p:nvPr/>
-        </p:nvSpPr>
-        <p:spPr>
-          <a:xfrm>
-            <a:off x="9509760" y="5321808"/>
-            <a:ext cx="1874520" cy="320040"/>
+              <a:t>RSU/V2X发出预警</a:t>
+            </a:r>
+            <a:endParaRPr lang="en-US" sz="1200" dirty="0"/>
+          </a:p>
+        </p:txBody>
+      </p:sp>
+      <p:sp>
+        <p:nvSpPr>
+          <p:cNvPr id="26" name="Text 23"/>
+          <p:cNvSpPr/>
+          <p:nvPr/>
+        </p:nvSpPr>
+        <p:spPr>
+          <a:xfrm>
+            <a:off x="6217920" y="4434840"/>
+            <a:ext cx="2148840" cy="347472"/>
+          </a:xfrm>
+          <a:prstGeom prst="rect">
+            <a:avLst/>
+          </a:prstGeom>
+          <a:noFill/>
+        </p:spPr>
+        <p:txBody>
+          <a:bodyPr wrap="square" lIns="0" tIns="0" rIns="0" bIns="0" rtlCol="0" anchor="ctr">
+            <a:normAutofit/>
+          </a:bodyPr>
+          <a:lstStyle/>
+          <a:p>
+            <a:pPr marL="0" indent="0">
+              <a:buNone/>
+            </a:pPr>
+            <a:r>
+              <a:rPr lang="en-US" sz="890" dirty="0">
+                <a:solidFill>
+                  <a:srgbClr val="67758A"/>
+                </a:solidFill>
+              </a:rPr>
+              <a:t>向小车下发“右前方盲区风险”</a:t>
+            </a:r>
+            <a:endParaRPr lang="en-US" sz="890" dirty="0"/>
+          </a:p>
+        </p:txBody>
+      </p:sp>
+      <p:sp>
+        <p:nvSpPr>
+          <p:cNvPr id="27" name="Shape 24"/>
+          <p:cNvSpPr/>
+          <p:nvPr/>
+        </p:nvSpPr>
+        <p:spPr>
+          <a:xfrm>
+            <a:off x="8549640" y="4133088"/>
+            <a:ext cx="347472" cy="347472"/>
+          </a:xfrm>
+          <a:prstGeom prst="ellipse">
+            <a:avLst/>
+          </a:prstGeom>
+          <a:solidFill>
+            <a:srgbClr val="116DFF"/>
+          </a:solidFill>
+          <a:ln w="12700">
+            <a:solidFill>
+              <a:srgbClr val="FFFFFF">
+                <a:alpha val="0"/>
+              </a:srgbClr>
+            </a:solidFill>
+            <a:prstDash val="solid"/>
+          </a:ln>
+        </p:spPr>
+      </p:sp>
+      <p:sp>
+        <p:nvSpPr>
+          <p:cNvPr id="28" name="Text 25"/>
+          <p:cNvSpPr/>
+          <p:nvPr/>
+        </p:nvSpPr>
+        <p:spPr>
+          <a:xfrm>
+            <a:off x="8549640" y="4201668"/>
+            <a:ext cx="347472" cy="146304"/>
           </a:xfrm>
           <a:prstGeom prst="rect">
             <a:avLst/>
@@ -7123,59 +7040,96 @@
           <a:bodyPr wrap="square" lIns="0" tIns="0" rIns="0" bIns="0" rtlCol="0" anchor="ctr"/>
           <a:lstStyle/>
           <a:p>
+            <a:pPr marL="0" indent="0" algn="ctr">
+              <a:buNone/>
+            </a:pPr>
+            <a:r>
+              <a:rPr lang="en-US" sz="920" b="1" dirty="0">
+                <a:solidFill>
+                  <a:srgbClr val="FFFFFF"/>
+                </a:solidFill>
+              </a:rPr>
+              <a:t>6</a:t>
+            </a:r>
+            <a:endParaRPr lang="en-US" sz="920" dirty="0"/>
+          </a:p>
+        </p:txBody>
+      </p:sp>
+      <p:sp>
+        <p:nvSpPr>
+          <p:cNvPr id="29" name="Text 26"/>
+          <p:cNvSpPr/>
+          <p:nvPr/>
+        </p:nvSpPr>
+        <p:spPr>
+          <a:xfrm>
+            <a:off x="9052560" y="4105656"/>
+            <a:ext cx="2057400" cy="219456"/>
+          </a:xfrm>
+          <a:prstGeom prst="rect">
+            <a:avLst/>
+          </a:prstGeom>
+          <a:noFill/>
+        </p:spPr>
+        <p:txBody>
+          <a:bodyPr wrap="square" lIns="0" tIns="0" rIns="0" bIns="0" rtlCol="0" anchor="ctr"/>
+          <a:lstStyle/>
+          <a:p>
             <a:pPr marL="0" indent="0">
               <a:buNone/>
             </a:pPr>
             <a:r>
-              <a:rPr lang="en-US" sz="840" dirty="0">
+              <a:rPr lang="en-US" sz="1200" b="1" dirty="0">
+                <a:solidFill>
+                  <a:srgbClr val="0B1F3A"/>
+                </a:solidFill>
+              </a:rPr>
+              <a:t>车辆减速/停车</a:t>
+            </a:r>
+            <a:endParaRPr lang="en-US" sz="1200" dirty="0"/>
+          </a:p>
+        </p:txBody>
+      </p:sp>
+      <p:sp>
+        <p:nvSpPr>
+          <p:cNvPr id="30" name="Text 27"/>
+          <p:cNvSpPr/>
+          <p:nvPr/>
+        </p:nvSpPr>
+        <p:spPr>
+          <a:xfrm>
+            <a:off x="9052560" y="4434840"/>
+            <a:ext cx="2148840" cy="347472"/>
+          </a:xfrm>
+          <a:prstGeom prst="rect">
+            <a:avLst/>
+          </a:prstGeom>
+          <a:noFill/>
+        </p:spPr>
+        <p:txBody>
+          <a:bodyPr wrap="square" lIns="0" tIns="0" rIns="0" bIns="0" rtlCol="0" anchor="ctr">
+            <a:normAutofit/>
+          </a:bodyPr>
+          <a:lstStyle/>
+          <a:p>
+            <a:pPr marL="0" indent="0">
+              <a:buNone/>
+            </a:pPr>
+            <a:r>
+              <a:rPr lang="en-US" sz="890" dirty="0">
                 <a:solidFill>
                   <a:srgbClr val="67758A"/>
                 </a:solidFill>
               </a:rPr>
-              <a:t>大屏同步展示识别与响应链路</a:t>
-            </a:r>
-            <a:endParaRPr lang="en-US" sz="840" dirty="0"/>
-          </a:p>
-        </p:txBody>
-      </p:sp>
-      <p:sp>
-        <p:nvSpPr>
-          <p:cNvPr id="45" name="Text 42"/>
-          <p:cNvSpPr/>
-          <p:nvPr/>
-        </p:nvSpPr>
-        <p:spPr>
-          <a:xfrm>
-            <a:off x="685800" y="6126480"/>
-            <a:ext cx="7498080" cy="219456"/>
-          </a:xfrm>
-          <a:prstGeom prst="rect">
-            <a:avLst/>
-          </a:prstGeom>
-          <a:noFill/>
-        </p:spPr>
-        <p:txBody>
-          <a:bodyPr wrap="square" lIns="0" tIns="0" rIns="0" bIns="0" rtlCol="0" anchor="ctr"/>
-          <a:lstStyle/>
-          <a:p>
-            <a:pPr marL="0" indent="0" algn="l">
-              <a:buNone/>
-            </a:pPr>
-            <a:r>
-              <a:rPr lang="en-US" sz="730" dirty="0">
-                <a:solidFill>
-                  <a:srgbClr val="7B8798"/>
-                </a:solidFill>
-              </a:rPr>
-              <a:t>参考：V2I让车辆与道路设施交换信号灯、路况、障碍物等信息。资料：USI Global。</a:t>
-            </a:r>
-            <a:endParaRPr lang="en-US" sz="730" dirty="0"/>
-          </a:p>
-        </p:txBody>
-      </p:sp>
-      <p:sp>
-        <p:nvSpPr>
-          <p:cNvPr id="46" name="Text 43"/>
+              <a:t>大屏显示虚拟目标与处置结果</a:t>
+            </a:r>
+            <a:endParaRPr lang="en-US" sz="890" dirty="0"/>
+          </a:p>
+        </p:txBody>
+      </p:sp>
+      <p:sp>
+        <p:nvSpPr>
+          <p:cNvPr id="33" name="Text 30"/>
           <p:cNvSpPr/>
           <p:nvPr/>
         </p:nvSpPr>
@@ -7210,7 +7164,7 @@
       </p:sp>
       <p:sp>
         <p:nvSpPr>
-          <p:cNvPr id="47" name="Text 44"/>
+          <p:cNvPr id="34" name="Text 31"/>
           <p:cNvSpPr/>
           <p:nvPr/>
         </p:nvSpPr>
@@ -7300,7 +7254,7 @@
                 <a:ea typeface="微软雅黑" panose="020B0503020204020204" charset="-122"/>
                 <a:cs typeface="微软雅黑" panose="020B0503020204020204" pitchFamily="34" charset="-120"/>
               </a:rPr>
-              <a:t>03  现场演示脚本：6步让领导看懂</a:t>
+              <a:t>04  大屏怎么展示：把“AI做了什么”讲清楚</a:t>
             </a:r>
             <a:endParaRPr lang="en-US" sz="2300" dirty="0"/>
           </a:p>
@@ -7331,7 +7285,7 @@
       </p:sp>
       <p:pic>
         <p:nvPicPr>
-          <p:cNvPr id="5" name="Image 0" descr="/mnt/data/scene_wide_crop.jpg"/>
+          <p:cNvPr id="5" name="Image 0" descr="/mnt/data/screen_crop.jpg"/>
           <p:cNvPicPr>
             <a:picLocks noChangeAspect="1"/>
           </p:cNvPicPr>
@@ -7345,8 +7299,8 @@
         </p:blipFill>
         <p:spPr>
           <a:xfrm>
-            <a:off x="594360" y="1298448"/>
-            <a:ext cx="4800600" cy="4114800"/>
+            <a:off x="566928" y="1298448"/>
+            <a:ext cx="5212080" cy="3977640"/>
           </a:xfrm>
           <a:prstGeom prst="rect">
             <a:avLst/>
@@ -7361,8 +7315,8 @@
         </p:nvSpPr>
         <p:spPr>
           <a:xfrm>
-            <a:off x="713232" y="5577840"/>
-            <a:ext cx="4572000" cy="256032"/>
+            <a:off x="658368" y="5440680"/>
+            <a:ext cx="4983480" cy="237744"/>
           </a:xfrm>
           <a:prstGeom prst="rect">
             <a:avLst/>
@@ -7377,39 +7331,354 @@
               <a:buNone/>
             </a:pPr>
             <a:r>
-              <a:rPr lang="en-US" sz="940" dirty="0">
+              <a:rPr lang="en-US" sz="930" dirty="0">
                 <a:solidFill>
                   <a:srgbClr val="67758A"/>
                 </a:solidFill>
               </a:rPr>
-              <a:t>建议在沙盘中选择建筑转角或学校/医院门口作为冲突区域</a:t>
-            </a:r>
-            <a:endParaRPr lang="en-US" sz="940" dirty="0"/>
-          </a:p>
-        </p:txBody>
-      </p:sp>
-      <p:sp>
-        <p:nvSpPr>
-          <p:cNvPr id="7" name="Shape 4"/>
-          <p:cNvSpPr/>
-          <p:nvPr/>
-        </p:nvSpPr>
-        <p:spPr>
-          <a:xfrm>
-            <a:off x="5715000" y="1426464"/>
-            <a:ext cx="347472" cy="347472"/>
-          </a:xfrm>
-          <a:prstGeom prst="ellipse">
-            <a:avLst/>
+              <a:t>建议把当前大屏从“状态参数看板”升级成“协同感知解释看板”</a:t>
+            </a:r>
+            <a:endParaRPr lang="en-US" sz="930" dirty="0"/>
+          </a:p>
+        </p:txBody>
+      </p:sp>
+      <p:sp>
+        <p:nvSpPr>
+          <p:cNvPr id="7" name="Text 4"/>
+          <p:cNvSpPr/>
+          <p:nvPr/>
+        </p:nvSpPr>
+        <p:spPr>
+          <a:xfrm>
+            <a:off x="6153912" y="1325880"/>
+            <a:ext cx="1828800" cy="274320"/>
+          </a:xfrm>
+          <a:prstGeom prst="rect">
+            <a:avLst/>
+          </a:prstGeom>
+          <a:noFill/>
+        </p:spPr>
+        <p:txBody>
+          <a:bodyPr wrap="square" lIns="0" tIns="0" rIns="0" bIns="0" rtlCol="0" anchor="ctr"/>
+          <a:lstStyle/>
+          <a:p>
+            <a:pPr marL="0" indent="0">
+              <a:buNone/>
+            </a:pPr>
+            <a:r>
+              <a:rPr lang="en-US" sz="1400" b="1" dirty="0">
+                <a:solidFill>
+                  <a:srgbClr val="0B1F3A"/>
+                </a:solidFill>
+              </a:rPr>
+              <a:t>大屏四个核心区</a:t>
+            </a:r>
+            <a:endParaRPr lang="en-US" sz="1400" dirty="0"/>
+          </a:p>
+        </p:txBody>
+      </p:sp>
+      <p:sp>
+        <p:nvSpPr>
+          <p:cNvPr id="8" name="Text 5"/>
+          <p:cNvSpPr/>
+          <p:nvPr/>
+        </p:nvSpPr>
+        <p:spPr>
+          <a:xfrm>
+            <a:off x="6172200" y="1865376"/>
+            <a:ext cx="4206240" cy="219456"/>
+          </a:xfrm>
+          <a:prstGeom prst="rect">
+            <a:avLst/>
+          </a:prstGeom>
+          <a:noFill/>
+        </p:spPr>
+        <p:txBody>
+          <a:bodyPr wrap="square" lIns="0" tIns="0" rIns="0" bIns="0" rtlCol="0" anchor="ctr"/>
+          <a:lstStyle/>
+          <a:p>
+            <a:pPr marL="0" indent="0">
+              <a:buNone/>
+            </a:pPr>
+            <a:r>
+              <a:rPr lang="en-US" sz="1200" b="1" dirty="0">
+                <a:solidFill>
+                  <a:srgbClr val="1E293B"/>
+                </a:solidFill>
+              </a:rPr>
+              <a:t>① 沙盘实景/摄像头画面</a:t>
+            </a:r>
+            <a:endParaRPr lang="en-US" sz="1200" dirty="0"/>
+          </a:p>
+        </p:txBody>
+      </p:sp>
+      <p:sp>
+        <p:nvSpPr>
+          <p:cNvPr id="9" name="Text 6"/>
+          <p:cNvSpPr/>
+          <p:nvPr/>
+        </p:nvSpPr>
+        <p:spPr>
+          <a:xfrm>
+            <a:off x="6172200" y="2176272"/>
+            <a:ext cx="4389120" cy="219456"/>
+          </a:xfrm>
+          <a:prstGeom prst="rect">
+            <a:avLst/>
+          </a:prstGeom>
+          <a:noFill/>
+        </p:spPr>
+        <p:txBody>
+          <a:bodyPr wrap="square" lIns="0" tIns="0" rIns="0" bIns="0" rtlCol="0" anchor="ctr"/>
+          <a:lstStyle/>
+          <a:p>
+            <a:pPr marL="0" indent="0">
+              <a:buNone/>
+            </a:pPr>
+            <a:r>
+              <a:rPr lang="en-US" sz="930" dirty="0">
+                <a:solidFill>
+                  <a:srgbClr val="67758A"/>
+                </a:solidFill>
+              </a:rPr>
+              <a:t>显示路侧摄像头看到的盲区目标</a:t>
+            </a:r>
+            <a:endParaRPr lang="en-US" sz="930" dirty="0"/>
+          </a:p>
+        </p:txBody>
+      </p:sp>
+      <p:sp>
+        <p:nvSpPr>
+          <p:cNvPr id="10" name="Text 7"/>
+          <p:cNvSpPr/>
+          <p:nvPr/>
+        </p:nvSpPr>
+        <p:spPr>
+          <a:xfrm>
+            <a:off x="6172200" y="2660904"/>
+            <a:ext cx="4206240" cy="219456"/>
+          </a:xfrm>
+          <a:prstGeom prst="rect">
+            <a:avLst/>
+          </a:prstGeom>
+          <a:noFill/>
+        </p:spPr>
+        <p:txBody>
+          <a:bodyPr wrap="square" lIns="0" tIns="0" rIns="0" bIns="0" rtlCol="0" anchor="ctr"/>
+          <a:lstStyle/>
+          <a:p>
+            <a:pPr marL="0" indent="0">
+              <a:buNone/>
+            </a:pPr>
+            <a:r>
+              <a:rPr lang="en-US" sz="1200" b="1" dirty="0">
+                <a:solidFill>
+                  <a:srgbClr val="1E293B"/>
+                </a:solidFill>
+              </a:rPr>
+              <a:t>② 风险目标叠加</a:t>
+            </a:r>
+            <a:endParaRPr lang="en-US" sz="1200" dirty="0"/>
+          </a:p>
+        </p:txBody>
+      </p:sp>
+      <p:sp>
+        <p:nvSpPr>
+          <p:cNvPr id="11" name="Text 8"/>
+          <p:cNvSpPr/>
+          <p:nvPr/>
+        </p:nvSpPr>
+        <p:spPr>
+          <a:xfrm>
+            <a:off x="6172200" y="2971800"/>
+            <a:ext cx="4389120" cy="219456"/>
+          </a:xfrm>
+          <a:prstGeom prst="rect">
+            <a:avLst/>
+          </a:prstGeom>
+          <a:noFill/>
+        </p:spPr>
+        <p:txBody>
+          <a:bodyPr wrap="square" lIns="0" tIns="0" rIns="0" bIns="0" rtlCol="0" anchor="ctr"/>
+          <a:lstStyle/>
+          <a:p>
+            <a:pPr marL="0" indent="0">
+              <a:buNone/>
+            </a:pPr>
+            <a:r>
+              <a:rPr lang="en-US" sz="930" dirty="0">
+                <a:solidFill>
+                  <a:srgbClr val="67758A"/>
+                </a:solidFill>
+              </a:rPr>
+              <a:t>在地图上标出行人、车、冲突区域</a:t>
+            </a:r>
+            <a:endParaRPr lang="en-US" sz="930" dirty="0"/>
+          </a:p>
+        </p:txBody>
+      </p:sp>
+      <p:sp>
+        <p:nvSpPr>
+          <p:cNvPr id="12" name="Text 9"/>
+          <p:cNvSpPr/>
+          <p:nvPr/>
+        </p:nvSpPr>
+        <p:spPr>
+          <a:xfrm>
+            <a:off x="6172200" y="3456432"/>
+            <a:ext cx="4206240" cy="219456"/>
+          </a:xfrm>
+          <a:prstGeom prst="rect">
+            <a:avLst/>
+          </a:prstGeom>
+          <a:noFill/>
+        </p:spPr>
+        <p:txBody>
+          <a:bodyPr wrap="square" lIns="0" tIns="0" rIns="0" bIns="0" rtlCol="0" anchor="ctr"/>
+          <a:lstStyle/>
+          <a:p>
+            <a:pPr marL="0" indent="0">
+              <a:buNone/>
+            </a:pPr>
+            <a:r>
+              <a:rPr lang="en-US" sz="1200" b="1" dirty="0">
+                <a:solidFill>
+                  <a:srgbClr val="1E293B"/>
+                </a:solidFill>
+              </a:rPr>
+              <a:t>③ 风险指标</a:t>
+            </a:r>
+            <a:endParaRPr lang="en-US" sz="1200" dirty="0"/>
+          </a:p>
+        </p:txBody>
+      </p:sp>
+      <p:sp>
+        <p:nvSpPr>
+          <p:cNvPr id="13" name="Text 10"/>
+          <p:cNvSpPr/>
+          <p:nvPr/>
+        </p:nvSpPr>
+        <p:spPr>
+          <a:xfrm>
+            <a:off x="6172200" y="3767328"/>
+            <a:ext cx="4389120" cy="219456"/>
+          </a:xfrm>
+          <a:prstGeom prst="rect">
+            <a:avLst/>
+          </a:prstGeom>
+          <a:noFill/>
+        </p:spPr>
+        <p:txBody>
+          <a:bodyPr wrap="square" lIns="0" tIns="0" rIns="0" bIns="0" rtlCol="0" anchor="ctr"/>
+          <a:lstStyle/>
+          <a:p>
+            <a:pPr marL="0" indent="0">
+              <a:buNone/>
+            </a:pPr>
+            <a:r>
+              <a:rPr lang="en-US" sz="930" dirty="0">
+                <a:solidFill>
+                  <a:srgbClr val="67758A"/>
+                </a:solidFill>
+              </a:rPr>
+              <a:t>TTC、距离、速度、风险等级</a:t>
+            </a:r>
+            <a:endParaRPr lang="en-US" sz="930" dirty="0"/>
+          </a:p>
+        </p:txBody>
+      </p:sp>
+      <p:sp>
+        <p:nvSpPr>
+          <p:cNvPr id="14" name="Text 11"/>
+          <p:cNvSpPr/>
+          <p:nvPr/>
+        </p:nvSpPr>
+        <p:spPr>
+          <a:xfrm>
+            <a:off x="6172200" y="4251960"/>
+            <a:ext cx="4206240" cy="219456"/>
+          </a:xfrm>
+          <a:prstGeom prst="rect">
+            <a:avLst/>
+          </a:prstGeom>
+          <a:noFill/>
+        </p:spPr>
+        <p:txBody>
+          <a:bodyPr wrap="square" lIns="0" tIns="0" rIns="0" bIns="0" rtlCol="0" anchor="ctr"/>
+          <a:lstStyle/>
+          <a:p>
+            <a:pPr marL="0" indent="0">
+              <a:buNone/>
+            </a:pPr>
+            <a:r>
+              <a:rPr lang="en-US" sz="1200" b="1" dirty="0">
+                <a:solidFill>
+                  <a:srgbClr val="1E293B"/>
+                </a:solidFill>
+              </a:rPr>
+              <a:t>④ 车辆响应</a:t>
+            </a:r>
+            <a:endParaRPr lang="en-US" sz="1200" dirty="0"/>
+          </a:p>
+        </p:txBody>
+      </p:sp>
+      <p:sp>
+        <p:nvSpPr>
+          <p:cNvPr id="15" name="Text 12"/>
+          <p:cNvSpPr/>
+          <p:nvPr/>
+        </p:nvSpPr>
+        <p:spPr>
+          <a:xfrm>
+            <a:off x="6172200" y="4562856"/>
+            <a:ext cx="4389120" cy="219456"/>
+          </a:xfrm>
+          <a:prstGeom prst="rect">
+            <a:avLst/>
+          </a:prstGeom>
+          <a:noFill/>
+        </p:spPr>
+        <p:txBody>
+          <a:bodyPr wrap="square" lIns="0" tIns="0" rIns="0" bIns="0" rtlCol="0" anchor="ctr"/>
+          <a:lstStyle/>
+          <a:p>
+            <a:pPr marL="0" indent="0">
+              <a:buNone/>
+            </a:pPr>
+            <a:r>
+              <a:rPr lang="en-US" sz="930" dirty="0">
+                <a:solidFill>
+                  <a:srgbClr val="67758A"/>
+                </a:solidFill>
+              </a:rPr>
+              <a:t>已预警 / 已减速 / 已停车 / 已解除风险</a:t>
+            </a:r>
+            <a:endParaRPr lang="en-US" sz="930" dirty="0"/>
+          </a:p>
+        </p:txBody>
+      </p:sp>
+      <p:sp>
+        <p:nvSpPr>
+          <p:cNvPr id="16" name="Shape 13"/>
+          <p:cNvSpPr/>
+          <p:nvPr/>
+        </p:nvSpPr>
+        <p:spPr>
+          <a:xfrm>
+            <a:off x="6144768" y="5321808"/>
+            <a:ext cx="4617720" cy="585216"/>
+          </a:xfrm>
+          <a:prstGeom prst="roundRect">
+            <a:avLst>
+              <a:gd name="adj" fmla="val 12500"/>
+            </a:avLst>
           </a:prstGeom>
           <a:solidFill>
-            <a:srgbClr val="116DFF"/>
+            <a:srgbClr val="EAF8FF"/>
           </a:solidFill>
           <a:ln w="12700">
             <a:solidFill>
-              <a:srgbClr val="FFFFFF">
-                <a:alpha val="0"/>
-              </a:srgbClr>
+              <a:srgbClr val="CDEEFF"/>
             </a:solidFill>
             <a:prstDash val="solid"/>
           </a:ln>
@@ -7417,14 +7686,14 @@
       </p:sp>
       <p:sp>
         <p:nvSpPr>
-          <p:cNvPr id="8" name="Text 5"/>
-          <p:cNvSpPr/>
-          <p:nvPr/>
-        </p:nvSpPr>
-        <p:spPr>
-          <a:xfrm>
-            <a:off x="5715000" y="1495044"/>
-            <a:ext cx="347472" cy="146304"/>
+          <p:cNvPr id="17" name="Text 14"/>
+          <p:cNvSpPr/>
+          <p:nvPr/>
+        </p:nvSpPr>
+        <p:spPr>
+          <a:xfrm>
+            <a:off x="6327648" y="5458968"/>
+            <a:ext cx="1143000" cy="164592"/>
           </a:xfrm>
           <a:prstGeom prst="rect">
             <a:avLst/>
@@ -7435,66 +7704,31 @@
           <a:bodyPr wrap="square" lIns="0" tIns="0" rIns="0" bIns="0" rtlCol="0" anchor="ctr"/>
           <a:lstStyle/>
           <a:p>
-            <a:pPr marL="0" indent="0" algn="ctr">
-              <a:buNone/>
-            </a:pPr>
-            <a:r>
-              <a:rPr lang="en-US" sz="920" b="1" dirty="0">
-                <a:solidFill>
-                  <a:srgbClr val="FFFFFF"/>
-                </a:solidFill>
-              </a:rPr>
-              <a:t>1</a:t>
-            </a:r>
-            <a:endParaRPr lang="en-US" sz="920" dirty="0"/>
-          </a:p>
-        </p:txBody>
-      </p:sp>
-      <p:sp>
-        <p:nvSpPr>
-          <p:cNvPr id="9" name="Text 6"/>
-          <p:cNvSpPr/>
-          <p:nvPr/>
-        </p:nvSpPr>
-        <p:spPr>
-          <a:xfrm>
-            <a:off x="6217920" y="1399032"/>
-            <a:ext cx="2057400" cy="219456"/>
-          </a:xfrm>
-          <a:prstGeom prst="rect">
-            <a:avLst/>
-          </a:prstGeom>
-          <a:noFill/>
-        </p:spPr>
-        <p:txBody>
-          <a:bodyPr wrap="square" lIns="0" tIns="0" rIns="0" bIns="0" rtlCol="0" anchor="ctr"/>
-          <a:lstStyle/>
-          <a:p>
             <a:pPr marL="0" indent="0">
               <a:buNone/>
             </a:pPr>
             <a:r>
-              <a:rPr lang="en-US" sz="1200" b="1" dirty="0">
-                <a:solidFill>
-                  <a:srgbClr val="0B1F3A"/>
-                </a:solidFill>
-              </a:rPr>
-              <a:t>小车正常行驶</a:t>
-            </a:r>
-            <a:endParaRPr lang="en-US" sz="1200" dirty="0"/>
-          </a:p>
-        </p:txBody>
-      </p:sp>
-      <p:sp>
-        <p:nvSpPr>
-          <p:cNvPr id="10" name="Text 7"/>
-          <p:cNvSpPr/>
-          <p:nvPr/>
-        </p:nvSpPr>
-        <p:spPr>
-          <a:xfrm>
-            <a:off x="6217920" y="1728216"/>
-            <a:ext cx="2148840" cy="347472"/>
+              <a:rPr lang="en-US" sz="870" b="1" dirty="0">
+                <a:solidFill>
+                  <a:srgbClr val="116DFF"/>
+                </a:solidFill>
+              </a:rPr>
+              <a:t>建议界面提示语</a:t>
+            </a:r>
+            <a:endParaRPr lang="en-US" sz="870" dirty="0"/>
+          </a:p>
+        </p:txBody>
+      </p:sp>
+      <p:sp>
+        <p:nvSpPr>
+          <p:cNvPr id="18" name="Text 15"/>
+          <p:cNvSpPr/>
+          <p:nvPr/>
+        </p:nvSpPr>
+        <p:spPr>
+          <a:xfrm>
+            <a:off x="7726680" y="5440680"/>
+            <a:ext cx="2834640" cy="228600"/>
           </a:xfrm>
           <a:prstGeom prst="rect">
             <a:avLst/>
@@ -7511,74 +7745,12 @@
               <a:buNone/>
             </a:pPr>
             <a:r>
-              <a:rPr lang="en-US" sz="890" dirty="0">
-                <a:solidFill>
-                  <a:srgbClr val="67758A"/>
-                </a:solidFill>
-              </a:rPr>
-              <a:t>沿既定路线接近建筑转角</a:t>
-            </a:r>
-            <a:endParaRPr lang="en-US" sz="890" dirty="0"/>
-          </a:p>
-        </p:txBody>
-      </p:sp>
-      <p:sp>
-        <p:nvSpPr>
-          <p:cNvPr id="11" name="Shape 8"/>
-          <p:cNvSpPr/>
-          <p:nvPr/>
-        </p:nvSpPr>
-        <p:spPr>
-          <a:xfrm>
-            <a:off x="8549640" y="1426464"/>
-            <a:ext cx="347472" cy="347472"/>
-          </a:xfrm>
-          <a:prstGeom prst="ellipse">
-            <a:avLst/>
-          </a:prstGeom>
-          <a:solidFill>
-            <a:srgbClr val="116DFF"/>
-          </a:solidFill>
-          <a:ln w="12700">
-            <a:solidFill>
-              <a:srgbClr val="FFFFFF">
-                <a:alpha val="0"/>
-              </a:srgbClr>
-            </a:solidFill>
-            <a:prstDash val="solid"/>
-          </a:ln>
-        </p:spPr>
-      </p:sp>
-      <p:sp>
-        <p:nvSpPr>
-          <p:cNvPr id="12" name="Text 9"/>
-          <p:cNvSpPr/>
-          <p:nvPr/>
-        </p:nvSpPr>
-        <p:spPr>
-          <a:xfrm>
-            <a:off x="8549640" y="1495044"/>
-            <a:ext cx="347472" cy="146304"/>
-          </a:xfrm>
-          <a:prstGeom prst="rect">
-            <a:avLst/>
-          </a:prstGeom>
-          <a:noFill/>
-        </p:spPr>
-        <p:txBody>
-          <a:bodyPr wrap="square" lIns="0" tIns="0" rIns="0" bIns="0" rtlCol="0" anchor="ctr"/>
-          <a:lstStyle/>
-          <a:p>
-            <a:pPr marL="0" indent="0" algn="ctr">
-              <a:buNone/>
-            </a:pPr>
-            <a:r>
               <a:rPr lang="en-US" sz="920" b="1" dirty="0">
                 <a:solidFill>
-                  <a:srgbClr val="FFFFFF"/>
-                </a:solidFill>
-              </a:rPr>
-              <a:t>2</a:t>
+                  <a:srgbClr val="0B1F3A"/>
+                </a:solidFill>
+              </a:rPr>
+              <a:t>右前方建筑盲区存在横穿行人，TTC=2.3s，已向车辆发送高风险预警。</a:t>
             </a:r>
             <a:endParaRPr lang="en-US" sz="920" dirty="0"/>
           </a:p>
@@ -7586,615 +7758,7 @@
       </p:sp>
       <p:sp>
         <p:nvSpPr>
-          <p:cNvPr id="13" name="Text 10"/>
-          <p:cNvSpPr/>
-          <p:nvPr/>
-        </p:nvSpPr>
-        <p:spPr>
-          <a:xfrm>
-            <a:off x="9052560" y="1399032"/>
-            <a:ext cx="2057400" cy="219456"/>
-          </a:xfrm>
-          <a:prstGeom prst="rect">
-            <a:avLst/>
-          </a:prstGeom>
-          <a:noFill/>
-        </p:spPr>
-        <p:txBody>
-          <a:bodyPr wrap="square" lIns="0" tIns="0" rIns="0" bIns="0" rtlCol="0" anchor="ctr"/>
-          <a:lstStyle/>
-          <a:p>
-            <a:pPr marL="0" indent="0">
-              <a:buNone/>
-            </a:pPr>
-            <a:r>
-              <a:rPr lang="en-US" sz="1200" b="1" dirty="0">
-                <a:solidFill>
-                  <a:srgbClr val="0B1F3A"/>
-                </a:solidFill>
-              </a:rPr>
-              <a:t>行人从盲区出现</a:t>
-            </a:r>
-            <a:endParaRPr lang="en-US" sz="1200" dirty="0"/>
-          </a:p>
-        </p:txBody>
-      </p:sp>
-      <p:sp>
-        <p:nvSpPr>
-          <p:cNvPr id="14" name="Text 11"/>
-          <p:cNvSpPr/>
-          <p:nvPr/>
-        </p:nvSpPr>
-        <p:spPr>
-          <a:xfrm>
-            <a:off x="9052560" y="1728216"/>
-            <a:ext cx="2148840" cy="347472"/>
-          </a:xfrm>
-          <a:prstGeom prst="rect">
-            <a:avLst/>
-          </a:prstGeom>
-          <a:noFill/>
-        </p:spPr>
-        <p:txBody>
-          <a:bodyPr wrap="square" lIns="0" tIns="0" rIns="0" bIns="0" rtlCol="0" anchor="ctr">
-            <a:normAutofit/>
-          </a:bodyPr>
-          <a:lstStyle/>
-          <a:p>
-            <a:pPr marL="0" indent="0">
-              <a:buNone/>
-            </a:pPr>
-            <a:r>
-              <a:rPr lang="en-US" sz="890" dirty="0">
-                <a:solidFill>
-                  <a:srgbClr val="67758A"/>
-                </a:solidFill>
-              </a:rPr>
-              <a:t>小车本车视角暂时不可见</a:t>
-            </a:r>
-            <a:endParaRPr lang="en-US" sz="890" dirty="0"/>
-          </a:p>
-        </p:txBody>
-      </p:sp>
-      <p:sp>
-        <p:nvSpPr>
-          <p:cNvPr id="15" name="Shape 12"/>
-          <p:cNvSpPr/>
-          <p:nvPr/>
-        </p:nvSpPr>
-        <p:spPr>
-          <a:xfrm>
-            <a:off x="5715000" y="2779776"/>
-            <a:ext cx="347472" cy="347472"/>
-          </a:xfrm>
-          <a:prstGeom prst="ellipse">
-            <a:avLst/>
-          </a:prstGeom>
-          <a:solidFill>
-            <a:srgbClr val="116DFF"/>
-          </a:solidFill>
-          <a:ln w="12700">
-            <a:solidFill>
-              <a:srgbClr val="FFFFFF">
-                <a:alpha val="0"/>
-              </a:srgbClr>
-            </a:solidFill>
-            <a:prstDash val="solid"/>
-          </a:ln>
-        </p:spPr>
-      </p:sp>
-      <p:sp>
-        <p:nvSpPr>
-          <p:cNvPr id="16" name="Text 13"/>
-          <p:cNvSpPr/>
-          <p:nvPr/>
-        </p:nvSpPr>
-        <p:spPr>
-          <a:xfrm>
-            <a:off x="5715000" y="2848356"/>
-            <a:ext cx="347472" cy="146304"/>
-          </a:xfrm>
-          <a:prstGeom prst="rect">
-            <a:avLst/>
-          </a:prstGeom>
-          <a:noFill/>
-        </p:spPr>
-        <p:txBody>
-          <a:bodyPr wrap="square" lIns="0" tIns="0" rIns="0" bIns="0" rtlCol="0" anchor="ctr"/>
-          <a:lstStyle/>
-          <a:p>
-            <a:pPr marL="0" indent="0" algn="ctr">
-              <a:buNone/>
-            </a:pPr>
-            <a:r>
-              <a:rPr lang="en-US" sz="920" b="1" dirty="0">
-                <a:solidFill>
-                  <a:srgbClr val="FFFFFF"/>
-                </a:solidFill>
-              </a:rPr>
-              <a:t>3</a:t>
-            </a:r>
-            <a:endParaRPr lang="en-US" sz="920" dirty="0"/>
-          </a:p>
-        </p:txBody>
-      </p:sp>
-      <p:sp>
-        <p:nvSpPr>
-          <p:cNvPr id="17" name="Text 14"/>
-          <p:cNvSpPr/>
-          <p:nvPr/>
-        </p:nvSpPr>
-        <p:spPr>
-          <a:xfrm>
-            <a:off x="6217920" y="2752344"/>
-            <a:ext cx="2057400" cy="219456"/>
-          </a:xfrm>
-          <a:prstGeom prst="rect">
-            <a:avLst/>
-          </a:prstGeom>
-          <a:noFill/>
-        </p:spPr>
-        <p:txBody>
-          <a:bodyPr wrap="square" lIns="0" tIns="0" rIns="0" bIns="0" rtlCol="0" anchor="ctr"/>
-          <a:lstStyle/>
-          <a:p>
-            <a:pPr marL="0" indent="0">
-              <a:buNone/>
-            </a:pPr>
-            <a:r>
-              <a:rPr lang="en-US" sz="1200" b="1" dirty="0">
-                <a:solidFill>
-                  <a:srgbClr val="0B1F3A"/>
-                </a:solidFill>
-              </a:rPr>
-              <a:t>路侧摄像头先发现</a:t>
-            </a:r>
-            <a:endParaRPr lang="en-US" sz="1200" dirty="0"/>
-          </a:p>
-        </p:txBody>
-      </p:sp>
-      <p:sp>
-        <p:nvSpPr>
-          <p:cNvPr id="18" name="Text 15"/>
-          <p:cNvSpPr/>
-          <p:nvPr/>
-        </p:nvSpPr>
-        <p:spPr>
-          <a:xfrm>
-            <a:off x="6217920" y="3081528"/>
-            <a:ext cx="2148840" cy="347472"/>
-          </a:xfrm>
-          <a:prstGeom prst="rect">
-            <a:avLst/>
-          </a:prstGeom>
-          <a:noFill/>
-        </p:spPr>
-        <p:txBody>
-          <a:bodyPr wrap="square" lIns="0" tIns="0" rIns="0" bIns="0" rtlCol="0" anchor="ctr">
-            <a:normAutofit/>
-          </a:bodyPr>
-          <a:lstStyle/>
-          <a:p>
-            <a:pPr marL="0" indent="0">
-              <a:buNone/>
-            </a:pPr>
-            <a:r>
-              <a:rPr lang="en-US" sz="890" dirty="0">
-                <a:solidFill>
-                  <a:srgbClr val="67758A"/>
-                </a:solidFill>
-              </a:rPr>
-              <a:t>边缘AI识别目标类型与轨迹</a:t>
-            </a:r>
-            <a:endParaRPr lang="en-US" sz="890" dirty="0"/>
-          </a:p>
-        </p:txBody>
-      </p:sp>
-      <p:sp>
-        <p:nvSpPr>
-          <p:cNvPr id="19" name="Shape 16"/>
-          <p:cNvSpPr/>
-          <p:nvPr/>
-        </p:nvSpPr>
-        <p:spPr>
-          <a:xfrm>
-            <a:off x="8549640" y="2779776"/>
-            <a:ext cx="347472" cy="347472"/>
-          </a:xfrm>
-          <a:prstGeom prst="ellipse">
-            <a:avLst/>
-          </a:prstGeom>
-          <a:solidFill>
-            <a:srgbClr val="FF4D4F"/>
-          </a:solidFill>
-          <a:ln w="12700">
-            <a:solidFill>
-              <a:srgbClr val="FFFFFF">
-                <a:alpha val="0"/>
-              </a:srgbClr>
-            </a:solidFill>
-            <a:prstDash val="solid"/>
-          </a:ln>
-        </p:spPr>
-      </p:sp>
-      <p:sp>
-        <p:nvSpPr>
-          <p:cNvPr id="20" name="Text 17"/>
-          <p:cNvSpPr/>
-          <p:nvPr/>
-        </p:nvSpPr>
-        <p:spPr>
-          <a:xfrm>
-            <a:off x="8549640" y="2848356"/>
-            <a:ext cx="347472" cy="146304"/>
-          </a:xfrm>
-          <a:prstGeom prst="rect">
-            <a:avLst/>
-          </a:prstGeom>
-          <a:noFill/>
-        </p:spPr>
-        <p:txBody>
-          <a:bodyPr wrap="square" lIns="0" tIns="0" rIns="0" bIns="0" rtlCol="0" anchor="ctr"/>
-          <a:lstStyle/>
-          <a:p>
-            <a:pPr marL="0" indent="0" algn="ctr">
-              <a:buNone/>
-            </a:pPr>
-            <a:r>
-              <a:rPr lang="en-US" sz="920" b="1" dirty="0">
-                <a:solidFill>
-                  <a:srgbClr val="FFFFFF"/>
-                </a:solidFill>
-              </a:rPr>
-              <a:t>4</a:t>
-            </a:r>
-            <a:endParaRPr lang="en-US" sz="920" dirty="0"/>
-          </a:p>
-        </p:txBody>
-      </p:sp>
-      <p:sp>
-        <p:nvSpPr>
-          <p:cNvPr id="21" name="Text 18"/>
-          <p:cNvSpPr/>
-          <p:nvPr/>
-        </p:nvSpPr>
-        <p:spPr>
-          <a:xfrm>
-            <a:off x="9052560" y="2752344"/>
-            <a:ext cx="2057400" cy="219456"/>
-          </a:xfrm>
-          <a:prstGeom prst="rect">
-            <a:avLst/>
-          </a:prstGeom>
-          <a:noFill/>
-        </p:spPr>
-        <p:txBody>
-          <a:bodyPr wrap="square" lIns="0" tIns="0" rIns="0" bIns="0" rtlCol="0" anchor="ctr"/>
-          <a:lstStyle/>
-          <a:p>
-            <a:pPr marL="0" indent="0">
-              <a:buNone/>
-            </a:pPr>
-            <a:r>
-              <a:rPr lang="en-US" sz="1200" b="1" dirty="0">
-                <a:solidFill>
-                  <a:srgbClr val="0B1F3A"/>
-                </a:solidFill>
-              </a:rPr>
-              <a:t>计算风险等级</a:t>
-            </a:r>
-            <a:endParaRPr lang="en-US" sz="1200" dirty="0"/>
-          </a:p>
-        </p:txBody>
-      </p:sp>
-      <p:sp>
-        <p:nvSpPr>
-          <p:cNvPr id="22" name="Text 19"/>
-          <p:cNvSpPr/>
-          <p:nvPr/>
-        </p:nvSpPr>
-        <p:spPr>
-          <a:xfrm>
-            <a:off x="9052560" y="3081528"/>
-            <a:ext cx="2148840" cy="347472"/>
-          </a:xfrm>
-          <a:prstGeom prst="rect">
-            <a:avLst/>
-          </a:prstGeom>
-          <a:noFill/>
-        </p:spPr>
-        <p:txBody>
-          <a:bodyPr wrap="square" lIns="0" tIns="0" rIns="0" bIns="0" rtlCol="0" anchor="ctr">
-            <a:normAutofit/>
-          </a:bodyPr>
-          <a:lstStyle/>
-          <a:p>
-            <a:pPr marL="0" indent="0">
-              <a:buNone/>
-            </a:pPr>
-            <a:r>
-              <a:rPr lang="en-US" sz="890" dirty="0">
-                <a:solidFill>
-                  <a:srgbClr val="67758A"/>
-                </a:solidFill>
-              </a:rPr>
-              <a:t>TTC=2.3s，风险等级：高</a:t>
-            </a:r>
-            <a:endParaRPr lang="en-US" sz="890" dirty="0"/>
-          </a:p>
-        </p:txBody>
-      </p:sp>
-      <p:sp>
-        <p:nvSpPr>
-          <p:cNvPr id="23" name="Shape 20"/>
-          <p:cNvSpPr/>
-          <p:nvPr/>
-        </p:nvSpPr>
-        <p:spPr>
-          <a:xfrm>
-            <a:off x="5715000" y="4133088"/>
-            <a:ext cx="347472" cy="347472"/>
-          </a:xfrm>
-          <a:prstGeom prst="ellipse">
-            <a:avLst/>
-          </a:prstGeom>
-          <a:solidFill>
-            <a:srgbClr val="116DFF"/>
-          </a:solidFill>
-          <a:ln w="12700">
-            <a:solidFill>
-              <a:srgbClr val="FFFFFF">
-                <a:alpha val="0"/>
-              </a:srgbClr>
-            </a:solidFill>
-            <a:prstDash val="solid"/>
-          </a:ln>
-        </p:spPr>
-      </p:sp>
-      <p:sp>
-        <p:nvSpPr>
-          <p:cNvPr id="24" name="Text 21"/>
-          <p:cNvSpPr/>
-          <p:nvPr/>
-        </p:nvSpPr>
-        <p:spPr>
-          <a:xfrm>
-            <a:off x="5715000" y="4201668"/>
-            <a:ext cx="347472" cy="146304"/>
-          </a:xfrm>
-          <a:prstGeom prst="rect">
-            <a:avLst/>
-          </a:prstGeom>
-          <a:noFill/>
-        </p:spPr>
-        <p:txBody>
-          <a:bodyPr wrap="square" lIns="0" tIns="0" rIns="0" bIns="0" rtlCol="0" anchor="ctr"/>
-          <a:lstStyle/>
-          <a:p>
-            <a:pPr marL="0" indent="0" algn="ctr">
-              <a:buNone/>
-            </a:pPr>
-            <a:r>
-              <a:rPr lang="en-US" sz="920" b="1" dirty="0">
-                <a:solidFill>
-                  <a:srgbClr val="FFFFFF"/>
-                </a:solidFill>
-              </a:rPr>
-              <a:t>5</a:t>
-            </a:r>
-            <a:endParaRPr lang="en-US" sz="920" dirty="0"/>
-          </a:p>
-        </p:txBody>
-      </p:sp>
-      <p:sp>
-        <p:nvSpPr>
-          <p:cNvPr id="25" name="Text 22"/>
-          <p:cNvSpPr/>
-          <p:nvPr/>
-        </p:nvSpPr>
-        <p:spPr>
-          <a:xfrm>
-            <a:off x="6217920" y="4105656"/>
-            <a:ext cx="2057400" cy="219456"/>
-          </a:xfrm>
-          <a:prstGeom prst="rect">
-            <a:avLst/>
-          </a:prstGeom>
-          <a:noFill/>
-        </p:spPr>
-        <p:txBody>
-          <a:bodyPr wrap="square" lIns="0" tIns="0" rIns="0" bIns="0" rtlCol="0" anchor="ctr"/>
-          <a:lstStyle/>
-          <a:p>
-            <a:pPr marL="0" indent="0">
-              <a:buNone/>
-            </a:pPr>
-            <a:r>
-              <a:rPr lang="en-US" sz="1200" b="1" dirty="0">
-                <a:solidFill>
-                  <a:srgbClr val="0B1F3A"/>
-                </a:solidFill>
-              </a:rPr>
-              <a:t>RSU/V2X发出预警</a:t>
-            </a:r>
-            <a:endParaRPr lang="en-US" sz="1200" dirty="0"/>
-          </a:p>
-        </p:txBody>
-      </p:sp>
-      <p:sp>
-        <p:nvSpPr>
-          <p:cNvPr id="26" name="Text 23"/>
-          <p:cNvSpPr/>
-          <p:nvPr/>
-        </p:nvSpPr>
-        <p:spPr>
-          <a:xfrm>
-            <a:off x="6217920" y="4434840"/>
-            <a:ext cx="2148840" cy="347472"/>
-          </a:xfrm>
-          <a:prstGeom prst="rect">
-            <a:avLst/>
-          </a:prstGeom>
-          <a:noFill/>
-        </p:spPr>
-        <p:txBody>
-          <a:bodyPr wrap="square" lIns="0" tIns="0" rIns="0" bIns="0" rtlCol="0" anchor="ctr">
-            <a:normAutofit/>
-          </a:bodyPr>
-          <a:lstStyle/>
-          <a:p>
-            <a:pPr marL="0" indent="0">
-              <a:buNone/>
-            </a:pPr>
-            <a:r>
-              <a:rPr lang="en-US" sz="890" dirty="0">
-                <a:solidFill>
-                  <a:srgbClr val="67758A"/>
-                </a:solidFill>
-              </a:rPr>
-              <a:t>向小车下发“右前方盲区风险”</a:t>
-            </a:r>
-            <a:endParaRPr lang="en-US" sz="890" dirty="0"/>
-          </a:p>
-        </p:txBody>
-      </p:sp>
-      <p:sp>
-        <p:nvSpPr>
-          <p:cNvPr id="27" name="Shape 24"/>
-          <p:cNvSpPr/>
-          <p:nvPr/>
-        </p:nvSpPr>
-        <p:spPr>
-          <a:xfrm>
-            <a:off x="8549640" y="4133088"/>
-            <a:ext cx="347472" cy="347472"/>
-          </a:xfrm>
-          <a:prstGeom prst="ellipse">
-            <a:avLst/>
-          </a:prstGeom>
-          <a:solidFill>
-            <a:srgbClr val="116DFF"/>
-          </a:solidFill>
-          <a:ln w="12700">
-            <a:solidFill>
-              <a:srgbClr val="FFFFFF">
-                <a:alpha val="0"/>
-              </a:srgbClr>
-            </a:solidFill>
-            <a:prstDash val="solid"/>
-          </a:ln>
-        </p:spPr>
-      </p:sp>
-      <p:sp>
-        <p:nvSpPr>
-          <p:cNvPr id="28" name="Text 25"/>
-          <p:cNvSpPr/>
-          <p:nvPr/>
-        </p:nvSpPr>
-        <p:spPr>
-          <a:xfrm>
-            <a:off x="8549640" y="4201668"/>
-            <a:ext cx="347472" cy="146304"/>
-          </a:xfrm>
-          <a:prstGeom prst="rect">
-            <a:avLst/>
-          </a:prstGeom>
-          <a:noFill/>
-        </p:spPr>
-        <p:txBody>
-          <a:bodyPr wrap="square" lIns="0" tIns="0" rIns="0" bIns="0" rtlCol="0" anchor="ctr"/>
-          <a:lstStyle/>
-          <a:p>
-            <a:pPr marL="0" indent="0" algn="ctr">
-              <a:buNone/>
-            </a:pPr>
-            <a:r>
-              <a:rPr lang="en-US" sz="920" b="1" dirty="0">
-                <a:solidFill>
-                  <a:srgbClr val="FFFFFF"/>
-                </a:solidFill>
-              </a:rPr>
-              <a:t>6</a:t>
-            </a:r>
-            <a:endParaRPr lang="en-US" sz="920" dirty="0"/>
-          </a:p>
-        </p:txBody>
-      </p:sp>
-      <p:sp>
-        <p:nvSpPr>
-          <p:cNvPr id="29" name="Text 26"/>
-          <p:cNvSpPr/>
-          <p:nvPr/>
-        </p:nvSpPr>
-        <p:spPr>
-          <a:xfrm>
-            <a:off x="9052560" y="4105656"/>
-            <a:ext cx="2057400" cy="219456"/>
-          </a:xfrm>
-          <a:prstGeom prst="rect">
-            <a:avLst/>
-          </a:prstGeom>
-          <a:noFill/>
-        </p:spPr>
-        <p:txBody>
-          <a:bodyPr wrap="square" lIns="0" tIns="0" rIns="0" bIns="0" rtlCol="0" anchor="ctr"/>
-          <a:lstStyle/>
-          <a:p>
-            <a:pPr marL="0" indent="0">
-              <a:buNone/>
-            </a:pPr>
-            <a:r>
-              <a:rPr lang="en-US" sz="1200" b="1" dirty="0">
-                <a:solidFill>
-                  <a:srgbClr val="0B1F3A"/>
-                </a:solidFill>
-              </a:rPr>
-              <a:t>车辆减速/停车</a:t>
-            </a:r>
-            <a:endParaRPr lang="en-US" sz="1200" dirty="0"/>
-          </a:p>
-        </p:txBody>
-      </p:sp>
-      <p:sp>
-        <p:nvSpPr>
-          <p:cNvPr id="30" name="Text 27"/>
-          <p:cNvSpPr/>
-          <p:nvPr/>
-        </p:nvSpPr>
-        <p:spPr>
-          <a:xfrm>
-            <a:off x="9052560" y="4434840"/>
-            <a:ext cx="2148840" cy="347472"/>
-          </a:xfrm>
-          <a:prstGeom prst="rect">
-            <a:avLst/>
-          </a:prstGeom>
-          <a:noFill/>
-        </p:spPr>
-        <p:txBody>
-          <a:bodyPr wrap="square" lIns="0" tIns="0" rIns="0" bIns="0" rtlCol="0" anchor="ctr">
-            <a:normAutofit/>
-          </a:bodyPr>
-          <a:lstStyle/>
-          <a:p>
-            <a:pPr marL="0" indent="0">
-              <a:buNone/>
-            </a:pPr>
-            <a:r>
-              <a:rPr lang="en-US" sz="890" dirty="0">
-                <a:solidFill>
-                  <a:srgbClr val="67758A"/>
-                </a:solidFill>
-              </a:rPr>
-              <a:t>大屏显示虚拟目标与处置结果</a:t>
-            </a:r>
-            <a:endParaRPr lang="en-US" sz="890" dirty="0"/>
-          </a:p>
-        </p:txBody>
-      </p:sp>
-      <p:sp>
-        <p:nvSpPr>
-          <p:cNvPr id="33" name="Text 30"/>
+          <p:cNvPr id="19" name="Text 16"/>
           <p:cNvSpPr/>
           <p:nvPr/>
         </p:nvSpPr>
@@ -8229,7 +7793,7 @@
       </p:sp>
       <p:sp>
         <p:nvSpPr>
-          <p:cNvPr id="34" name="Text 31"/>
+          <p:cNvPr id="20" name="Text 17"/>
           <p:cNvSpPr/>
           <p:nvPr/>
         </p:nvSpPr>
@@ -8319,7 +7883,7 @@
                 <a:ea typeface="微软雅黑" panose="020B0503020204020204" charset="-122"/>
                 <a:cs typeface="微软雅黑" panose="020B0503020204020204" pitchFamily="34" charset="-120"/>
               </a:rPr>
-              <a:t>04  大屏怎么展示：把“AI做了什么”讲清楚</a:t>
+              <a:t>05  实现与采购：可用低成本设备做出闭环Demo</a:t>
             </a:r>
             <a:endParaRPr lang="en-US" sz="2300" dirty="0"/>
           </a:p>
@@ -8350,7 +7914,7 @@
       </p:sp>
       <p:pic>
         <p:nvPicPr>
-          <p:cNvPr id="5" name="Image 0" descr="/mnt/data/screen_crop.jpg"/>
+          <p:cNvPr id="5" name="Image 0" descr="/mnt/data/kit_crop.jpg"/>
           <p:cNvPicPr>
             <a:picLocks noChangeAspect="1"/>
           </p:cNvPicPr>
@@ -8364,8 +7928,8 @@
         </p:blipFill>
         <p:spPr>
           <a:xfrm>
-            <a:off x="566928" y="1298448"/>
-            <a:ext cx="5212080" cy="3977640"/>
+            <a:off x="594360" y="1325880"/>
+            <a:ext cx="4617720" cy="3383280"/>
           </a:xfrm>
           <a:prstGeom prst="rect">
             <a:avLst/>
@@ -8380,8 +7944,8 @@
         </p:nvSpPr>
         <p:spPr>
           <a:xfrm>
-            <a:off x="658368" y="5440680"/>
-            <a:ext cx="4983480" cy="237744"/>
+            <a:off x="658368" y="4892040"/>
+            <a:ext cx="4572000" cy="219456"/>
           </a:xfrm>
           <a:prstGeom prst="rect">
             <a:avLst/>
@@ -8392,31 +7956,66 @@
           <a:bodyPr wrap="square" lIns="0" tIns="0" rIns="0" bIns="0" rtlCol="0" anchor="ctr"/>
           <a:lstStyle/>
           <a:p>
+            <a:pPr marL="0" indent="0" algn="l">
+              <a:buNone/>
+            </a:pPr>
+            <a:r>
+              <a:rPr lang="en-US" sz="730" dirty="0">
+                <a:solidFill>
+                  <a:srgbClr val="7B8798"/>
+                </a:solidFill>
+              </a:rPr>
+              <a:t>示意图：路侧摄像头 + RSU/通信模块 + 边缘计算盒 + 智能小车 + 行人模型</a:t>
+            </a:r>
+            <a:endParaRPr lang="en-US" sz="730" dirty="0"/>
+          </a:p>
+        </p:txBody>
+      </p:sp>
+      <p:sp>
+        <p:nvSpPr>
+          <p:cNvPr id="7" name="Text 4"/>
+          <p:cNvSpPr/>
+          <p:nvPr/>
+        </p:nvSpPr>
+        <p:spPr>
+          <a:xfrm>
+            <a:off x="5623560" y="1371600"/>
+            <a:ext cx="2011680" cy="274320"/>
+          </a:xfrm>
+          <a:prstGeom prst="rect">
+            <a:avLst/>
+          </a:prstGeom>
+          <a:noFill/>
+        </p:spPr>
+        <p:txBody>
+          <a:bodyPr wrap="square" lIns="0" tIns="0" rIns="0" bIns="0" rtlCol="0" anchor="ctr"/>
+          <a:lstStyle/>
+          <a:p>
             <a:pPr marL="0" indent="0">
               <a:buNone/>
             </a:pPr>
             <a:r>
-              <a:rPr lang="en-US" sz="930" dirty="0">
-                <a:solidFill>
-                  <a:srgbClr val="67758A"/>
-                </a:solidFill>
-              </a:rPr>
-              <a:t>建议把当前大屏从“状态参数看板”升级成“协同感知解释看板”</a:t>
-            </a:r>
-            <a:endParaRPr lang="en-US" sz="930" dirty="0"/>
-          </a:p>
-        </p:txBody>
-      </p:sp>
-      <p:sp>
-        <p:nvSpPr>
-          <p:cNvPr id="7" name="Text 4"/>
-          <p:cNvSpPr/>
-          <p:nvPr/>
-        </p:nvSpPr>
-        <p:spPr>
-          <a:xfrm>
-            <a:off x="6153912" y="1325880"/>
-            <a:ext cx="1828800" cy="274320"/>
+              <a:rPr lang="en-US" sz="1400" b="1" dirty="0">
+                <a:solidFill>
+                  <a:srgbClr val="0B1F3A"/>
+                </a:solidFill>
+              </a:rPr>
+              <a:t>最小可实现清单</a:t>
+            </a:r>
+            <a:endParaRPr lang="en-US" sz="1400" dirty="0"/>
+          </a:p>
+        </p:txBody>
+      </p:sp>
+      <p:sp>
+        <p:nvSpPr>
+          <p:cNvPr id="8" name="Text 5"/>
+          <p:cNvSpPr/>
+          <p:nvPr/>
+        </p:nvSpPr>
+        <p:spPr>
+          <a:xfrm>
+            <a:off x="5623560" y="1810512"/>
+            <a:ext cx="1005840" cy="201168"/>
           </a:xfrm>
           <a:prstGeom prst="rect">
             <a:avLst/>
@@ -8431,319 +8030,436 @@
               <a:buNone/>
             </a:pPr>
             <a:r>
-              <a:rPr lang="en-US" sz="1400" b="1" dirty="0">
+              <a:rPr lang="en-US" sz="1070" b="1" dirty="0">
+                <a:solidFill>
+                  <a:srgbClr val="116DFF"/>
+                </a:solidFill>
+              </a:rPr>
+              <a:t>路侧感知</a:t>
+            </a:r>
+            <a:endParaRPr lang="en-US" sz="1070" dirty="0"/>
+          </a:p>
+        </p:txBody>
+      </p:sp>
+      <p:sp>
+        <p:nvSpPr>
+          <p:cNvPr id="9" name="Text 6"/>
+          <p:cNvSpPr/>
+          <p:nvPr/>
+        </p:nvSpPr>
+        <p:spPr>
+          <a:xfrm>
+            <a:off x="6784848" y="1810512"/>
+            <a:ext cx="4389120" cy="219456"/>
+          </a:xfrm>
+          <a:prstGeom prst="rect">
+            <a:avLst/>
+          </a:prstGeom>
+          <a:noFill/>
+        </p:spPr>
+        <p:txBody>
+          <a:bodyPr wrap="square" lIns="0" tIns="0" rIns="0" bIns="0" rtlCol="0" anchor="ctr">
+            <a:normAutofit/>
+          </a:bodyPr>
+          <a:lstStyle/>
+          <a:p>
+            <a:pPr marL="0" indent="0">
+              <a:buNone/>
+            </a:pPr>
+            <a:r>
+              <a:rPr lang="en-US" sz="1010" dirty="0">
+                <a:solidFill>
+                  <a:srgbClr val="1E293B"/>
+                </a:solidFill>
+              </a:rPr>
+              <a:t>USB/网络摄像头、支架、补光</a:t>
+            </a:r>
+            <a:endParaRPr lang="en-US" sz="1010" dirty="0"/>
+          </a:p>
+        </p:txBody>
+      </p:sp>
+      <p:sp>
+        <p:nvSpPr>
+          <p:cNvPr id="10" name="Text 7"/>
+          <p:cNvSpPr/>
+          <p:nvPr/>
+        </p:nvSpPr>
+        <p:spPr>
+          <a:xfrm>
+            <a:off x="5623560" y="2340864"/>
+            <a:ext cx="1005840" cy="201168"/>
+          </a:xfrm>
+          <a:prstGeom prst="rect">
+            <a:avLst/>
+          </a:prstGeom>
+          <a:noFill/>
+        </p:spPr>
+        <p:txBody>
+          <a:bodyPr wrap="square" lIns="0" tIns="0" rIns="0" bIns="0" rtlCol="0" anchor="ctr"/>
+          <a:lstStyle/>
+          <a:p>
+            <a:pPr marL="0" indent="0">
+              <a:buNone/>
+            </a:pPr>
+            <a:r>
+              <a:rPr lang="en-US" sz="1070" b="1" dirty="0">
+                <a:solidFill>
+                  <a:srgbClr val="116DFF"/>
+                </a:solidFill>
+              </a:rPr>
+              <a:t>边缘AI</a:t>
+            </a:r>
+            <a:endParaRPr lang="en-US" sz="1070" dirty="0"/>
+          </a:p>
+        </p:txBody>
+      </p:sp>
+      <p:sp>
+        <p:nvSpPr>
+          <p:cNvPr id="11" name="Text 8"/>
+          <p:cNvSpPr/>
+          <p:nvPr/>
+        </p:nvSpPr>
+        <p:spPr>
+          <a:xfrm>
+            <a:off x="6784848" y="2340864"/>
+            <a:ext cx="4389120" cy="219456"/>
+          </a:xfrm>
+          <a:prstGeom prst="rect">
+            <a:avLst/>
+          </a:prstGeom>
+          <a:noFill/>
+        </p:spPr>
+        <p:txBody>
+          <a:bodyPr wrap="square" lIns="0" tIns="0" rIns="0" bIns="0" rtlCol="0" anchor="ctr">
+            <a:normAutofit/>
+          </a:bodyPr>
+          <a:lstStyle/>
+          <a:p>
+            <a:pPr marL="0" indent="0">
+              <a:buNone/>
+            </a:pPr>
+            <a:r>
+              <a:rPr lang="en-US" sz="1010" dirty="0">
+                <a:solidFill>
+                  <a:srgbClr val="1E293B"/>
+                </a:solidFill>
+              </a:rPr>
+              <a:t>Jetson / 工控机 / 迷你主机，运行YOLO/跟踪</a:t>
+            </a:r>
+            <a:endParaRPr lang="en-US" sz="1010" dirty="0"/>
+          </a:p>
+        </p:txBody>
+      </p:sp>
+      <p:sp>
+        <p:nvSpPr>
+          <p:cNvPr id="12" name="Text 9"/>
+          <p:cNvSpPr/>
+          <p:nvPr/>
+        </p:nvSpPr>
+        <p:spPr>
+          <a:xfrm>
+            <a:off x="5623560" y="2871216"/>
+            <a:ext cx="1005840" cy="201168"/>
+          </a:xfrm>
+          <a:prstGeom prst="rect">
+            <a:avLst/>
+          </a:prstGeom>
+          <a:noFill/>
+        </p:spPr>
+        <p:txBody>
+          <a:bodyPr wrap="square" lIns="0" tIns="0" rIns="0" bIns="0" rtlCol="0" anchor="ctr"/>
+          <a:lstStyle/>
+          <a:p>
+            <a:pPr marL="0" indent="0">
+              <a:buNone/>
+            </a:pPr>
+            <a:r>
+              <a:rPr lang="en-US" sz="1070" b="1" dirty="0">
+                <a:solidFill>
+                  <a:srgbClr val="116DFF"/>
+                </a:solidFill>
+              </a:rPr>
+              <a:t>通信链路</a:t>
+            </a:r>
+            <a:endParaRPr lang="en-US" sz="1070" dirty="0"/>
+          </a:p>
+        </p:txBody>
+      </p:sp>
+      <p:sp>
+        <p:nvSpPr>
+          <p:cNvPr id="13" name="Text 10"/>
+          <p:cNvSpPr/>
+          <p:nvPr/>
+        </p:nvSpPr>
+        <p:spPr>
+          <a:xfrm>
+            <a:off x="6784848" y="2871216"/>
+            <a:ext cx="4389120" cy="219456"/>
+          </a:xfrm>
+          <a:prstGeom prst="rect">
+            <a:avLst/>
+          </a:prstGeom>
+          <a:noFill/>
+        </p:spPr>
+        <p:txBody>
+          <a:bodyPr wrap="square" lIns="0" tIns="0" rIns="0" bIns="0" rtlCol="0" anchor="ctr">
+            <a:normAutofit/>
+          </a:bodyPr>
+          <a:lstStyle/>
+          <a:p>
+            <a:pPr marL="0" indent="0">
+              <a:buNone/>
+            </a:pPr>
+            <a:r>
+              <a:rPr lang="en-US" sz="1010" dirty="0">
+                <a:solidFill>
+                  <a:srgbClr val="1E293B"/>
+                </a:solidFill>
+              </a:rPr>
+              <a:t>先用Wi‑Fi/MQTT模拟RSU/V2X，后续再换真实RSU</a:t>
+            </a:r>
+            <a:endParaRPr lang="en-US" sz="1010" dirty="0"/>
+          </a:p>
+        </p:txBody>
+      </p:sp>
+      <p:sp>
+        <p:nvSpPr>
+          <p:cNvPr id="14" name="Text 11"/>
+          <p:cNvSpPr/>
+          <p:nvPr/>
+        </p:nvSpPr>
+        <p:spPr>
+          <a:xfrm>
+            <a:off x="5623560" y="3401568"/>
+            <a:ext cx="1005840" cy="201168"/>
+          </a:xfrm>
+          <a:prstGeom prst="rect">
+            <a:avLst/>
+          </a:prstGeom>
+          <a:noFill/>
+        </p:spPr>
+        <p:txBody>
+          <a:bodyPr wrap="square" lIns="0" tIns="0" rIns="0" bIns="0" rtlCol="0" anchor="ctr"/>
+          <a:lstStyle/>
+          <a:p>
+            <a:pPr marL="0" indent="0">
+              <a:buNone/>
+            </a:pPr>
+            <a:r>
+              <a:rPr lang="en-US" sz="1070" b="1" dirty="0">
+                <a:solidFill>
+                  <a:srgbClr val="116DFF"/>
+                </a:solidFill>
+              </a:rPr>
+              <a:t>车辆端</a:t>
+            </a:r>
+            <a:endParaRPr lang="en-US" sz="1070" dirty="0"/>
+          </a:p>
+        </p:txBody>
+      </p:sp>
+      <p:sp>
+        <p:nvSpPr>
+          <p:cNvPr id="15" name="Text 12"/>
+          <p:cNvSpPr/>
+          <p:nvPr/>
+        </p:nvSpPr>
+        <p:spPr>
+          <a:xfrm>
+            <a:off x="6784848" y="3401568"/>
+            <a:ext cx="4389120" cy="219456"/>
+          </a:xfrm>
+          <a:prstGeom prst="rect">
+            <a:avLst/>
+          </a:prstGeom>
+          <a:noFill/>
+        </p:spPr>
+        <p:txBody>
+          <a:bodyPr wrap="square" lIns="0" tIns="0" rIns="0" bIns="0" rtlCol="0" anchor="ctr">
+            <a:normAutofit/>
+          </a:bodyPr>
+          <a:lstStyle/>
+          <a:p>
+            <a:pPr marL="0" indent="0">
+              <a:buNone/>
+            </a:pPr>
+            <a:r>
+              <a:rPr lang="en-US" sz="1010" dirty="0">
+                <a:solidFill>
+                  <a:srgbClr val="1E293B"/>
+                </a:solidFill>
+              </a:rPr>
+              <a:t>ROS智能小车/循迹车，接收预警后减速或停车</a:t>
+            </a:r>
+            <a:endParaRPr lang="en-US" sz="1010" dirty="0"/>
+          </a:p>
+        </p:txBody>
+      </p:sp>
+      <p:sp>
+        <p:nvSpPr>
+          <p:cNvPr id="16" name="Text 13"/>
+          <p:cNvSpPr/>
+          <p:nvPr/>
+        </p:nvSpPr>
+        <p:spPr>
+          <a:xfrm>
+            <a:off x="5623560" y="3931920"/>
+            <a:ext cx="1005840" cy="201168"/>
+          </a:xfrm>
+          <a:prstGeom prst="rect">
+            <a:avLst/>
+          </a:prstGeom>
+          <a:noFill/>
+        </p:spPr>
+        <p:txBody>
+          <a:bodyPr wrap="square" lIns="0" tIns="0" rIns="0" bIns="0" rtlCol="0" anchor="ctr"/>
+          <a:lstStyle/>
+          <a:p>
+            <a:pPr marL="0" indent="0">
+              <a:buNone/>
+            </a:pPr>
+            <a:r>
+              <a:rPr lang="en-US" sz="1070" b="1" dirty="0">
+                <a:solidFill>
+                  <a:srgbClr val="116DFF"/>
+                </a:solidFill>
+              </a:rPr>
+              <a:t>展示端</a:t>
+            </a:r>
+            <a:endParaRPr lang="en-US" sz="1070" dirty="0"/>
+          </a:p>
+        </p:txBody>
+      </p:sp>
+      <p:sp>
+        <p:nvSpPr>
+          <p:cNvPr id="17" name="Text 14"/>
+          <p:cNvSpPr/>
+          <p:nvPr/>
+        </p:nvSpPr>
+        <p:spPr>
+          <a:xfrm>
+            <a:off x="6784848" y="3931920"/>
+            <a:ext cx="4389120" cy="219456"/>
+          </a:xfrm>
+          <a:prstGeom prst="rect">
+            <a:avLst/>
+          </a:prstGeom>
+          <a:noFill/>
+        </p:spPr>
+        <p:txBody>
+          <a:bodyPr wrap="square" lIns="0" tIns="0" rIns="0" bIns="0" rtlCol="0" anchor="ctr">
+            <a:normAutofit/>
+          </a:bodyPr>
+          <a:lstStyle/>
+          <a:p>
+            <a:pPr marL="0" indent="0">
+              <a:buNone/>
+            </a:pPr>
+            <a:r>
+              <a:rPr lang="en-US" sz="1010" dirty="0">
+                <a:solidFill>
+                  <a:srgbClr val="1E293B"/>
+                </a:solidFill>
+              </a:rPr>
+              <a:t>现有V2X大屏叠加虚拟目标、TTC、预警日志</a:t>
+            </a:r>
+            <a:endParaRPr lang="en-US" sz="1010" dirty="0"/>
+          </a:p>
+        </p:txBody>
+      </p:sp>
+      <p:sp>
+        <p:nvSpPr>
+          <p:cNvPr id="18" name="Text 15"/>
+          <p:cNvSpPr/>
+          <p:nvPr/>
+        </p:nvSpPr>
+        <p:spPr>
+          <a:xfrm>
+            <a:off x="5623560" y="4617720"/>
+            <a:ext cx="2103120" cy="274320"/>
+          </a:xfrm>
+          <a:prstGeom prst="rect">
+            <a:avLst/>
+          </a:prstGeom>
+          <a:noFill/>
+        </p:spPr>
+        <p:txBody>
+          <a:bodyPr wrap="square" lIns="0" tIns="0" rIns="0" bIns="0" rtlCol="0" anchor="ctr"/>
+          <a:lstStyle/>
+          <a:p>
+            <a:pPr marL="0" indent="0">
+              <a:buNone/>
+            </a:pPr>
+            <a:r>
+              <a:rPr lang="en-US" sz="1320" b="1" dirty="0">
                 <a:solidFill>
                   <a:srgbClr val="0B1F3A"/>
                 </a:solidFill>
               </a:rPr>
-              <a:t>大屏四个核心区</a:t>
-            </a:r>
-            <a:endParaRPr lang="en-US" sz="1400" dirty="0"/>
-          </a:p>
-        </p:txBody>
-      </p:sp>
-      <p:sp>
-        <p:nvSpPr>
-          <p:cNvPr id="8" name="Text 5"/>
-          <p:cNvSpPr/>
-          <p:nvPr/>
-        </p:nvSpPr>
-        <p:spPr>
-          <a:xfrm>
-            <a:off x="6172200" y="1865376"/>
-            <a:ext cx="4206240" cy="219456"/>
-          </a:xfrm>
-          <a:prstGeom prst="rect">
-            <a:avLst/>
-          </a:prstGeom>
-          <a:noFill/>
-        </p:spPr>
-        <p:txBody>
-          <a:bodyPr wrap="square" lIns="0" tIns="0" rIns="0" bIns="0" rtlCol="0" anchor="ctr"/>
+              <a:t>淘宝/1688建议搜索词</a:t>
+            </a:r>
+            <a:endParaRPr lang="en-US" sz="1320" dirty="0"/>
+          </a:p>
+        </p:txBody>
+      </p:sp>
+      <p:sp>
+        <p:nvSpPr>
+          <p:cNvPr id="19" name="Text 16"/>
+          <p:cNvSpPr/>
+          <p:nvPr/>
+        </p:nvSpPr>
+        <p:spPr>
+          <a:xfrm>
+            <a:off x="5623560" y="5029200"/>
+            <a:ext cx="5349240" cy="694944"/>
+          </a:xfrm>
+          <a:prstGeom prst="rect">
+            <a:avLst/>
+          </a:prstGeom>
+          <a:noFill/>
+        </p:spPr>
+        <p:txBody>
+          <a:bodyPr wrap="square" lIns="254" tIns="254" rIns="254" bIns="254" rtlCol="0" anchor="ctr">
+            <a:normAutofit/>
+          </a:bodyPr>
           <a:lstStyle/>
           <a:p>
             <a:pPr marL="0" indent="0">
               <a:buNone/>
             </a:pPr>
             <a:r>
-              <a:rPr lang="en-US" sz="1200" b="1" dirty="0">
+              <a:rPr lang="en-US" sz="1020" dirty="0">
                 <a:solidFill>
                   <a:srgbClr val="1E293B"/>
                 </a:solidFill>
               </a:rPr>
-              <a:t>① 沙盘实景/摄像头画面</a:t>
-            </a:r>
-            <a:endParaRPr lang="en-US" sz="1200" dirty="0"/>
-          </a:p>
-        </p:txBody>
-      </p:sp>
-      <p:sp>
-        <p:nvSpPr>
-          <p:cNvPr id="9" name="Text 6"/>
-          <p:cNvSpPr/>
-          <p:nvPr/>
-        </p:nvSpPr>
-        <p:spPr>
-          <a:xfrm>
-            <a:off x="6172200" y="2176272"/>
-            <a:ext cx="4389120" cy="219456"/>
-          </a:xfrm>
-          <a:prstGeom prst="rect">
-            <a:avLst/>
-          </a:prstGeom>
-          <a:noFill/>
-        </p:spPr>
-        <p:txBody>
-          <a:bodyPr wrap="square" lIns="0" tIns="0" rIns="0" bIns="0" rtlCol="0" anchor="ctr"/>
-          <a:lstStyle/>
-          <a:p>
-            <a:pPr marL="0" indent="0">
-              <a:buNone/>
-            </a:pPr>
-            <a:r>
-              <a:rPr lang="en-US" sz="930" dirty="0">
-                <a:solidFill>
-                  <a:srgbClr val="67758A"/>
-                </a:solidFill>
-              </a:rPr>
-              <a:t>显示路侧摄像头看到的盲区目标</a:t>
-            </a:r>
-            <a:endParaRPr lang="en-US" sz="930" dirty="0"/>
-          </a:p>
-        </p:txBody>
-      </p:sp>
-      <p:sp>
-        <p:nvSpPr>
-          <p:cNvPr id="10" name="Text 7"/>
-          <p:cNvSpPr/>
-          <p:nvPr/>
-        </p:nvSpPr>
-        <p:spPr>
-          <a:xfrm>
-            <a:off x="6172200" y="2660904"/>
-            <a:ext cx="4206240" cy="219456"/>
-          </a:xfrm>
-          <a:prstGeom prst="rect">
-            <a:avLst/>
-          </a:prstGeom>
-          <a:noFill/>
-        </p:spPr>
-        <p:txBody>
-          <a:bodyPr wrap="square" lIns="0" tIns="0" rIns="0" bIns="0" rtlCol="0" anchor="ctr"/>
-          <a:lstStyle/>
-          <a:p>
-            <a:pPr marL="0" indent="0">
-              <a:buNone/>
-            </a:pPr>
-            <a:r>
-              <a:rPr lang="en-US" sz="1200" b="1" dirty="0">
-                <a:solidFill>
-                  <a:srgbClr val="1E293B"/>
-                </a:solidFill>
-              </a:rPr>
-              <a:t>② 风险目标叠加</a:t>
-            </a:r>
-            <a:endParaRPr lang="en-US" sz="1200" dirty="0"/>
-          </a:p>
-        </p:txBody>
-      </p:sp>
-      <p:sp>
-        <p:nvSpPr>
-          <p:cNvPr id="11" name="Text 8"/>
-          <p:cNvSpPr/>
-          <p:nvPr/>
-        </p:nvSpPr>
-        <p:spPr>
-          <a:xfrm>
-            <a:off x="6172200" y="2971800"/>
-            <a:ext cx="4389120" cy="219456"/>
-          </a:xfrm>
-          <a:prstGeom prst="rect">
-            <a:avLst/>
-          </a:prstGeom>
-          <a:noFill/>
-        </p:spPr>
-        <p:txBody>
-          <a:bodyPr wrap="square" lIns="0" tIns="0" rIns="0" bIns="0" rtlCol="0" anchor="ctr"/>
-          <a:lstStyle/>
-          <a:p>
-            <a:pPr marL="0" indent="0">
-              <a:buNone/>
-            </a:pPr>
-            <a:r>
-              <a:rPr lang="en-US" sz="930" dirty="0">
-                <a:solidFill>
-                  <a:srgbClr val="67758A"/>
-                </a:solidFill>
-              </a:rPr>
-              <a:t>在地图上标出行人、车、冲突区域</a:t>
-            </a:r>
-            <a:endParaRPr lang="en-US" sz="930" dirty="0"/>
-          </a:p>
-        </p:txBody>
-      </p:sp>
-      <p:sp>
-        <p:nvSpPr>
-          <p:cNvPr id="12" name="Text 9"/>
-          <p:cNvSpPr/>
-          <p:nvPr/>
-        </p:nvSpPr>
-        <p:spPr>
-          <a:xfrm>
-            <a:off x="6172200" y="3456432"/>
-            <a:ext cx="4206240" cy="219456"/>
-          </a:xfrm>
-          <a:prstGeom prst="rect">
-            <a:avLst/>
-          </a:prstGeom>
-          <a:noFill/>
-        </p:spPr>
-        <p:txBody>
-          <a:bodyPr wrap="square" lIns="0" tIns="0" rIns="0" bIns="0" rtlCol="0" anchor="ctr"/>
-          <a:lstStyle/>
-          <a:p>
-            <a:pPr marL="0" indent="0">
-              <a:buNone/>
-            </a:pPr>
-            <a:r>
-              <a:rPr lang="en-US" sz="1200" b="1" dirty="0">
-                <a:solidFill>
-                  <a:srgbClr val="1E293B"/>
-                </a:solidFill>
-              </a:rPr>
-              <a:t>③ 风险指标</a:t>
-            </a:r>
-            <a:endParaRPr lang="en-US" sz="1200" dirty="0"/>
-          </a:p>
-        </p:txBody>
-      </p:sp>
-      <p:sp>
-        <p:nvSpPr>
-          <p:cNvPr id="13" name="Text 10"/>
-          <p:cNvSpPr/>
-          <p:nvPr/>
-        </p:nvSpPr>
-        <p:spPr>
-          <a:xfrm>
-            <a:off x="6172200" y="3767328"/>
-            <a:ext cx="4389120" cy="219456"/>
-          </a:xfrm>
-          <a:prstGeom prst="rect">
-            <a:avLst/>
-          </a:prstGeom>
-          <a:noFill/>
-        </p:spPr>
-        <p:txBody>
-          <a:bodyPr wrap="square" lIns="0" tIns="0" rIns="0" bIns="0" rtlCol="0" anchor="ctr"/>
-          <a:lstStyle/>
-          <a:p>
-            <a:pPr marL="0" indent="0">
-              <a:buNone/>
-            </a:pPr>
-            <a:r>
-              <a:rPr lang="en-US" sz="930" dirty="0">
-                <a:solidFill>
-                  <a:srgbClr val="67758A"/>
-                </a:solidFill>
-              </a:rPr>
-              <a:t>TTC、距离、速度、风险等级</a:t>
-            </a:r>
-            <a:endParaRPr lang="en-US" sz="930" dirty="0"/>
-          </a:p>
-        </p:txBody>
-      </p:sp>
-      <p:sp>
-        <p:nvSpPr>
-          <p:cNvPr id="14" name="Text 11"/>
-          <p:cNvSpPr/>
-          <p:nvPr/>
-        </p:nvSpPr>
-        <p:spPr>
-          <a:xfrm>
-            <a:off x="6172200" y="4251960"/>
-            <a:ext cx="4206240" cy="219456"/>
-          </a:xfrm>
-          <a:prstGeom prst="rect">
-            <a:avLst/>
-          </a:prstGeom>
-          <a:noFill/>
-        </p:spPr>
-        <p:txBody>
-          <a:bodyPr wrap="square" lIns="0" tIns="0" rIns="0" bIns="0" rtlCol="0" anchor="ctr"/>
-          <a:lstStyle/>
-          <a:p>
-            <a:pPr marL="0" indent="0">
-              <a:buNone/>
-            </a:pPr>
-            <a:r>
-              <a:rPr lang="en-US" sz="1200" b="1" dirty="0">
-                <a:solidFill>
-                  <a:srgbClr val="1E293B"/>
-                </a:solidFill>
-              </a:rPr>
-              <a:t>④ 车辆响应</a:t>
-            </a:r>
-            <a:endParaRPr lang="en-US" sz="1200" dirty="0"/>
-          </a:p>
-        </p:txBody>
-      </p:sp>
-      <p:sp>
-        <p:nvSpPr>
-          <p:cNvPr id="15" name="Text 12"/>
-          <p:cNvSpPr/>
-          <p:nvPr/>
-        </p:nvSpPr>
-        <p:spPr>
-          <a:xfrm>
-            <a:off x="6172200" y="4562856"/>
-            <a:ext cx="4389120" cy="219456"/>
-          </a:xfrm>
-          <a:prstGeom prst="rect">
-            <a:avLst/>
-          </a:prstGeom>
-          <a:noFill/>
-        </p:spPr>
-        <p:txBody>
-          <a:bodyPr wrap="square" lIns="0" tIns="0" rIns="0" bIns="0" rtlCol="0" anchor="ctr"/>
-          <a:lstStyle/>
-          <a:p>
-            <a:pPr marL="0" indent="0">
-              <a:buNone/>
-            </a:pPr>
-            <a:r>
-              <a:rPr lang="en-US" sz="930" dirty="0">
-                <a:solidFill>
-                  <a:srgbClr val="67758A"/>
-                </a:solidFill>
-              </a:rPr>
-              <a:t>已预警 / 已减速 / 已停车 / 已解除风险</a:t>
-            </a:r>
-            <a:endParaRPr lang="en-US" sz="930" dirty="0"/>
-          </a:p>
-        </p:txBody>
-      </p:sp>
-      <p:sp>
-        <p:nvSpPr>
-          <p:cNvPr id="16" name="Shape 13"/>
-          <p:cNvSpPr/>
-          <p:nvPr/>
-        </p:nvSpPr>
-        <p:spPr>
-          <a:xfrm>
-            <a:off x="6144768" y="5321808"/>
-            <a:ext cx="4617720" cy="585216"/>
+              <a:t>车路协同 RSU、C-V2X 路侧单元、道路监控摄像头、Jetson 边缘计算盒、ROS 智能小车、沙盘交通灯模块、行人模型、WiFi/MQTT 控制板</a:t>
+            </a:r>
+            <a:endParaRPr lang="en-US" sz="1020" dirty="0"/>
+          </a:p>
+        </p:txBody>
+      </p:sp>
+      <p:sp>
+        <p:nvSpPr>
+          <p:cNvPr id="20" name="Shape 17"/>
+          <p:cNvSpPr/>
+          <p:nvPr/>
+        </p:nvSpPr>
+        <p:spPr>
+          <a:xfrm>
+            <a:off x="5623560" y="5879592"/>
+            <a:ext cx="5349240" cy="310896"/>
           </a:xfrm>
           <a:prstGeom prst="roundRect">
             <a:avLst>
-              <a:gd name="adj" fmla="val 12500"/>
+              <a:gd name="adj" fmla="val 14706"/>
             </a:avLst>
           </a:prstGeom>
           <a:solidFill>
-            <a:srgbClr val="EAF8FF"/>
+            <a:srgbClr val="F3F7FF"/>
           </a:solidFill>
           <a:ln w="12700">
             <a:solidFill>
-              <a:srgbClr val="CDEEFF"/>
+              <a:srgbClr val="DDEBFF"/>
             </a:solidFill>
             <a:prstDash val="solid"/>
           </a:ln>
@@ -8751,49 +8467,14 @@
       </p:sp>
       <p:sp>
         <p:nvSpPr>
-          <p:cNvPr id="17" name="Text 14"/>
-          <p:cNvSpPr/>
-          <p:nvPr/>
-        </p:nvSpPr>
-        <p:spPr>
-          <a:xfrm>
-            <a:off x="6327648" y="5458968"/>
-            <a:ext cx="1143000" cy="164592"/>
-          </a:xfrm>
-          <a:prstGeom prst="rect">
-            <a:avLst/>
-          </a:prstGeom>
-          <a:noFill/>
-        </p:spPr>
-        <p:txBody>
-          <a:bodyPr wrap="square" lIns="0" tIns="0" rIns="0" bIns="0" rtlCol="0" anchor="ctr"/>
-          <a:lstStyle/>
-          <a:p>
-            <a:pPr marL="0" indent="0">
-              <a:buNone/>
-            </a:pPr>
-            <a:r>
-              <a:rPr lang="en-US" sz="870" b="1" dirty="0">
-                <a:solidFill>
-                  <a:srgbClr val="116DFF"/>
-                </a:solidFill>
-              </a:rPr>
-              <a:t>建议界面提示语</a:t>
-            </a:r>
-            <a:endParaRPr lang="en-US" sz="870" dirty="0"/>
-          </a:p>
-        </p:txBody>
-      </p:sp>
-      <p:sp>
-        <p:nvSpPr>
-          <p:cNvPr id="18" name="Text 15"/>
-          <p:cNvSpPr/>
-          <p:nvPr/>
-        </p:nvSpPr>
-        <p:spPr>
-          <a:xfrm>
-            <a:off x="7726680" y="5440680"/>
-            <a:ext cx="2834640" cy="228600"/>
+          <p:cNvPr id="21" name="Text 18"/>
+          <p:cNvSpPr/>
+          <p:nvPr/>
+        </p:nvSpPr>
+        <p:spPr>
+          <a:xfrm>
+            <a:off x="5779008" y="5971032"/>
+            <a:ext cx="5029200" cy="109728"/>
           </a:xfrm>
           <a:prstGeom prst="rect">
             <a:avLst/>
@@ -8810,20 +8491,20 @@
               <a:buNone/>
             </a:pPr>
             <a:r>
-              <a:rPr lang="en-US" sz="920" b="1" dirty="0">
+              <a:rPr lang="en-US" sz="880" b="1" dirty="0">
                 <a:solidFill>
                   <a:srgbClr val="0B1F3A"/>
                 </a:solidFill>
               </a:rPr>
-              <a:t>右前方建筑盲区存在横穿行人，TTC=2.3s，已向车辆发送高风险预警。</a:t>
-            </a:r>
-            <a:endParaRPr lang="en-US" sz="920" dirty="0"/>
-          </a:p>
-        </p:txBody>
-      </p:sp>
-      <p:sp>
-        <p:nvSpPr>
-          <p:cNvPr id="19" name="Text 16"/>
+              <a:t>落地策略：先用 Wi‑Fi 模拟 V2X 完成演示闭环；验收后再替换真实 RSU/C‑V2X 设备。</a:t>
+            </a:r>
+            <a:endParaRPr lang="en-US" sz="880" dirty="0"/>
+          </a:p>
+        </p:txBody>
+      </p:sp>
+      <p:sp>
+        <p:nvSpPr>
+          <p:cNvPr id="22" name="Text 19"/>
           <p:cNvSpPr/>
           <p:nvPr/>
         </p:nvSpPr>
@@ -8858,7 +8539,7 @@
       </p:sp>
       <p:sp>
         <p:nvSpPr>
-          <p:cNvPr id="20" name="Text 17"/>
+          <p:cNvPr id="23" name="Text 20"/>
           <p:cNvSpPr/>
           <p:nvPr/>
         </p:nvSpPr>
@@ -8908,78 +8589,10 @@
         <p:cNvGrpSpPr/>
         <p:nvPr/>
       </p:nvGrpSpPr>
-      <p:grpSpPr>
-        <a:xfrm>
-          <a:off x="0" y="0"/>
-          <a:ext cx="0" cy="0"/>
-          <a:chOff x="0" y="0"/>
-          <a:chExt cx="0" cy="0"/>
-        </a:xfrm>
-      </p:grpSpPr>
-      <p:sp>
-        <p:nvSpPr>
-          <p:cNvPr id="2" name="Text 0"/>
-          <p:cNvSpPr/>
-          <p:nvPr/>
-        </p:nvSpPr>
-        <p:spPr>
-          <a:xfrm>
-            <a:off x="530352" y="384048"/>
-            <a:ext cx="7223760" cy="384048"/>
-          </a:xfrm>
-          <a:prstGeom prst="rect">
-            <a:avLst/>
-          </a:prstGeom>
-          <a:noFill/>
-        </p:spPr>
-        <p:txBody>
-          <a:bodyPr wrap="square" lIns="0" tIns="0" rIns="0" bIns="0" rtlCol="0" anchor="ctr"/>
-          <a:lstStyle/>
-          <a:p>
-            <a:pPr marL="0" indent="0">
-              <a:buNone/>
-            </a:pPr>
-            <a:r>
-              <a:rPr lang="en-US" sz="2300" b="1" dirty="0">
-                <a:solidFill>
-                  <a:srgbClr val="0B1F3A"/>
-                </a:solidFill>
-                <a:latin typeface="微软雅黑" panose="020B0503020204020204" charset="-122"/>
-                <a:ea typeface="微软雅黑" panose="020B0503020204020204" charset="-122"/>
-                <a:cs typeface="微软雅黑" panose="020B0503020204020204" pitchFamily="34" charset="-120"/>
-              </a:rPr>
-              <a:t>05  实现与采购：可用低成本设备做出闭环Demo</a:t>
-            </a:r>
-            <a:endParaRPr lang="en-US" sz="2300" dirty="0"/>
-          </a:p>
-        </p:txBody>
-      </p:sp>
-      <p:sp>
-        <p:nvSpPr>
-          <p:cNvPr id="4" name="Shape 2"/>
-          <p:cNvSpPr/>
-          <p:nvPr/>
-        </p:nvSpPr>
-        <p:spPr>
-          <a:xfrm>
-            <a:off x="530352" y="1106424"/>
-            <a:ext cx="10927080" cy="0"/>
-          </a:xfrm>
-          <a:prstGeom prst="line">
-            <a:avLst/>
-          </a:prstGeom>
-          <a:noFill/>
-          <a:ln w="10160">
-            <a:solidFill>
-              <a:srgbClr val="D9E3F0"/>
-            </a:solidFill>
-            <a:prstDash val="solid"/>
-          </a:ln>
-        </p:spPr>
-      </p:sp>
+      <p:grpSpPr/>
       <p:pic>
         <p:nvPicPr>
-          <p:cNvPr id="5" name="Image 0" descr="/mnt/data/kit_crop.jpg"/>
+          <p:cNvPr id="2" name="图片 1"/>
           <p:cNvPicPr>
             <a:picLocks noChangeAspect="1"/>
           </p:cNvPicPr>
@@ -8993,8 +8606,8 @@
         </p:blipFill>
         <p:spPr>
           <a:xfrm>
-            <a:off x="594360" y="1325880"/>
-            <a:ext cx="4617720" cy="3383280"/>
+            <a:off x="842645" y="1245870"/>
+            <a:ext cx="3545205" cy="5311140"/>
           </a:xfrm>
           <a:prstGeom prst="rect">
             <a:avLst/>
@@ -9003,14 +8616,14 @@
       </p:pic>
       <p:sp>
         <p:nvSpPr>
-          <p:cNvPr id="6" name="Text 3"/>
-          <p:cNvSpPr/>
-          <p:nvPr/>
-        </p:nvSpPr>
-        <p:spPr>
-          <a:xfrm>
-            <a:off x="658368" y="4892040"/>
-            <a:ext cx="4572000" cy="219456"/>
+          <p:cNvPr id="3" name="Text 0"/>
+          <p:cNvSpPr/>
+          <p:nvPr/>
+        </p:nvSpPr>
+        <p:spPr>
+          <a:xfrm>
+            <a:off x="598297" y="461518"/>
+            <a:ext cx="7223760" cy="384048"/>
           </a:xfrm>
           <a:prstGeom prst="rect">
             <a:avLst/>
@@ -9021,619 +8634,21 @@
           <a:bodyPr wrap="square" lIns="0" tIns="0" rIns="0" bIns="0" rtlCol="0" anchor="ctr"/>
           <a:lstStyle/>
           <a:p>
-            <a:pPr marL="0" indent="0" algn="l">
-              <a:buNone/>
-            </a:pPr>
-            <a:r>
-              <a:rPr lang="en-US" sz="730" dirty="0">
-                <a:solidFill>
-                  <a:srgbClr val="7B8798"/>
-                </a:solidFill>
-              </a:rPr>
-              <a:t>示意图：路侧摄像头 + RSU/通信模块 + 边缘计算盒 + 智能小车 + 行人模型</a:t>
-            </a:r>
-            <a:endParaRPr lang="en-US" sz="730" dirty="0"/>
-          </a:p>
-        </p:txBody>
-      </p:sp>
-      <p:sp>
-        <p:nvSpPr>
-          <p:cNvPr id="7" name="Text 4"/>
-          <p:cNvSpPr/>
-          <p:nvPr/>
-        </p:nvSpPr>
-        <p:spPr>
-          <a:xfrm>
-            <a:off x="5623560" y="1371600"/>
-            <a:ext cx="2011680" cy="274320"/>
-          </a:xfrm>
-          <a:prstGeom prst="rect">
-            <a:avLst/>
-          </a:prstGeom>
-          <a:noFill/>
-        </p:spPr>
-        <p:txBody>
-          <a:bodyPr wrap="square" lIns="0" tIns="0" rIns="0" bIns="0" rtlCol="0" anchor="ctr"/>
-          <a:lstStyle/>
-          <a:p>
             <a:pPr marL="0" indent="0">
               <a:buNone/>
             </a:pPr>
             <a:r>
-              <a:rPr lang="en-US" sz="1400" b="1" dirty="0">
+              <a:rPr lang="en-US" sz="2300" b="1" dirty="0">
                 <a:solidFill>
                   <a:srgbClr val="0B1F3A"/>
                 </a:solidFill>
-              </a:rPr>
-              <a:t>最小可实现清单</a:t>
-            </a:r>
-            <a:endParaRPr lang="en-US" sz="1400" dirty="0"/>
-          </a:p>
-        </p:txBody>
-      </p:sp>
-      <p:sp>
-        <p:nvSpPr>
-          <p:cNvPr id="8" name="Text 5"/>
-          <p:cNvSpPr/>
-          <p:nvPr/>
-        </p:nvSpPr>
-        <p:spPr>
-          <a:xfrm>
-            <a:off x="5623560" y="1810512"/>
-            <a:ext cx="1005840" cy="201168"/>
-          </a:xfrm>
-          <a:prstGeom prst="rect">
-            <a:avLst/>
-          </a:prstGeom>
-          <a:noFill/>
-        </p:spPr>
-        <p:txBody>
-          <a:bodyPr wrap="square" lIns="0" tIns="0" rIns="0" bIns="0" rtlCol="0" anchor="ctr"/>
-          <a:lstStyle/>
-          <a:p>
-            <a:pPr marL="0" indent="0">
-              <a:buNone/>
-            </a:pPr>
-            <a:r>
-              <a:rPr lang="en-US" sz="1070" b="1" dirty="0">
-                <a:solidFill>
-                  <a:srgbClr val="116DFF"/>
-                </a:solidFill>
-              </a:rPr>
-              <a:t>路侧感知</a:t>
-            </a:r>
-            <a:endParaRPr lang="en-US" sz="1070" dirty="0"/>
-          </a:p>
-        </p:txBody>
-      </p:sp>
-      <p:sp>
-        <p:nvSpPr>
-          <p:cNvPr id="9" name="Text 6"/>
-          <p:cNvSpPr/>
-          <p:nvPr/>
-        </p:nvSpPr>
-        <p:spPr>
-          <a:xfrm>
-            <a:off x="6784848" y="1810512"/>
-            <a:ext cx="4389120" cy="219456"/>
-          </a:xfrm>
-          <a:prstGeom prst="rect">
-            <a:avLst/>
-          </a:prstGeom>
-          <a:noFill/>
-        </p:spPr>
-        <p:txBody>
-          <a:bodyPr wrap="square" lIns="0" tIns="0" rIns="0" bIns="0" rtlCol="0" anchor="ctr">
-            <a:normAutofit/>
-          </a:bodyPr>
-          <a:lstStyle/>
-          <a:p>
-            <a:pPr marL="0" indent="0">
-              <a:buNone/>
-            </a:pPr>
-            <a:r>
-              <a:rPr lang="en-US" sz="1010" dirty="0">
-                <a:solidFill>
-                  <a:srgbClr val="1E293B"/>
-                </a:solidFill>
-              </a:rPr>
-              <a:t>USB/网络摄像头、支架、补光</a:t>
-            </a:r>
-            <a:endParaRPr lang="en-US" sz="1010" dirty="0"/>
-          </a:p>
-        </p:txBody>
-      </p:sp>
-      <p:sp>
-        <p:nvSpPr>
-          <p:cNvPr id="10" name="Text 7"/>
-          <p:cNvSpPr/>
-          <p:nvPr/>
-        </p:nvSpPr>
-        <p:spPr>
-          <a:xfrm>
-            <a:off x="5623560" y="2340864"/>
-            <a:ext cx="1005840" cy="201168"/>
-          </a:xfrm>
-          <a:prstGeom prst="rect">
-            <a:avLst/>
-          </a:prstGeom>
-          <a:noFill/>
-        </p:spPr>
-        <p:txBody>
-          <a:bodyPr wrap="square" lIns="0" tIns="0" rIns="0" bIns="0" rtlCol="0" anchor="ctr"/>
-          <a:lstStyle/>
-          <a:p>
-            <a:pPr marL="0" indent="0">
-              <a:buNone/>
-            </a:pPr>
-            <a:r>
-              <a:rPr lang="en-US" sz="1070" b="1" dirty="0">
-                <a:solidFill>
-                  <a:srgbClr val="116DFF"/>
-                </a:solidFill>
-              </a:rPr>
-              <a:t>边缘AI</a:t>
-            </a:r>
-            <a:endParaRPr lang="en-US" sz="1070" dirty="0"/>
-          </a:p>
-        </p:txBody>
-      </p:sp>
-      <p:sp>
-        <p:nvSpPr>
-          <p:cNvPr id="11" name="Text 8"/>
-          <p:cNvSpPr/>
-          <p:nvPr/>
-        </p:nvSpPr>
-        <p:spPr>
-          <a:xfrm>
-            <a:off x="6784848" y="2340864"/>
-            <a:ext cx="4389120" cy="219456"/>
-          </a:xfrm>
-          <a:prstGeom prst="rect">
-            <a:avLst/>
-          </a:prstGeom>
-          <a:noFill/>
-        </p:spPr>
-        <p:txBody>
-          <a:bodyPr wrap="square" lIns="0" tIns="0" rIns="0" bIns="0" rtlCol="0" anchor="ctr">
-            <a:normAutofit/>
-          </a:bodyPr>
-          <a:lstStyle/>
-          <a:p>
-            <a:pPr marL="0" indent="0">
-              <a:buNone/>
-            </a:pPr>
-            <a:r>
-              <a:rPr lang="en-US" sz="1010" dirty="0">
-                <a:solidFill>
-                  <a:srgbClr val="1E293B"/>
-                </a:solidFill>
-              </a:rPr>
-              <a:t>Jetson / 工控机 / 迷你主机，运行YOLO/跟踪</a:t>
-            </a:r>
-            <a:endParaRPr lang="en-US" sz="1010" dirty="0"/>
-          </a:p>
-        </p:txBody>
-      </p:sp>
-      <p:sp>
-        <p:nvSpPr>
-          <p:cNvPr id="12" name="Text 9"/>
-          <p:cNvSpPr/>
-          <p:nvPr/>
-        </p:nvSpPr>
-        <p:spPr>
-          <a:xfrm>
-            <a:off x="5623560" y="2871216"/>
-            <a:ext cx="1005840" cy="201168"/>
-          </a:xfrm>
-          <a:prstGeom prst="rect">
-            <a:avLst/>
-          </a:prstGeom>
-          <a:noFill/>
-        </p:spPr>
-        <p:txBody>
-          <a:bodyPr wrap="square" lIns="0" tIns="0" rIns="0" bIns="0" rtlCol="0" anchor="ctr"/>
-          <a:lstStyle/>
-          <a:p>
-            <a:pPr marL="0" indent="0">
-              <a:buNone/>
-            </a:pPr>
-            <a:r>
-              <a:rPr lang="en-US" sz="1070" b="1" dirty="0">
-                <a:solidFill>
-                  <a:srgbClr val="116DFF"/>
-                </a:solidFill>
-              </a:rPr>
-              <a:t>通信链路</a:t>
-            </a:r>
-            <a:endParaRPr lang="en-US" sz="1070" dirty="0"/>
-          </a:p>
-        </p:txBody>
-      </p:sp>
-      <p:sp>
-        <p:nvSpPr>
-          <p:cNvPr id="13" name="Text 10"/>
-          <p:cNvSpPr/>
-          <p:nvPr/>
-        </p:nvSpPr>
-        <p:spPr>
-          <a:xfrm>
-            <a:off x="6784848" y="2871216"/>
-            <a:ext cx="4389120" cy="219456"/>
-          </a:xfrm>
-          <a:prstGeom prst="rect">
-            <a:avLst/>
-          </a:prstGeom>
-          <a:noFill/>
-        </p:spPr>
-        <p:txBody>
-          <a:bodyPr wrap="square" lIns="0" tIns="0" rIns="0" bIns="0" rtlCol="0" anchor="ctr">
-            <a:normAutofit/>
-          </a:bodyPr>
-          <a:lstStyle/>
-          <a:p>
-            <a:pPr marL="0" indent="0">
-              <a:buNone/>
-            </a:pPr>
-            <a:r>
-              <a:rPr lang="en-US" sz="1010" dirty="0">
-                <a:solidFill>
-                  <a:srgbClr val="1E293B"/>
-                </a:solidFill>
-              </a:rPr>
-              <a:t>先用Wi‑Fi/MQTT模拟RSU/V2X，后续再换真实RSU</a:t>
-            </a:r>
-            <a:endParaRPr lang="en-US" sz="1010" dirty="0"/>
-          </a:p>
-        </p:txBody>
-      </p:sp>
-      <p:sp>
-        <p:nvSpPr>
-          <p:cNvPr id="14" name="Text 11"/>
-          <p:cNvSpPr/>
-          <p:nvPr/>
-        </p:nvSpPr>
-        <p:spPr>
-          <a:xfrm>
-            <a:off x="5623560" y="3401568"/>
-            <a:ext cx="1005840" cy="201168"/>
-          </a:xfrm>
-          <a:prstGeom prst="rect">
-            <a:avLst/>
-          </a:prstGeom>
-          <a:noFill/>
-        </p:spPr>
-        <p:txBody>
-          <a:bodyPr wrap="square" lIns="0" tIns="0" rIns="0" bIns="0" rtlCol="0" anchor="ctr"/>
-          <a:lstStyle/>
-          <a:p>
-            <a:pPr marL="0" indent="0">
-              <a:buNone/>
-            </a:pPr>
-            <a:r>
-              <a:rPr lang="en-US" sz="1070" b="1" dirty="0">
-                <a:solidFill>
-                  <a:srgbClr val="116DFF"/>
-                </a:solidFill>
-              </a:rPr>
-              <a:t>车辆端</a:t>
-            </a:r>
-            <a:endParaRPr lang="en-US" sz="1070" dirty="0"/>
-          </a:p>
-        </p:txBody>
-      </p:sp>
-      <p:sp>
-        <p:nvSpPr>
-          <p:cNvPr id="15" name="Text 12"/>
-          <p:cNvSpPr/>
-          <p:nvPr/>
-        </p:nvSpPr>
-        <p:spPr>
-          <a:xfrm>
-            <a:off x="6784848" y="3401568"/>
-            <a:ext cx="4389120" cy="219456"/>
-          </a:xfrm>
-          <a:prstGeom prst="rect">
-            <a:avLst/>
-          </a:prstGeom>
-          <a:noFill/>
-        </p:spPr>
-        <p:txBody>
-          <a:bodyPr wrap="square" lIns="0" tIns="0" rIns="0" bIns="0" rtlCol="0" anchor="ctr">
-            <a:normAutofit/>
-          </a:bodyPr>
-          <a:lstStyle/>
-          <a:p>
-            <a:pPr marL="0" indent="0">
-              <a:buNone/>
-            </a:pPr>
-            <a:r>
-              <a:rPr lang="en-US" sz="1010" dirty="0">
-                <a:solidFill>
-                  <a:srgbClr val="1E293B"/>
-                </a:solidFill>
-              </a:rPr>
-              <a:t>ROS智能小车/循迹车，接收预警后减速或停车</a:t>
-            </a:r>
-            <a:endParaRPr lang="en-US" sz="1010" dirty="0"/>
-          </a:p>
-        </p:txBody>
-      </p:sp>
-      <p:sp>
-        <p:nvSpPr>
-          <p:cNvPr id="16" name="Text 13"/>
-          <p:cNvSpPr/>
-          <p:nvPr/>
-        </p:nvSpPr>
-        <p:spPr>
-          <a:xfrm>
-            <a:off x="5623560" y="3931920"/>
-            <a:ext cx="1005840" cy="201168"/>
-          </a:xfrm>
-          <a:prstGeom prst="rect">
-            <a:avLst/>
-          </a:prstGeom>
-          <a:noFill/>
-        </p:spPr>
-        <p:txBody>
-          <a:bodyPr wrap="square" lIns="0" tIns="0" rIns="0" bIns="0" rtlCol="0" anchor="ctr"/>
-          <a:lstStyle/>
-          <a:p>
-            <a:pPr marL="0" indent="0">
-              <a:buNone/>
-            </a:pPr>
-            <a:r>
-              <a:rPr lang="en-US" sz="1070" b="1" dirty="0">
-                <a:solidFill>
-                  <a:srgbClr val="116DFF"/>
-                </a:solidFill>
-              </a:rPr>
-              <a:t>展示端</a:t>
-            </a:r>
-            <a:endParaRPr lang="en-US" sz="1070" dirty="0"/>
-          </a:p>
-        </p:txBody>
-      </p:sp>
-      <p:sp>
-        <p:nvSpPr>
-          <p:cNvPr id="17" name="Text 14"/>
-          <p:cNvSpPr/>
-          <p:nvPr/>
-        </p:nvSpPr>
-        <p:spPr>
-          <a:xfrm>
-            <a:off x="6784848" y="3931920"/>
-            <a:ext cx="4389120" cy="219456"/>
-          </a:xfrm>
-          <a:prstGeom prst="rect">
-            <a:avLst/>
-          </a:prstGeom>
-          <a:noFill/>
-        </p:spPr>
-        <p:txBody>
-          <a:bodyPr wrap="square" lIns="0" tIns="0" rIns="0" bIns="0" rtlCol="0" anchor="ctr">
-            <a:normAutofit/>
-          </a:bodyPr>
-          <a:lstStyle/>
-          <a:p>
-            <a:pPr marL="0" indent="0">
-              <a:buNone/>
-            </a:pPr>
-            <a:r>
-              <a:rPr lang="en-US" sz="1010" dirty="0">
-                <a:solidFill>
-                  <a:srgbClr val="1E293B"/>
-                </a:solidFill>
-              </a:rPr>
-              <a:t>现有V2X大屏叠加虚拟目标、TTC、预警日志</a:t>
-            </a:r>
-            <a:endParaRPr lang="en-US" sz="1010" dirty="0"/>
-          </a:p>
-        </p:txBody>
-      </p:sp>
-      <p:sp>
-        <p:nvSpPr>
-          <p:cNvPr id="18" name="Text 15"/>
-          <p:cNvSpPr/>
-          <p:nvPr/>
-        </p:nvSpPr>
-        <p:spPr>
-          <a:xfrm>
-            <a:off x="5623560" y="4617720"/>
-            <a:ext cx="2103120" cy="274320"/>
-          </a:xfrm>
-          <a:prstGeom prst="rect">
-            <a:avLst/>
-          </a:prstGeom>
-          <a:noFill/>
-        </p:spPr>
-        <p:txBody>
-          <a:bodyPr wrap="square" lIns="0" tIns="0" rIns="0" bIns="0" rtlCol="0" anchor="ctr"/>
-          <a:lstStyle/>
-          <a:p>
-            <a:pPr marL="0" indent="0">
-              <a:buNone/>
-            </a:pPr>
-            <a:r>
-              <a:rPr lang="en-US" sz="1320" b="1" dirty="0">
-                <a:solidFill>
-                  <a:srgbClr val="0B1F3A"/>
-                </a:solidFill>
-              </a:rPr>
-              <a:t>淘宝/1688建议搜索词</a:t>
-            </a:r>
-            <a:endParaRPr lang="en-US" sz="1320" dirty="0"/>
-          </a:p>
-        </p:txBody>
-      </p:sp>
-      <p:sp>
-        <p:nvSpPr>
-          <p:cNvPr id="19" name="Text 16"/>
-          <p:cNvSpPr/>
-          <p:nvPr/>
-        </p:nvSpPr>
-        <p:spPr>
-          <a:xfrm>
-            <a:off x="5623560" y="5029200"/>
-            <a:ext cx="5349240" cy="694944"/>
-          </a:xfrm>
-          <a:prstGeom prst="rect">
-            <a:avLst/>
-          </a:prstGeom>
-          <a:noFill/>
-        </p:spPr>
-        <p:txBody>
-          <a:bodyPr wrap="square" lIns="254" tIns="254" rIns="254" bIns="254" rtlCol="0" anchor="ctr">
-            <a:normAutofit/>
-          </a:bodyPr>
-          <a:lstStyle/>
-          <a:p>
-            <a:pPr marL="0" indent="0">
-              <a:buNone/>
-            </a:pPr>
-            <a:r>
-              <a:rPr lang="en-US" sz="1020" dirty="0">
-                <a:solidFill>
-                  <a:srgbClr val="1E293B"/>
-                </a:solidFill>
-              </a:rPr>
-              <a:t>车路协同 RSU、C-V2X 路侧单元、道路监控摄像头、Jetson 边缘计算盒、ROS 智能小车、沙盘交通灯模块、行人模型、WiFi/MQTT 控制板</a:t>
-            </a:r>
-            <a:endParaRPr lang="en-US" sz="1020" dirty="0"/>
-          </a:p>
-        </p:txBody>
-      </p:sp>
-      <p:sp>
-        <p:nvSpPr>
-          <p:cNvPr id="20" name="Shape 17"/>
-          <p:cNvSpPr/>
-          <p:nvPr/>
-        </p:nvSpPr>
-        <p:spPr>
-          <a:xfrm>
-            <a:off x="5623560" y="5879592"/>
-            <a:ext cx="5349240" cy="310896"/>
-          </a:xfrm>
-          <a:prstGeom prst="roundRect">
-            <a:avLst>
-              <a:gd name="adj" fmla="val 14706"/>
-            </a:avLst>
-          </a:prstGeom>
-          <a:solidFill>
-            <a:srgbClr val="F3F7FF"/>
-          </a:solidFill>
-          <a:ln w="12700">
-            <a:solidFill>
-              <a:srgbClr val="DDEBFF"/>
-            </a:solidFill>
-            <a:prstDash val="solid"/>
-          </a:ln>
-        </p:spPr>
-      </p:sp>
-      <p:sp>
-        <p:nvSpPr>
-          <p:cNvPr id="21" name="Text 18"/>
-          <p:cNvSpPr/>
-          <p:nvPr/>
-        </p:nvSpPr>
-        <p:spPr>
-          <a:xfrm>
-            <a:off x="5779008" y="5971032"/>
-            <a:ext cx="5029200" cy="109728"/>
-          </a:xfrm>
-          <a:prstGeom prst="rect">
-            <a:avLst/>
-          </a:prstGeom>
-          <a:noFill/>
-        </p:spPr>
-        <p:txBody>
-          <a:bodyPr wrap="square" lIns="0" tIns="0" rIns="0" bIns="0" rtlCol="0" anchor="ctr">
-            <a:normAutofit/>
-          </a:bodyPr>
-          <a:lstStyle/>
-          <a:p>
-            <a:pPr marL="0" indent="0">
-              <a:buNone/>
-            </a:pPr>
-            <a:r>
-              <a:rPr lang="en-US" sz="880" b="1" dirty="0">
-                <a:solidFill>
-                  <a:srgbClr val="0B1F3A"/>
-                </a:solidFill>
-              </a:rPr>
-              <a:t>落地策略：先用 Wi‑Fi 模拟 V2X 完成演示闭环；验收后再替换真实 RSU/C‑V2X 设备。</a:t>
-            </a:r>
-            <a:endParaRPr lang="en-US" sz="880" dirty="0"/>
-          </a:p>
-        </p:txBody>
-      </p:sp>
-      <p:sp>
-        <p:nvSpPr>
-          <p:cNvPr id="22" name="Text 19"/>
-          <p:cNvSpPr/>
-          <p:nvPr/>
-        </p:nvSpPr>
-        <p:spPr>
-          <a:xfrm>
-            <a:off x="566928" y="6519672"/>
-            <a:ext cx="7132320" cy="164592"/>
-          </a:xfrm>
-          <a:prstGeom prst="rect">
-            <a:avLst/>
-          </a:prstGeom>
-          <a:noFill/>
-        </p:spPr>
-        <p:txBody>
-          <a:bodyPr wrap="square" lIns="0" tIns="0" rIns="0" bIns="0" rtlCol="0" anchor="ctr"/>
-          <a:lstStyle/>
-          <a:p>
-            <a:pPr marL="0" indent="0">
-              <a:buNone/>
-            </a:pPr>
-            <a:r>
-              <a:rPr lang="en-US" sz="650" dirty="0">
-                <a:solidFill>
-                  <a:srgbClr val="8A96A8"/>
-                </a:solidFill>
-              </a:rPr>
-              <a:t>基于车路协同的“鬼探头”协同感知方案</a:t>
-            </a:r>
-            <a:endParaRPr lang="en-US" sz="650" dirty="0"/>
-          </a:p>
-        </p:txBody>
-      </p:sp>
-      <p:sp>
-        <p:nvSpPr>
-          <p:cNvPr id="23" name="Text 20"/>
-          <p:cNvSpPr/>
-          <p:nvPr/>
-        </p:nvSpPr>
-        <p:spPr>
-          <a:xfrm>
-            <a:off x="9784080" y="6519672"/>
-            <a:ext cx="1783080" cy="164592"/>
-          </a:xfrm>
-          <a:prstGeom prst="rect">
-            <a:avLst/>
-          </a:prstGeom>
-          <a:noFill/>
-        </p:spPr>
-        <p:txBody>
-          <a:bodyPr wrap="square" lIns="0" tIns="0" rIns="0" bIns="0" rtlCol="0" anchor="ctr"/>
-          <a:lstStyle/>
-          <a:p>
-            <a:pPr marL="0" indent="0" algn="r">
-              <a:buNone/>
-            </a:pPr>
-            <a:r>
-              <a:rPr lang="en-US" sz="650" dirty="0">
-                <a:solidFill>
-                  <a:srgbClr val="8A96A8"/>
-                </a:solidFill>
-              </a:rPr>
-              <a:t>车辆看不见，路能看见</a:t>
-            </a:r>
-            <a:endParaRPr lang="en-US" sz="650" dirty="0"/>
+                <a:latin typeface="微软雅黑" panose="020B0503020204020204" charset="-122"/>
+                <a:ea typeface="微软雅黑" panose="020B0503020204020204" charset="-122"/>
+                <a:cs typeface="微软雅黑" panose="020B0503020204020204" pitchFamily="34" charset="-120"/>
+              </a:rPr>
+              <a:t>05  实现与采购：可用低成本设备做出闭环Demo</a:t>
+            </a:r>
+            <a:endParaRPr lang="en-US" sz="2300" dirty="0"/>
           </a:p>
         </p:txBody>
       </p:sp>
@@ -9654,40 +8669,23 @@
         <p:cNvGrpSpPr/>
         <p:nvPr/>
       </p:nvGrpSpPr>
-      <p:grpSpPr/>
-      <p:pic>
-        <p:nvPicPr>
-          <p:cNvPr id="2" name="图片 1"/>
-          <p:cNvPicPr>
-            <a:picLocks noChangeAspect="1"/>
-          </p:cNvPicPr>
-          <p:nvPr/>
-        </p:nvPicPr>
-        <p:blipFill>
-          <a:blip r:embed="rId1"/>
-          <a:stretch>
-            <a:fillRect/>
-          </a:stretch>
-        </p:blipFill>
-        <p:spPr>
-          <a:xfrm>
-            <a:off x="842645" y="1245870"/>
-            <a:ext cx="3545205" cy="5311140"/>
-          </a:xfrm>
-          <a:prstGeom prst="rect">
-            <a:avLst/>
-          </a:prstGeom>
-        </p:spPr>
-      </p:pic>
-      <p:sp>
-        <p:nvSpPr>
-          <p:cNvPr id="3" name="Text 0"/>
-          <p:cNvSpPr/>
-          <p:nvPr/>
-        </p:nvSpPr>
-        <p:spPr>
-          <a:xfrm>
-            <a:off x="598297" y="461518"/>
+      <p:grpSpPr>
+        <a:xfrm>
+          <a:off x="0" y="0"/>
+          <a:ext cx="0" cy="0"/>
+          <a:chOff x="0" y="0"/>
+          <a:chExt cx="0" cy="0"/>
+        </a:xfrm>
+      </p:grpSpPr>
+      <p:sp>
+        <p:nvSpPr>
+          <p:cNvPr id="2" name="Text 0"/>
+          <p:cNvSpPr/>
+          <p:nvPr/>
+        </p:nvSpPr>
+        <p:spPr>
+          <a:xfrm>
+            <a:off x="530352" y="384048"/>
             <a:ext cx="7223760" cy="384048"/>
           </a:xfrm>
           <a:prstGeom prst="rect">
@@ -9711,9 +8709,800 @@
                 <a:ea typeface="微软雅黑" panose="020B0503020204020204" charset="-122"/>
                 <a:cs typeface="微软雅黑" panose="020B0503020204020204" pitchFamily="34" charset="-120"/>
               </a:rPr>
-              <a:t>05  实现与采购：可用低成本设备做出闭环Demo</a:t>
+              <a:t>06  汇报结论：从展示小车，升级为展示交通系统能力</a:t>
             </a:r>
             <a:endParaRPr lang="en-US" sz="2300" dirty="0"/>
+          </a:p>
+        </p:txBody>
+      </p:sp>
+      <p:sp>
+        <p:nvSpPr>
+          <p:cNvPr id="4" name="Shape 2"/>
+          <p:cNvSpPr/>
+          <p:nvPr/>
+        </p:nvSpPr>
+        <p:spPr>
+          <a:xfrm>
+            <a:off x="530352" y="1106424"/>
+            <a:ext cx="10927080" cy="0"/>
+          </a:xfrm>
+          <a:prstGeom prst="line">
+            <a:avLst/>
+          </a:prstGeom>
+          <a:noFill/>
+          <a:ln w="10160">
+            <a:solidFill>
+              <a:srgbClr val="D9E3F0"/>
+            </a:solidFill>
+            <a:prstDash val="solid"/>
+          </a:ln>
+        </p:spPr>
+      </p:sp>
+      <p:sp>
+        <p:nvSpPr>
+          <p:cNvPr id="5" name="Text 3"/>
+          <p:cNvSpPr/>
+          <p:nvPr/>
+        </p:nvSpPr>
+        <p:spPr>
+          <a:xfrm>
+            <a:off x="777240" y="1444752"/>
+            <a:ext cx="1645920" cy="274320"/>
+          </a:xfrm>
+          <a:prstGeom prst="rect">
+            <a:avLst/>
+          </a:prstGeom>
+          <a:noFill/>
+        </p:spPr>
+        <p:txBody>
+          <a:bodyPr wrap="square" lIns="0" tIns="0" rIns="0" bIns="0" rtlCol="0" anchor="ctr"/>
+          <a:lstStyle/>
+          <a:p>
+            <a:pPr marL="0" indent="0">
+              <a:buNone/>
+            </a:pPr>
+            <a:r>
+              <a:rPr lang="en-US" sz="1500" b="1" dirty="0">
+                <a:solidFill>
+                  <a:srgbClr val="0B1F3A"/>
+                </a:solidFill>
+              </a:rPr>
+              <a:t>项目价值</a:t>
+            </a:r>
+            <a:endParaRPr lang="en-US" sz="1500" dirty="0"/>
+          </a:p>
+        </p:txBody>
+      </p:sp>
+      <p:sp>
+        <p:nvSpPr>
+          <p:cNvPr id="8" name="Text 6"/>
+          <p:cNvSpPr/>
+          <p:nvPr/>
+        </p:nvSpPr>
+        <p:spPr>
+          <a:xfrm>
+            <a:off x="868680" y="2624328"/>
+            <a:ext cx="1097280" cy="219456"/>
+          </a:xfrm>
+          <a:prstGeom prst="rect">
+            <a:avLst/>
+          </a:prstGeom>
+          <a:noFill/>
+        </p:spPr>
+        <p:txBody>
+          <a:bodyPr wrap="square" lIns="0" tIns="0" rIns="0" bIns="0" rtlCol="0" anchor="ctr"/>
+          <a:lstStyle/>
+          <a:p>
+            <a:pPr marL="0" indent="0">
+              <a:buNone/>
+            </a:pPr>
+            <a:r>
+              <a:rPr lang="en-US" sz="1140" b="1" dirty="0">
+                <a:solidFill>
+                  <a:srgbClr val="116DFF"/>
+                </a:solidFill>
+              </a:rPr>
+              <a:t>应用价值</a:t>
+            </a:r>
+            <a:endParaRPr lang="en-US" sz="1140" dirty="0"/>
+          </a:p>
+        </p:txBody>
+      </p:sp>
+      <p:sp>
+        <p:nvSpPr>
+          <p:cNvPr id="9" name="Text 7"/>
+          <p:cNvSpPr/>
+          <p:nvPr/>
+        </p:nvSpPr>
+        <p:spPr>
+          <a:xfrm>
+            <a:off x="1965960" y="2624328"/>
+            <a:ext cx="4434840" cy="246888"/>
+          </a:xfrm>
+          <a:prstGeom prst="rect">
+            <a:avLst/>
+          </a:prstGeom>
+          <a:noFill/>
+        </p:spPr>
+        <p:txBody>
+          <a:bodyPr wrap="square" lIns="0" tIns="0" rIns="0" bIns="0" rtlCol="0" anchor="ctr">
+            <a:normAutofit/>
+          </a:bodyPr>
+          <a:lstStyle/>
+          <a:p>
+            <a:pPr marL="0" indent="0">
+              <a:buNone/>
+            </a:pPr>
+            <a:r>
+              <a:rPr lang="en-US" sz="1120" dirty="0">
+                <a:solidFill>
+                  <a:srgbClr val="1E293B"/>
+                </a:solidFill>
+              </a:rPr>
+              <a:t>可延伸到校园、医院、园区、小区出入口和城市复杂路口。</a:t>
+            </a:r>
+            <a:endParaRPr lang="en-US" sz="1120" dirty="0"/>
+          </a:p>
+        </p:txBody>
+      </p:sp>
+      <p:sp>
+        <p:nvSpPr>
+          <p:cNvPr id="10" name="Text 8"/>
+          <p:cNvSpPr/>
+          <p:nvPr/>
+        </p:nvSpPr>
+        <p:spPr>
+          <a:xfrm>
+            <a:off x="868680" y="3374136"/>
+            <a:ext cx="1097280" cy="219456"/>
+          </a:xfrm>
+          <a:prstGeom prst="rect">
+            <a:avLst/>
+          </a:prstGeom>
+          <a:noFill/>
+        </p:spPr>
+        <p:txBody>
+          <a:bodyPr wrap="square" lIns="0" tIns="0" rIns="0" bIns="0" rtlCol="0" anchor="ctr"/>
+          <a:lstStyle/>
+          <a:p>
+            <a:pPr marL="0" indent="0">
+              <a:buNone/>
+            </a:pPr>
+            <a:r>
+              <a:rPr lang="en-US" sz="1140" b="1" dirty="0">
+                <a:solidFill>
+                  <a:srgbClr val="116DFF"/>
+                </a:solidFill>
+              </a:rPr>
+              <a:t>技术价值</a:t>
+            </a:r>
+            <a:endParaRPr lang="en-US" sz="1140" dirty="0"/>
+          </a:p>
+        </p:txBody>
+      </p:sp>
+      <p:sp>
+        <p:nvSpPr>
+          <p:cNvPr id="11" name="Text 9"/>
+          <p:cNvSpPr/>
+          <p:nvPr/>
+        </p:nvSpPr>
+        <p:spPr>
+          <a:xfrm>
+            <a:off x="1965960" y="3374136"/>
+            <a:ext cx="4434840" cy="246888"/>
+          </a:xfrm>
+          <a:prstGeom prst="rect">
+            <a:avLst/>
+          </a:prstGeom>
+          <a:noFill/>
+        </p:spPr>
+        <p:txBody>
+          <a:bodyPr wrap="square" lIns="0" tIns="0" rIns="0" bIns="0" rtlCol="0" anchor="ctr">
+            <a:normAutofit/>
+          </a:bodyPr>
+          <a:lstStyle/>
+          <a:p>
+            <a:pPr marL="0" indent="0">
+              <a:buNone/>
+            </a:pPr>
+            <a:r>
+              <a:rPr lang="en-US" sz="1120" dirty="0">
+                <a:solidFill>
+                  <a:srgbClr val="1E293B"/>
+                </a:solidFill>
+              </a:rPr>
+              <a:t>融合路侧感知、边缘AI、V2X、数字孪生与车辆控制。</a:t>
+            </a:r>
+            <a:endParaRPr lang="en-US" sz="1120" dirty="0"/>
+          </a:p>
+        </p:txBody>
+      </p:sp>
+      <p:sp>
+        <p:nvSpPr>
+          <p:cNvPr id="12" name="Text 10"/>
+          <p:cNvSpPr/>
+          <p:nvPr/>
+        </p:nvSpPr>
+        <p:spPr>
+          <a:xfrm>
+            <a:off x="868680" y="4123944"/>
+            <a:ext cx="1097280" cy="219456"/>
+          </a:xfrm>
+          <a:prstGeom prst="rect">
+            <a:avLst/>
+          </a:prstGeom>
+          <a:noFill/>
+        </p:spPr>
+        <p:txBody>
+          <a:bodyPr wrap="square" lIns="0" tIns="0" rIns="0" bIns="0" rtlCol="0" anchor="ctr"/>
+          <a:lstStyle/>
+          <a:p>
+            <a:pPr marL="0" indent="0">
+              <a:buNone/>
+            </a:pPr>
+            <a:r>
+              <a:rPr lang="en-US" sz="1140" b="1" dirty="0">
+                <a:solidFill>
+                  <a:srgbClr val="116DFF"/>
+                </a:solidFill>
+              </a:rPr>
+              <a:t>落地价值</a:t>
+            </a:r>
+            <a:endParaRPr lang="en-US" sz="1140" dirty="0"/>
+          </a:p>
+        </p:txBody>
+      </p:sp>
+      <p:sp>
+        <p:nvSpPr>
+          <p:cNvPr id="13" name="Text 11"/>
+          <p:cNvSpPr/>
+          <p:nvPr/>
+        </p:nvSpPr>
+        <p:spPr>
+          <a:xfrm>
+            <a:off x="1965960" y="4123944"/>
+            <a:ext cx="4434840" cy="246888"/>
+          </a:xfrm>
+          <a:prstGeom prst="rect">
+            <a:avLst/>
+          </a:prstGeom>
+          <a:noFill/>
+        </p:spPr>
+        <p:txBody>
+          <a:bodyPr wrap="square" lIns="0" tIns="0" rIns="0" bIns="0" rtlCol="0" anchor="ctr">
+            <a:normAutofit/>
+          </a:bodyPr>
+          <a:lstStyle/>
+          <a:p>
+            <a:pPr marL="0" indent="0">
+              <a:buNone/>
+            </a:pPr>
+            <a:r>
+              <a:rPr lang="en-US" sz="1120" dirty="0">
+                <a:solidFill>
+                  <a:srgbClr val="1E293B"/>
+                </a:solidFill>
+              </a:rPr>
+              <a:t>现有沙盘可复用，新增设备成本可控，Demo闭环清晰。</a:t>
+            </a:r>
+            <a:endParaRPr lang="en-US" sz="1120" dirty="0"/>
+          </a:p>
+        </p:txBody>
+      </p:sp>
+      <p:sp>
+        <p:nvSpPr>
+          <p:cNvPr id="14" name="Shape 12"/>
+          <p:cNvSpPr/>
+          <p:nvPr/>
+        </p:nvSpPr>
+        <p:spPr>
+          <a:xfrm>
+            <a:off x="6629400" y="1417320"/>
+            <a:ext cx="0" cy="4114800"/>
+          </a:xfrm>
+          <a:prstGeom prst="line">
+            <a:avLst/>
+          </a:prstGeom>
+          <a:noFill/>
+          <a:ln w="12700">
+            <a:solidFill>
+              <a:srgbClr val="D7E3F4"/>
+            </a:solidFill>
+            <a:prstDash val="solid"/>
+          </a:ln>
+        </p:spPr>
+      </p:sp>
+      <p:sp>
+        <p:nvSpPr>
+          <p:cNvPr id="15" name="Text 13"/>
+          <p:cNvSpPr/>
+          <p:nvPr/>
+        </p:nvSpPr>
+        <p:spPr>
+          <a:xfrm>
+            <a:off x="6995160" y="1444752"/>
+            <a:ext cx="1828800" cy="274320"/>
+          </a:xfrm>
+          <a:prstGeom prst="rect">
+            <a:avLst/>
+          </a:prstGeom>
+          <a:noFill/>
+        </p:spPr>
+        <p:txBody>
+          <a:bodyPr wrap="square" lIns="0" tIns="0" rIns="0" bIns="0" rtlCol="0" anchor="ctr"/>
+          <a:lstStyle/>
+          <a:p>
+            <a:pPr marL="0" indent="0">
+              <a:buNone/>
+            </a:pPr>
+            <a:r>
+              <a:rPr lang="en-US" sz="1500" b="1" dirty="0">
+                <a:solidFill>
+                  <a:srgbClr val="0B1F3A"/>
+                </a:solidFill>
+              </a:rPr>
+              <a:t>三阶段推进</a:t>
+            </a:r>
+            <a:endParaRPr lang="en-US" sz="1500" dirty="0"/>
+          </a:p>
+        </p:txBody>
+      </p:sp>
+      <p:sp>
+        <p:nvSpPr>
+          <p:cNvPr id="16" name="Text 14"/>
+          <p:cNvSpPr/>
+          <p:nvPr/>
+        </p:nvSpPr>
+        <p:spPr>
+          <a:xfrm>
+            <a:off x="7040880" y="1874520"/>
+            <a:ext cx="731520" cy="210312"/>
+          </a:xfrm>
+          <a:prstGeom prst="rect">
+            <a:avLst/>
+          </a:prstGeom>
+          <a:solidFill>
+            <a:srgbClr val="13A86B"/>
+          </a:solidFill>
+        </p:spPr>
+        <p:txBody>
+          <a:bodyPr wrap="square" lIns="254" tIns="254" rIns="254" bIns="254" rtlCol="0" anchor="ctr"/>
+          <a:lstStyle/>
+          <a:p>
+            <a:pPr marL="0" indent="0" algn="ctr">
+              <a:buNone/>
+            </a:pPr>
+            <a:r>
+              <a:rPr lang="en-US" sz="1050" b="1" dirty="0">
+                <a:solidFill>
+                  <a:srgbClr val="FFFFFF"/>
+                </a:solidFill>
+              </a:rPr>
+              <a:t>阶段1</a:t>
+            </a:r>
+            <a:endParaRPr lang="en-US" sz="1050" dirty="0"/>
+          </a:p>
+        </p:txBody>
+      </p:sp>
+      <p:sp>
+        <p:nvSpPr>
+          <p:cNvPr id="17" name="Text 15"/>
+          <p:cNvSpPr/>
+          <p:nvPr/>
+        </p:nvSpPr>
+        <p:spPr>
+          <a:xfrm>
+            <a:off x="7955280" y="1874520"/>
+            <a:ext cx="1828800" cy="201168"/>
+          </a:xfrm>
+          <a:prstGeom prst="rect">
+            <a:avLst/>
+          </a:prstGeom>
+          <a:noFill/>
+        </p:spPr>
+        <p:txBody>
+          <a:bodyPr wrap="square" lIns="0" tIns="0" rIns="0" bIns="0" rtlCol="0" anchor="ctr"/>
+          <a:lstStyle/>
+          <a:p>
+            <a:pPr marL="0" indent="0">
+              <a:buNone/>
+            </a:pPr>
+            <a:r>
+              <a:rPr lang="en-US" sz="1160" b="1" dirty="0">
+                <a:solidFill>
+                  <a:srgbClr val="1E293B"/>
+                </a:solidFill>
+              </a:rPr>
+              <a:t>稳定演示</a:t>
+            </a:r>
+            <a:endParaRPr lang="en-US" sz="1160" dirty="0"/>
+          </a:p>
+        </p:txBody>
+      </p:sp>
+      <p:sp>
+        <p:nvSpPr>
+          <p:cNvPr id="18" name="Text 16"/>
+          <p:cNvSpPr/>
+          <p:nvPr/>
+        </p:nvSpPr>
+        <p:spPr>
+          <a:xfrm>
+            <a:off x="7955280" y="2194560"/>
+            <a:ext cx="2926080" cy="320040"/>
+          </a:xfrm>
+          <a:prstGeom prst="rect">
+            <a:avLst/>
+          </a:prstGeom>
+          <a:noFill/>
+        </p:spPr>
+        <p:txBody>
+          <a:bodyPr wrap="square" lIns="0" tIns="0" rIns="0" bIns="0" rtlCol="0" anchor="ctr">
+            <a:normAutofit/>
+          </a:bodyPr>
+          <a:lstStyle/>
+          <a:p>
+            <a:pPr marL="0" indent="0">
+              <a:buNone/>
+            </a:pPr>
+            <a:r>
+              <a:rPr lang="en-US" sz="910" dirty="0">
+                <a:solidFill>
+                  <a:srgbClr val="67758A"/>
+                </a:solidFill>
+              </a:rPr>
+              <a:t>摄像头识别 + Wi‑Fi/MQTT模拟V2X + 小车减速</a:t>
+            </a:r>
+            <a:endParaRPr lang="en-US" sz="910" dirty="0"/>
+          </a:p>
+        </p:txBody>
+      </p:sp>
+      <p:sp>
+        <p:nvSpPr>
+          <p:cNvPr id="19" name="Text 17"/>
+          <p:cNvSpPr/>
+          <p:nvPr/>
+        </p:nvSpPr>
+        <p:spPr>
+          <a:xfrm>
+            <a:off x="7040880" y="2971800"/>
+            <a:ext cx="731520" cy="210312"/>
+          </a:xfrm>
+          <a:prstGeom prst="rect">
+            <a:avLst/>
+          </a:prstGeom>
+          <a:solidFill>
+            <a:srgbClr val="116DFF"/>
+          </a:solidFill>
+        </p:spPr>
+        <p:txBody>
+          <a:bodyPr wrap="square" lIns="254" tIns="254" rIns="254" bIns="254" rtlCol="0" anchor="ctr"/>
+          <a:lstStyle/>
+          <a:p>
+            <a:pPr marL="0" indent="0" algn="ctr">
+              <a:buNone/>
+            </a:pPr>
+            <a:r>
+              <a:rPr lang="en-US" sz="1050" b="1" dirty="0">
+                <a:solidFill>
+                  <a:srgbClr val="FFFFFF"/>
+                </a:solidFill>
+              </a:rPr>
+              <a:t>阶段2</a:t>
+            </a:r>
+            <a:endParaRPr lang="en-US" sz="1050" dirty="0"/>
+          </a:p>
+        </p:txBody>
+      </p:sp>
+      <p:sp>
+        <p:nvSpPr>
+          <p:cNvPr id="20" name="Text 18"/>
+          <p:cNvSpPr/>
+          <p:nvPr/>
+        </p:nvSpPr>
+        <p:spPr>
+          <a:xfrm>
+            <a:off x="7955280" y="2971800"/>
+            <a:ext cx="1828800" cy="201168"/>
+          </a:xfrm>
+          <a:prstGeom prst="rect">
+            <a:avLst/>
+          </a:prstGeom>
+          <a:noFill/>
+        </p:spPr>
+        <p:txBody>
+          <a:bodyPr wrap="square" lIns="0" tIns="0" rIns="0" bIns="0" rtlCol="0" anchor="ctr"/>
+          <a:lstStyle/>
+          <a:p>
+            <a:pPr marL="0" indent="0">
+              <a:buNone/>
+            </a:pPr>
+            <a:r>
+              <a:rPr lang="en-US" sz="1160" b="1" dirty="0">
+                <a:solidFill>
+                  <a:srgbClr val="1E293B"/>
+                </a:solidFill>
+              </a:rPr>
+              <a:t>真实设备增强</a:t>
+            </a:r>
+            <a:endParaRPr lang="en-US" sz="1160" dirty="0"/>
+          </a:p>
+        </p:txBody>
+      </p:sp>
+      <p:sp>
+        <p:nvSpPr>
+          <p:cNvPr id="21" name="Text 19"/>
+          <p:cNvSpPr/>
+          <p:nvPr/>
+        </p:nvSpPr>
+        <p:spPr>
+          <a:xfrm>
+            <a:off x="7955280" y="3291840"/>
+            <a:ext cx="2926080" cy="320040"/>
+          </a:xfrm>
+          <a:prstGeom prst="rect">
+            <a:avLst/>
+          </a:prstGeom>
+          <a:noFill/>
+        </p:spPr>
+        <p:txBody>
+          <a:bodyPr wrap="square" lIns="0" tIns="0" rIns="0" bIns="0" rtlCol="0" anchor="ctr">
+            <a:normAutofit/>
+          </a:bodyPr>
+          <a:lstStyle/>
+          <a:p>
+            <a:pPr marL="0" indent="0">
+              <a:buNone/>
+            </a:pPr>
+            <a:r>
+              <a:rPr lang="en-US" sz="910" dirty="0">
+                <a:solidFill>
+                  <a:srgbClr val="67758A"/>
+                </a:solidFill>
+              </a:rPr>
+              <a:t>接入RSU/C‑V2X、优化大屏UI、加入多目标跟踪</a:t>
+            </a:r>
+            <a:endParaRPr lang="en-US" sz="910" dirty="0"/>
+          </a:p>
+        </p:txBody>
+      </p:sp>
+      <p:sp>
+        <p:nvSpPr>
+          <p:cNvPr id="22" name="Text 20"/>
+          <p:cNvSpPr/>
+          <p:nvPr/>
+        </p:nvSpPr>
+        <p:spPr>
+          <a:xfrm>
+            <a:off x="7040880" y="4069080"/>
+            <a:ext cx="731520" cy="210312"/>
+          </a:xfrm>
+          <a:prstGeom prst="rect">
+            <a:avLst/>
+          </a:prstGeom>
+          <a:solidFill>
+            <a:srgbClr val="0B1F3A"/>
+          </a:solidFill>
+        </p:spPr>
+        <p:txBody>
+          <a:bodyPr wrap="square" lIns="254" tIns="254" rIns="254" bIns="254" rtlCol="0" anchor="ctr"/>
+          <a:lstStyle/>
+          <a:p>
+            <a:pPr marL="0" indent="0" algn="ctr">
+              <a:buNone/>
+            </a:pPr>
+            <a:r>
+              <a:rPr lang="en-US" sz="1050" b="1" dirty="0">
+                <a:solidFill>
+                  <a:srgbClr val="FFFFFF"/>
+                </a:solidFill>
+              </a:rPr>
+              <a:t>阶段3</a:t>
+            </a:r>
+            <a:endParaRPr lang="en-US" sz="1050" dirty="0"/>
+          </a:p>
+        </p:txBody>
+      </p:sp>
+      <p:sp>
+        <p:nvSpPr>
+          <p:cNvPr id="23" name="Text 21"/>
+          <p:cNvSpPr/>
+          <p:nvPr/>
+        </p:nvSpPr>
+        <p:spPr>
+          <a:xfrm>
+            <a:off x="7955280" y="4069080"/>
+            <a:ext cx="1828800" cy="201168"/>
+          </a:xfrm>
+          <a:prstGeom prst="rect">
+            <a:avLst/>
+          </a:prstGeom>
+          <a:noFill/>
+        </p:spPr>
+        <p:txBody>
+          <a:bodyPr wrap="square" lIns="0" tIns="0" rIns="0" bIns="0" rtlCol="0" anchor="ctr"/>
+          <a:lstStyle/>
+          <a:p>
+            <a:pPr marL="0" indent="0">
+              <a:buNone/>
+            </a:pPr>
+            <a:r>
+              <a:rPr lang="en-US" sz="1160" b="1" dirty="0">
+                <a:solidFill>
+                  <a:srgbClr val="1E293B"/>
+                </a:solidFill>
+              </a:rPr>
+              <a:t>扩展新场景</a:t>
+            </a:r>
+            <a:endParaRPr lang="en-US" sz="1160" dirty="0"/>
+          </a:p>
+        </p:txBody>
+      </p:sp>
+      <p:sp>
+        <p:nvSpPr>
+          <p:cNvPr id="24" name="Text 22"/>
+          <p:cNvSpPr/>
+          <p:nvPr/>
+        </p:nvSpPr>
+        <p:spPr>
+          <a:xfrm>
+            <a:off x="7955280" y="4389120"/>
+            <a:ext cx="2926080" cy="320040"/>
+          </a:xfrm>
+          <a:prstGeom prst="rect">
+            <a:avLst/>
+          </a:prstGeom>
+          <a:noFill/>
+        </p:spPr>
+        <p:txBody>
+          <a:bodyPr wrap="square" lIns="0" tIns="0" rIns="0" bIns="0" rtlCol="0" anchor="ctr">
+            <a:normAutofit/>
+          </a:bodyPr>
+          <a:lstStyle/>
+          <a:p>
+            <a:pPr marL="0" indent="0">
+              <a:buNone/>
+            </a:pPr>
+            <a:r>
+              <a:rPr lang="en-US" sz="910" dirty="0">
+                <a:solidFill>
+                  <a:srgbClr val="67758A"/>
+                </a:solidFill>
+              </a:rPr>
+              <a:t>救护车绿波、学校路口、电动车右转冲突预警</a:t>
+            </a:r>
+            <a:endParaRPr lang="en-US" sz="910" dirty="0"/>
+          </a:p>
+        </p:txBody>
+      </p:sp>
+      <p:sp>
+        <p:nvSpPr>
+          <p:cNvPr id="25" name="Shape 23"/>
+          <p:cNvSpPr/>
+          <p:nvPr/>
+        </p:nvSpPr>
+        <p:spPr>
+          <a:xfrm>
+            <a:off x="777240" y="5806440"/>
+            <a:ext cx="10698480" cy="411480"/>
+          </a:xfrm>
+          <a:prstGeom prst="roundRect">
+            <a:avLst>
+              <a:gd name="adj" fmla="val 17778"/>
+            </a:avLst>
+          </a:prstGeom>
+          <a:solidFill>
+            <a:srgbClr val="0B1F3A"/>
+          </a:solidFill>
+          <a:ln w="12700">
+            <a:solidFill>
+              <a:srgbClr val="0B1F3A"/>
+            </a:solidFill>
+            <a:prstDash val="solid"/>
+          </a:ln>
+        </p:spPr>
+      </p:sp>
+      <p:sp>
+        <p:nvSpPr>
+          <p:cNvPr id="26" name="Text 24"/>
+          <p:cNvSpPr/>
+          <p:nvPr/>
+        </p:nvSpPr>
+        <p:spPr>
+          <a:xfrm>
+            <a:off x="960120" y="5925312"/>
+            <a:ext cx="10332720" cy="164592"/>
+          </a:xfrm>
+          <a:prstGeom prst="rect">
+            <a:avLst/>
+          </a:prstGeom>
+          <a:noFill/>
+        </p:spPr>
+        <p:txBody>
+          <a:bodyPr wrap="square" lIns="0" tIns="0" rIns="0" bIns="0" rtlCol="0" anchor="ctr"/>
+          <a:lstStyle/>
+          <a:p>
+            <a:pPr marL="0" indent="0" algn="ctr">
+              <a:buNone/>
+            </a:pPr>
+            <a:r>
+              <a:rPr lang="en-US" sz="1120" b="1" dirty="0">
+                <a:solidFill>
+                  <a:srgbClr val="FFFFFF"/>
+                </a:solidFill>
+              </a:rPr>
+              <a:t>结论：以“鬼探头”高风险场景为切入点，把现有沙盘升级为车路协同安全预警验证平台。</a:t>
+            </a:r>
+            <a:endParaRPr lang="en-US" sz="1120" dirty="0"/>
+          </a:p>
+        </p:txBody>
+      </p:sp>
+      <p:sp>
+        <p:nvSpPr>
+          <p:cNvPr id="27" name="Text 25"/>
+          <p:cNvSpPr/>
+          <p:nvPr/>
+        </p:nvSpPr>
+        <p:spPr>
+          <a:xfrm>
+            <a:off x="566928" y="6519672"/>
+            <a:ext cx="7132320" cy="164592"/>
+          </a:xfrm>
+          <a:prstGeom prst="rect">
+            <a:avLst/>
+          </a:prstGeom>
+          <a:noFill/>
+        </p:spPr>
+        <p:txBody>
+          <a:bodyPr wrap="square" lIns="0" tIns="0" rIns="0" bIns="0" rtlCol="0" anchor="ctr"/>
+          <a:lstStyle/>
+          <a:p>
+            <a:pPr marL="0" indent="0">
+              <a:buNone/>
+            </a:pPr>
+            <a:r>
+              <a:rPr lang="en-US" sz="650" dirty="0">
+                <a:solidFill>
+                  <a:srgbClr val="8A96A8"/>
+                </a:solidFill>
+              </a:rPr>
+              <a:t>基于车路协同的“鬼探头”协同感知方案</a:t>
+            </a:r>
+            <a:endParaRPr lang="en-US" sz="650" dirty="0"/>
+          </a:p>
+        </p:txBody>
+      </p:sp>
+      <p:sp>
+        <p:nvSpPr>
+          <p:cNvPr id="28" name="Text 26"/>
+          <p:cNvSpPr/>
+          <p:nvPr/>
+        </p:nvSpPr>
+        <p:spPr>
+          <a:xfrm>
+            <a:off x="9784080" y="6519672"/>
+            <a:ext cx="1783080" cy="164592"/>
+          </a:xfrm>
+          <a:prstGeom prst="rect">
+            <a:avLst/>
+          </a:prstGeom>
+          <a:noFill/>
+        </p:spPr>
+        <p:txBody>
+          <a:bodyPr wrap="square" lIns="0" tIns="0" rIns="0" bIns="0" rtlCol="0" anchor="ctr"/>
+          <a:lstStyle/>
+          <a:p>
+            <a:pPr marL="0" indent="0" algn="r">
+              <a:buNone/>
+            </a:pPr>
+            <a:r>
+              <a:rPr lang="en-US" sz="650" dirty="0">
+                <a:solidFill>
+                  <a:srgbClr val="8A96A8"/>
+                </a:solidFill>
+              </a:rPr>
+              <a:t>车辆看不见，路能看见</a:t>
+            </a:r>
+            <a:endParaRPr lang="en-US" sz="650" dirty="0"/>
           </a:p>
         </p:txBody>
       </p:sp>
